--- a/presentation/Task-Management-System-Architecture-and-Implementation.pptx
+++ b/presentation/Task-Management-System-Architecture-and-Implementation.pptx
@@ -2,20 +2,20 @@
 <file path=ppt/presentation.xml><?xml version="1.0" encoding="utf-8"?>
 <p:presentation xmlns:p="http://schemas.openxmlformats.org/presentationml/2006/main">
   <p:sldMasterIdLst>
-    <p:sldMasterId xmlns:r="http://schemas.openxmlformats.org/officeDocument/2006/relationships" id="2147483648" r:id="Rfd1b845bb4134017"/>
+    <p:sldMasterId xmlns:r="http://schemas.openxmlformats.org/officeDocument/2006/relationships" id="2147483648" r:id="R62254fcb95964a0d"/>
   </p:sldMasterIdLst>
   <p:notesMasterIdLst>
-    <p:notesMasterId xmlns:r="http://schemas.openxmlformats.org/officeDocument/2006/relationships" r:id="Rffe5417934004ae5"/>
+    <p:notesMasterId xmlns:r="http://schemas.openxmlformats.org/officeDocument/2006/relationships" r:id="R804706d8a5a145b1"/>
   </p:notesMasterIdLst>
   <p:sldIdLst>
-    <p:sldId xmlns:r="http://schemas.openxmlformats.org/officeDocument/2006/relationships" id="256" r:id="R447b3b0988a14efc"/>
-    <p:sldId xmlns:r="http://schemas.openxmlformats.org/officeDocument/2006/relationships" id="257" r:id="R426767cd78374887"/>
-    <p:sldId xmlns:r="http://schemas.openxmlformats.org/officeDocument/2006/relationships" id="258" r:id="Rff2cc20c91e44646"/>
-    <p:sldId xmlns:r="http://schemas.openxmlformats.org/officeDocument/2006/relationships" id="259" r:id="Rc068138b4b6249fd"/>
-    <p:sldId xmlns:r="http://schemas.openxmlformats.org/officeDocument/2006/relationships" id="260" r:id="R6d5b4faa97ab427e"/>
-    <p:sldId xmlns:r="http://schemas.openxmlformats.org/officeDocument/2006/relationships" id="261" r:id="Re436e763cf9d4469"/>
-    <p:sldId xmlns:r="http://schemas.openxmlformats.org/officeDocument/2006/relationships" id="262" r:id="Rb1637ab61a584b68"/>
-    <p:sldId xmlns:r="http://schemas.openxmlformats.org/officeDocument/2006/relationships" id="263" r:id="Rf6424ee5b72e44d8"/>
+    <p:sldId xmlns:r="http://schemas.openxmlformats.org/officeDocument/2006/relationships" id="256" r:id="Rfcae4d50e2cf4b81"/>
+    <p:sldId xmlns:r="http://schemas.openxmlformats.org/officeDocument/2006/relationships" id="257" r:id="R5c15c52393fc40e5"/>
+    <p:sldId xmlns:r="http://schemas.openxmlformats.org/officeDocument/2006/relationships" id="258" r:id="R2853c9b0a8914140"/>
+    <p:sldId xmlns:r="http://schemas.openxmlformats.org/officeDocument/2006/relationships" id="259" r:id="Rb2de5c4b4f7749e5"/>
+    <p:sldId xmlns:r="http://schemas.openxmlformats.org/officeDocument/2006/relationships" id="260" r:id="Re1d68f8e9cc046bf"/>
+    <p:sldId xmlns:r="http://schemas.openxmlformats.org/officeDocument/2006/relationships" id="261" r:id="Rf17230842f414056"/>
+    <p:sldId xmlns:r="http://schemas.openxmlformats.org/officeDocument/2006/relationships" id="262" r:id="R0e38ae0e6073459e"/>
+    <p:sldId xmlns:r="http://schemas.openxmlformats.org/officeDocument/2006/relationships" id="263" r:id="R754309d19dc34875"/>
   </p:sldIdLst>
   <p:sldSz cx="12192000" cy="6858000"/>
   <p:notesSz cx="6858000" cy="9144000"/>
@@ -3382,12 +3382,12 @@
   </p:cSld>
   <p:clrMap bg1="lt1" tx1="dk1" bg2="lt2" tx2="dk2" accent1="accent1" accent2="accent2" accent3="accent3" accent4="accent4" accent5="accent5" accent6="accent6" hlink="hlink" folHlink="folHlink"/>
   <p:sldLayoutIdLst>
-    <p:sldLayoutId xmlns:r="http://schemas.openxmlformats.org/officeDocument/2006/relationships" id="2147483649" r:id="R06a7d24d26ff494e"/>
-    <p:sldLayoutId xmlns:r="http://schemas.openxmlformats.org/officeDocument/2006/relationships" id="2147483650" r:id="R49a6095e81cf43fc"/>
-    <p:sldLayoutId xmlns:r="http://schemas.openxmlformats.org/officeDocument/2006/relationships" id="2147483651" r:id="R3519b46386c4478d"/>
-    <p:sldLayoutId xmlns:r="http://schemas.openxmlformats.org/officeDocument/2006/relationships" id="2147483652" r:id="R05c2bf48fb274293"/>
-    <p:sldLayoutId xmlns:r="http://schemas.openxmlformats.org/officeDocument/2006/relationships" id="2147483653" r:id="R5bdec363c5ed4b0f"/>
-    <p:sldLayoutId xmlns:r="http://schemas.openxmlformats.org/officeDocument/2006/relationships" id="2147483654" r:id="R44c52d74dea34f9d"/>
+    <p:sldLayoutId xmlns:r="http://schemas.openxmlformats.org/officeDocument/2006/relationships" id="2147483649" r:id="Raead163f85fd4224"/>
+    <p:sldLayoutId xmlns:r="http://schemas.openxmlformats.org/officeDocument/2006/relationships" id="2147483650" r:id="Rd5ca1c24ce964a63"/>
+    <p:sldLayoutId xmlns:r="http://schemas.openxmlformats.org/officeDocument/2006/relationships" id="2147483651" r:id="R6d538ebcc6104481"/>
+    <p:sldLayoutId xmlns:r="http://schemas.openxmlformats.org/officeDocument/2006/relationships" id="2147483652" r:id="R8f571633049549f4"/>
+    <p:sldLayoutId xmlns:r="http://schemas.openxmlformats.org/officeDocument/2006/relationships" id="2147483653" r:id="R083361e9291745c3"/>
+    <p:sldLayoutId xmlns:r="http://schemas.openxmlformats.org/officeDocument/2006/relationships" id="2147483654" r:id="Rd0b11749bf0a4662"/>
   </p:sldLayoutIdLst>
   <p:txStyles>
     <p:titleStyle>
@@ -4008,6 +4008,7 @@
               </a:defRPr>
             </a:defPPr>
             <a:lvl1pPr algn="l">
+              <a:buNone/>
               <a:defRPr sz="4500" b="1">
                 <a:solidFill>
                   <a:srgbClr val="FFFFFF"/>
@@ -4018,6 +4019,7 @@
               </a:defRPr>
             </a:lvl1pPr>
             <a:lvl2pPr algn="l">
+              <a:buNone/>
               <a:defRPr sz="4500" b="1">
                 <a:solidFill>
                   <a:srgbClr val="FFFFFF"/>
@@ -4028,6 +4030,7 @@
               </a:defRPr>
             </a:lvl2pPr>
             <a:lvl3pPr algn="l">
+              <a:buNone/>
               <a:defRPr sz="4500" b="1">
                 <a:solidFill>
                   <a:srgbClr val="FFFFFF"/>
@@ -4038,6 +4041,7 @@
               </a:defRPr>
             </a:lvl3pPr>
             <a:lvl4pPr algn="l">
+              <a:buNone/>
               <a:defRPr sz="4500" b="1">
                 <a:solidFill>
                   <a:srgbClr val="FFFFFF"/>
@@ -4048,6 +4052,7 @@
               </a:defRPr>
             </a:lvl4pPr>
             <a:lvl5pPr algn="l">
+              <a:buNone/>
               <a:defRPr sz="4500" b="1">
                 <a:solidFill>
                   <a:srgbClr val="FFFFFF"/>
@@ -4058,6 +4063,7 @@
               </a:defRPr>
             </a:lvl5pPr>
             <a:lvl6pPr algn="l">
+              <a:buNone/>
               <a:defRPr sz="4500" b="1">
                 <a:solidFill>
                   <a:srgbClr val="FFFFFF"/>
@@ -4068,6 +4074,7 @@
               </a:defRPr>
             </a:lvl6pPr>
             <a:lvl7pPr algn="l">
+              <a:buNone/>
               <a:defRPr sz="4500" b="1">
                 <a:solidFill>
                   <a:srgbClr val="FFFFFF"/>
@@ -4078,6 +4085,7 @@
               </a:defRPr>
             </a:lvl7pPr>
             <a:lvl8pPr algn="l">
+              <a:buNone/>
               <a:defRPr sz="4500" b="1">
                 <a:solidFill>
                   <a:srgbClr val="FFFFFF"/>
@@ -4088,6 +4096,7 @@
               </a:defRPr>
             </a:lvl8pPr>
             <a:lvl9pPr algn="l">
+              <a:buNone/>
               <a:defRPr sz="4500" b="1">
                 <a:solidFill>
                   <a:srgbClr val="FFFFFF"/>
@@ -4100,6 +4109,7 @@
           </a:lstStyle>
           <a:p xmlns:a="http://schemas.openxmlformats.org/drawingml/2006/main">
             <a:pPr algn="l">
+              <a:buNone/>
               <a:defRPr sz="4500" b="1">
                 <a:solidFill>
                   <a:srgbClr val="FFFFFF"/>
@@ -4123,6 +4133,7 @@
           </a:p>
           <a:p xmlns:a="http://schemas.openxmlformats.org/drawingml/2006/main">
             <a:pPr algn="l">
+              <a:buNone/>
               <a:defRPr sz="4500" b="1">
                 <a:solidFill>
                   <a:srgbClr val="FFFFFF"/>
@@ -4190,6 +4201,7 @@
               </a:defRPr>
             </a:defPPr>
             <a:lvl1pPr algn="l">
+              <a:buNone/>
               <a:defRPr sz="2100" b="0">
                 <a:solidFill>
                   <a:srgbClr val="D8E7EE"/>
@@ -4200,6 +4212,7 @@
               </a:defRPr>
             </a:lvl1pPr>
             <a:lvl2pPr algn="l">
+              <a:buNone/>
               <a:defRPr sz="2100" b="0">
                 <a:solidFill>
                   <a:srgbClr val="D8E7EE"/>
@@ -4210,6 +4223,7 @@
               </a:defRPr>
             </a:lvl2pPr>
             <a:lvl3pPr algn="l">
+              <a:buNone/>
               <a:defRPr sz="2100" b="0">
                 <a:solidFill>
                   <a:srgbClr val="D8E7EE"/>
@@ -4220,6 +4234,7 @@
               </a:defRPr>
             </a:lvl3pPr>
             <a:lvl4pPr algn="l">
+              <a:buNone/>
               <a:defRPr sz="2100" b="0">
                 <a:solidFill>
                   <a:srgbClr val="D8E7EE"/>
@@ -4230,6 +4245,7 @@
               </a:defRPr>
             </a:lvl4pPr>
             <a:lvl5pPr algn="l">
+              <a:buNone/>
               <a:defRPr sz="2100" b="0">
                 <a:solidFill>
                   <a:srgbClr val="D8E7EE"/>
@@ -4240,6 +4256,7 @@
               </a:defRPr>
             </a:lvl5pPr>
             <a:lvl6pPr algn="l">
+              <a:buNone/>
               <a:defRPr sz="2100" b="0">
                 <a:solidFill>
                   <a:srgbClr val="D8E7EE"/>
@@ -4250,6 +4267,7 @@
               </a:defRPr>
             </a:lvl6pPr>
             <a:lvl7pPr algn="l">
+              <a:buNone/>
               <a:defRPr sz="2100" b="0">
                 <a:solidFill>
                   <a:srgbClr val="D8E7EE"/>
@@ -4260,6 +4278,7 @@
               </a:defRPr>
             </a:lvl7pPr>
             <a:lvl8pPr algn="l">
+              <a:buNone/>
               <a:defRPr sz="2100" b="0">
                 <a:solidFill>
                   <a:srgbClr val="D8E7EE"/>
@@ -4270,6 +4289,7 @@
               </a:defRPr>
             </a:lvl8pPr>
             <a:lvl9pPr algn="l">
+              <a:buNone/>
               <a:defRPr sz="2100" b="0">
                 <a:solidFill>
                   <a:srgbClr val="D8E7EE"/>
@@ -4282,6 +4302,7 @@
           </a:lstStyle>
           <a:p xmlns:a="http://schemas.openxmlformats.org/drawingml/2006/main">
             <a:pPr algn="l">
+              <a:buNone/>
               <a:defRPr sz="2100" b="0">
                 <a:solidFill>
                   <a:srgbClr val="D8E7EE"/>
@@ -4349,6 +4370,7 @@
               </a:defRPr>
             </a:defPPr>
             <a:lvl1pPr algn="l">
+              <a:buNone/>
               <a:defRPr sz="1500" b="0">
                 <a:solidFill>
                   <a:srgbClr val="FFFFFF"/>
@@ -4359,6 +4381,7 @@
               </a:defRPr>
             </a:lvl1pPr>
             <a:lvl2pPr algn="l">
+              <a:buNone/>
               <a:defRPr sz="1500" b="0">
                 <a:solidFill>
                   <a:srgbClr val="FFFFFF"/>
@@ -4369,6 +4392,7 @@
               </a:defRPr>
             </a:lvl2pPr>
             <a:lvl3pPr algn="l">
+              <a:buNone/>
               <a:defRPr sz="1500" b="0">
                 <a:solidFill>
                   <a:srgbClr val="FFFFFF"/>
@@ -4379,6 +4403,7 @@
               </a:defRPr>
             </a:lvl3pPr>
             <a:lvl4pPr algn="l">
+              <a:buNone/>
               <a:defRPr sz="1500" b="0">
                 <a:solidFill>
                   <a:srgbClr val="FFFFFF"/>
@@ -4389,6 +4414,7 @@
               </a:defRPr>
             </a:lvl4pPr>
             <a:lvl5pPr algn="l">
+              <a:buNone/>
               <a:defRPr sz="1500" b="0">
                 <a:solidFill>
                   <a:srgbClr val="FFFFFF"/>
@@ -4399,6 +4425,7 @@
               </a:defRPr>
             </a:lvl5pPr>
             <a:lvl6pPr algn="l">
+              <a:buNone/>
               <a:defRPr sz="1500" b="0">
                 <a:solidFill>
                   <a:srgbClr val="FFFFFF"/>
@@ -4409,6 +4436,7 @@
               </a:defRPr>
             </a:lvl6pPr>
             <a:lvl7pPr algn="l">
+              <a:buNone/>
               <a:defRPr sz="1500" b="0">
                 <a:solidFill>
                   <a:srgbClr val="FFFFFF"/>
@@ -4419,6 +4447,7 @@
               </a:defRPr>
             </a:lvl7pPr>
             <a:lvl8pPr algn="l">
+              <a:buNone/>
               <a:defRPr sz="1500" b="0">
                 <a:solidFill>
                   <a:srgbClr val="FFFFFF"/>
@@ -4429,6 +4458,7 @@
               </a:defRPr>
             </a:lvl8pPr>
             <a:lvl9pPr algn="l">
+              <a:buNone/>
               <a:defRPr sz="1500" b="0">
                 <a:solidFill>
                   <a:srgbClr val="FFFFFF"/>
@@ -4441,6 +4471,7 @@
           </a:lstStyle>
           <a:p xmlns:a="http://schemas.openxmlformats.org/drawingml/2006/main">
             <a:pPr algn="l">
+              <a:buNone/>
               <a:defRPr sz="1500" b="0">
                 <a:solidFill>
                   <a:srgbClr val="FFFFFF"/>
@@ -4508,6 +4539,7 @@
               </a:defRPr>
             </a:defPPr>
             <a:lvl1pPr algn="l">
+              <a:buNone/>
               <a:defRPr sz="1350" b="0">
                 <a:solidFill>
                   <a:srgbClr val="B7C9D3"/>
@@ -4518,6 +4550,7 @@
               </a:defRPr>
             </a:lvl1pPr>
             <a:lvl2pPr algn="l">
+              <a:buNone/>
               <a:defRPr sz="1350" b="0">
                 <a:solidFill>
                   <a:srgbClr val="B7C9D3"/>
@@ -4528,6 +4561,7 @@
               </a:defRPr>
             </a:lvl2pPr>
             <a:lvl3pPr algn="l">
+              <a:buNone/>
               <a:defRPr sz="1350" b="0">
                 <a:solidFill>
                   <a:srgbClr val="B7C9D3"/>
@@ -4538,6 +4572,7 @@
               </a:defRPr>
             </a:lvl3pPr>
             <a:lvl4pPr algn="l">
+              <a:buNone/>
               <a:defRPr sz="1350" b="0">
                 <a:solidFill>
                   <a:srgbClr val="B7C9D3"/>
@@ -4548,6 +4583,7 @@
               </a:defRPr>
             </a:lvl4pPr>
             <a:lvl5pPr algn="l">
+              <a:buNone/>
               <a:defRPr sz="1350" b="0">
                 <a:solidFill>
                   <a:srgbClr val="B7C9D3"/>
@@ -4558,6 +4594,7 @@
               </a:defRPr>
             </a:lvl5pPr>
             <a:lvl6pPr algn="l">
+              <a:buNone/>
               <a:defRPr sz="1350" b="0">
                 <a:solidFill>
                   <a:srgbClr val="B7C9D3"/>
@@ -4568,6 +4605,7 @@
               </a:defRPr>
             </a:lvl6pPr>
             <a:lvl7pPr algn="l">
+              <a:buNone/>
               <a:defRPr sz="1350" b="0">
                 <a:solidFill>
                   <a:srgbClr val="B7C9D3"/>
@@ -4578,6 +4616,7 @@
               </a:defRPr>
             </a:lvl7pPr>
             <a:lvl8pPr algn="l">
+              <a:buNone/>
               <a:defRPr sz="1350" b="0">
                 <a:solidFill>
                   <a:srgbClr val="B7C9D3"/>
@@ -4588,6 +4627,7 @@
               </a:defRPr>
             </a:lvl8pPr>
             <a:lvl9pPr algn="l">
+              <a:buNone/>
               <a:defRPr sz="1350" b="0">
                 <a:solidFill>
                   <a:srgbClr val="B7C9D3"/>
@@ -4600,6 +4640,7 @@
           </a:lstStyle>
           <a:p xmlns:a="http://schemas.openxmlformats.org/drawingml/2006/main">
             <a:pPr algn="l">
+              <a:buNone/>
               <a:defRPr sz="1350" b="0">
                 <a:solidFill>
                   <a:srgbClr val="B7C9D3"/>
@@ -4696,6 +4737,7 @@
               </a:defRPr>
             </a:defPPr>
             <a:lvl1pPr algn="l">
+              <a:buNone/>
               <a:defRPr sz="3300" b="1">
                 <a:solidFill>
                   <a:srgbClr val="102A43"/>
@@ -4706,6 +4748,7 @@
               </a:defRPr>
             </a:lvl1pPr>
             <a:lvl2pPr algn="l">
+              <a:buNone/>
               <a:defRPr sz="3300" b="1">
                 <a:solidFill>
                   <a:srgbClr val="102A43"/>
@@ -4716,6 +4759,7 @@
               </a:defRPr>
             </a:lvl2pPr>
             <a:lvl3pPr algn="l">
+              <a:buNone/>
               <a:defRPr sz="3300" b="1">
                 <a:solidFill>
                   <a:srgbClr val="102A43"/>
@@ -4726,6 +4770,7 @@
               </a:defRPr>
             </a:lvl3pPr>
             <a:lvl4pPr algn="l">
+              <a:buNone/>
               <a:defRPr sz="3300" b="1">
                 <a:solidFill>
                   <a:srgbClr val="102A43"/>
@@ -4736,6 +4781,7 @@
               </a:defRPr>
             </a:lvl4pPr>
             <a:lvl5pPr algn="l">
+              <a:buNone/>
               <a:defRPr sz="3300" b="1">
                 <a:solidFill>
                   <a:srgbClr val="102A43"/>
@@ -4746,6 +4792,7 @@
               </a:defRPr>
             </a:lvl5pPr>
             <a:lvl6pPr algn="l">
+              <a:buNone/>
               <a:defRPr sz="3300" b="1">
                 <a:solidFill>
                   <a:srgbClr val="102A43"/>
@@ -4756,6 +4803,7 @@
               </a:defRPr>
             </a:lvl6pPr>
             <a:lvl7pPr algn="l">
+              <a:buNone/>
               <a:defRPr sz="3300" b="1">
                 <a:solidFill>
                   <a:srgbClr val="102A43"/>
@@ -4766,6 +4814,7 @@
               </a:defRPr>
             </a:lvl7pPr>
             <a:lvl8pPr algn="l">
+              <a:buNone/>
               <a:defRPr sz="3300" b="1">
                 <a:solidFill>
                   <a:srgbClr val="102A43"/>
@@ -4776,6 +4825,7 @@
               </a:defRPr>
             </a:lvl8pPr>
             <a:lvl9pPr algn="l">
+              <a:buNone/>
               <a:defRPr sz="3300" b="1">
                 <a:solidFill>
                   <a:srgbClr val="102A43"/>
@@ -4788,6 +4838,7 @@
           </a:lstStyle>
           <a:p xmlns:a="http://schemas.openxmlformats.org/drawingml/2006/main">
             <a:pPr algn="l">
+              <a:buNone/>
               <a:defRPr sz="3300" b="1">
                 <a:solidFill>
                   <a:srgbClr val="102A43"/>
@@ -4855,6 +4906,7 @@
               </a:defRPr>
             </a:defPPr>
             <a:lvl1pPr algn="l">
+              <a:buNone/>
               <a:defRPr sz="1650" b="0">
                 <a:solidFill>
                   <a:srgbClr val="526777"/>
@@ -4865,6 +4917,7 @@
               </a:defRPr>
             </a:lvl1pPr>
             <a:lvl2pPr algn="l">
+              <a:buNone/>
               <a:defRPr sz="1650" b="0">
                 <a:solidFill>
                   <a:srgbClr val="526777"/>
@@ -4875,6 +4928,7 @@
               </a:defRPr>
             </a:lvl2pPr>
             <a:lvl3pPr algn="l">
+              <a:buNone/>
               <a:defRPr sz="1650" b="0">
                 <a:solidFill>
                   <a:srgbClr val="526777"/>
@@ -4885,6 +4939,7 @@
               </a:defRPr>
             </a:lvl3pPr>
             <a:lvl4pPr algn="l">
+              <a:buNone/>
               <a:defRPr sz="1650" b="0">
                 <a:solidFill>
                   <a:srgbClr val="526777"/>
@@ -4895,6 +4950,7 @@
               </a:defRPr>
             </a:lvl4pPr>
             <a:lvl5pPr algn="l">
+              <a:buNone/>
               <a:defRPr sz="1650" b="0">
                 <a:solidFill>
                   <a:srgbClr val="526777"/>
@@ -4905,6 +4961,7 @@
               </a:defRPr>
             </a:lvl5pPr>
             <a:lvl6pPr algn="l">
+              <a:buNone/>
               <a:defRPr sz="1650" b="0">
                 <a:solidFill>
                   <a:srgbClr val="526777"/>
@@ -4915,6 +4972,7 @@
               </a:defRPr>
             </a:lvl6pPr>
             <a:lvl7pPr algn="l">
+              <a:buNone/>
               <a:defRPr sz="1650" b="0">
                 <a:solidFill>
                   <a:srgbClr val="526777"/>
@@ -4925,6 +4983,7 @@
               </a:defRPr>
             </a:lvl7pPr>
             <a:lvl8pPr algn="l">
+              <a:buNone/>
               <a:defRPr sz="1650" b="0">
                 <a:solidFill>
                   <a:srgbClr val="526777"/>
@@ -4935,6 +4994,7 @@
               </a:defRPr>
             </a:lvl8pPr>
             <a:lvl9pPr algn="l">
+              <a:buNone/>
               <a:defRPr sz="1650" b="0">
                 <a:solidFill>
                   <a:srgbClr val="526777"/>
@@ -4947,6 +5007,7 @@
           </a:lstStyle>
           <a:p xmlns:a="http://schemas.openxmlformats.org/drawingml/2006/main">
             <a:pPr algn="l">
+              <a:buNone/>
               <a:defRPr sz="1650" b="0">
                 <a:solidFill>
                   <a:srgbClr val="526777"/>
@@ -5045,6 +5106,7 @@
               </a:defRPr>
             </a:defPPr>
             <a:lvl1pPr algn="l">
+              <a:buNone/>
               <a:defRPr sz="1125" b="0">
                 <a:solidFill>
                   <a:srgbClr val="526777"/>
@@ -5055,6 +5117,7 @@
               </a:defRPr>
             </a:lvl1pPr>
             <a:lvl2pPr algn="l">
+              <a:buNone/>
               <a:defRPr sz="1125" b="0">
                 <a:solidFill>
                   <a:srgbClr val="526777"/>
@@ -5065,6 +5128,7 @@
               </a:defRPr>
             </a:lvl2pPr>
             <a:lvl3pPr algn="l">
+              <a:buNone/>
               <a:defRPr sz="1125" b="0">
                 <a:solidFill>
                   <a:srgbClr val="526777"/>
@@ -5075,6 +5139,7 @@
               </a:defRPr>
             </a:lvl3pPr>
             <a:lvl4pPr algn="l">
+              <a:buNone/>
               <a:defRPr sz="1125" b="0">
                 <a:solidFill>
                   <a:srgbClr val="526777"/>
@@ -5085,6 +5150,7 @@
               </a:defRPr>
             </a:lvl4pPr>
             <a:lvl5pPr algn="l">
+              <a:buNone/>
               <a:defRPr sz="1125" b="0">
                 <a:solidFill>
                   <a:srgbClr val="526777"/>
@@ -5095,6 +5161,7 @@
               </a:defRPr>
             </a:lvl5pPr>
             <a:lvl6pPr algn="l">
+              <a:buNone/>
               <a:defRPr sz="1125" b="0">
                 <a:solidFill>
                   <a:srgbClr val="526777"/>
@@ -5105,6 +5172,7 @@
               </a:defRPr>
             </a:lvl6pPr>
             <a:lvl7pPr algn="l">
+              <a:buNone/>
               <a:defRPr sz="1125" b="0">
                 <a:solidFill>
                   <a:srgbClr val="526777"/>
@@ -5115,6 +5183,7 @@
               </a:defRPr>
             </a:lvl7pPr>
             <a:lvl8pPr algn="l">
+              <a:buNone/>
               <a:defRPr sz="1125" b="0">
                 <a:solidFill>
                   <a:srgbClr val="526777"/>
@@ -5125,6 +5194,7 @@
               </a:defRPr>
             </a:lvl8pPr>
             <a:lvl9pPr algn="l">
+              <a:buNone/>
               <a:defRPr sz="1125" b="0">
                 <a:solidFill>
                   <a:srgbClr val="526777"/>
@@ -5137,6 +5207,7 @@
           </a:lstStyle>
           <a:p xmlns:a="http://schemas.openxmlformats.org/drawingml/2006/main">
             <a:pPr algn="l">
+              <a:buNone/>
               <a:defRPr sz="1125" b="0">
                 <a:solidFill>
                   <a:srgbClr val="526777"/>
@@ -5204,6 +5275,7 @@
               </a:defRPr>
             </a:defPPr>
             <a:lvl1pPr algn="r">
+              <a:buNone/>
               <a:defRPr sz="1125" b="1">
                 <a:solidFill>
                   <a:srgbClr val="526777"/>
@@ -5214,6 +5286,7 @@
               </a:defRPr>
             </a:lvl1pPr>
             <a:lvl2pPr algn="r">
+              <a:buNone/>
               <a:defRPr sz="1125" b="1">
                 <a:solidFill>
                   <a:srgbClr val="526777"/>
@@ -5224,6 +5297,7 @@
               </a:defRPr>
             </a:lvl2pPr>
             <a:lvl3pPr algn="r">
+              <a:buNone/>
               <a:defRPr sz="1125" b="1">
                 <a:solidFill>
                   <a:srgbClr val="526777"/>
@@ -5234,6 +5308,7 @@
               </a:defRPr>
             </a:lvl3pPr>
             <a:lvl4pPr algn="r">
+              <a:buNone/>
               <a:defRPr sz="1125" b="1">
                 <a:solidFill>
                   <a:srgbClr val="526777"/>
@@ -5244,6 +5319,7 @@
               </a:defRPr>
             </a:lvl4pPr>
             <a:lvl5pPr algn="r">
+              <a:buNone/>
               <a:defRPr sz="1125" b="1">
                 <a:solidFill>
                   <a:srgbClr val="526777"/>
@@ -5254,6 +5330,7 @@
               </a:defRPr>
             </a:lvl5pPr>
             <a:lvl6pPr algn="r">
+              <a:buNone/>
               <a:defRPr sz="1125" b="1">
                 <a:solidFill>
                   <a:srgbClr val="526777"/>
@@ -5264,6 +5341,7 @@
               </a:defRPr>
             </a:lvl6pPr>
             <a:lvl7pPr algn="r">
+              <a:buNone/>
               <a:defRPr sz="1125" b="1">
                 <a:solidFill>
                   <a:srgbClr val="526777"/>
@@ -5274,6 +5352,7 @@
               </a:defRPr>
             </a:lvl7pPr>
             <a:lvl8pPr algn="r">
+              <a:buNone/>
               <a:defRPr sz="1125" b="1">
                 <a:solidFill>
                   <a:srgbClr val="526777"/>
@@ -5284,6 +5363,7 @@
               </a:defRPr>
             </a:lvl8pPr>
             <a:lvl9pPr algn="r">
+              <a:buNone/>
               <a:defRPr sz="1125" b="1">
                 <a:solidFill>
                   <a:srgbClr val="526777"/>
@@ -5296,6 +5376,7 @@
           </a:lstStyle>
           <a:p xmlns:a="http://schemas.openxmlformats.org/drawingml/2006/main">
             <a:pPr algn="r">
+              <a:buNone/>
               <a:defRPr sz="1125" b="1">
                 <a:solidFill>
                   <a:srgbClr val="526777"/>
@@ -5396,6 +5477,7 @@
               </a:defRPr>
             </a:defPPr>
             <a:lvl1pPr algn="ctr">
+              <a:buNone/>
               <a:defRPr sz="1650" b="1">
                 <a:solidFill>
                   <a:srgbClr val="102A43"/>
@@ -5406,6 +5488,7 @@
               </a:defRPr>
             </a:lvl1pPr>
             <a:lvl2pPr algn="ctr">
+              <a:buNone/>
               <a:defRPr sz="1650" b="1">
                 <a:solidFill>
                   <a:srgbClr val="102A43"/>
@@ -5416,6 +5499,7 @@
               </a:defRPr>
             </a:lvl2pPr>
             <a:lvl3pPr algn="ctr">
+              <a:buNone/>
               <a:defRPr sz="1650" b="1">
                 <a:solidFill>
                   <a:srgbClr val="102A43"/>
@@ -5426,6 +5510,7 @@
               </a:defRPr>
             </a:lvl3pPr>
             <a:lvl4pPr algn="ctr">
+              <a:buNone/>
               <a:defRPr sz="1650" b="1">
                 <a:solidFill>
                   <a:srgbClr val="102A43"/>
@@ -5436,6 +5521,7 @@
               </a:defRPr>
             </a:lvl4pPr>
             <a:lvl5pPr algn="ctr">
+              <a:buNone/>
               <a:defRPr sz="1650" b="1">
                 <a:solidFill>
                   <a:srgbClr val="102A43"/>
@@ -5446,6 +5532,7 @@
               </a:defRPr>
             </a:lvl5pPr>
             <a:lvl6pPr algn="ctr">
+              <a:buNone/>
               <a:defRPr sz="1650" b="1">
                 <a:solidFill>
                   <a:srgbClr val="102A43"/>
@@ -5456,6 +5543,7 @@
               </a:defRPr>
             </a:lvl6pPr>
             <a:lvl7pPr algn="ctr">
+              <a:buNone/>
               <a:defRPr sz="1650" b="1">
                 <a:solidFill>
                   <a:srgbClr val="102A43"/>
@@ -5466,6 +5554,7 @@
               </a:defRPr>
             </a:lvl7pPr>
             <a:lvl8pPr algn="ctr">
+              <a:buNone/>
               <a:defRPr sz="1650" b="1">
                 <a:solidFill>
                   <a:srgbClr val="102A43"/>
@@ -5476,6 +5565,7 @@
               </a:defRPr>
             </a:lvl8pPr>
             <a:lvl9pPr algn="ctr">
+              <a:buNone/>
               <a:defRPr sz="1650" b="1">
                 <a:solidFill>
                   <a:srgbClr val="102A43"/>
@@ -5488,6 +5578,7 @@
           </a:lstStyle>
           <a:p xmlns:a="http://schemas.openxmlformats.org/drawingml/2006/main">
             <a:pPr algn="ctr">
+              <a:buNone/>
               <a:defRPr sz="1650" b="1">
                 <a:solidFill>
                   <a:srgbClr val="102A43"/>
@@ -5555,6 +5646,7 @@
               </a:defRPr>
             </a:defPPr>
             <a:lvl1pPr algn="ctr">
+              <a:buNone/>
               <a:defRPr sz="1425" b="0">
                 <a:solidFill>
                   <a:srgbClr val="172B3A"/>
@@ -5565,6 +5657,7 @@
               </a:defRPr>
             </a:lvl1pPr>
             <a:lvl2pPr algn="ctr">
+              <a:buNone/>
               <a:defRPr sz="1425" b="0">
                 <a:solidFill>
                   <a:srgbClr val="172B3A"/>
@@ -5575,6 +5668,7 @@
               </a:defRPr>
             </a:lvl2pPr>
             <a:lvl3pPr algn="ctr">
+              <a:buNone/>
               <a:defRPr sz="1425" b="0">
                 <a:solidFill>
                   <a:srgbClr val="172B3A"/>
@@ -5585,6 +5679,7 @@
               </a:defRPr>
             </a:lvl3pPr>
             <a:lvl4pPr algn="ctr">
+              <a:buNone/>
               <a:defRPr sz="1425" b="0">
                 <a:solidFill>
                   <a:srgbClr val="172B3A"/>
@@ -5595,6 +5690,7 @@
               </a:defRPr>
             </a:lvl4pPr>
             <a:lvl5pPr algn="ctr">
+              <a:buNone/>
               <a:defRPr sz="1425" b="0">
                 <a:solidFill>
                   <a:srgbClr val="172B3A"/>
@@ -5605,6 +5701,7 @@
               </a:defRPr>
             </a:lvl5pPr>
             <a:lvl6pPr algn="ctr">
+              <a:buNone/>
               <a:defRPr sz="1425" b="0">
                 <a:solidFill>
                   <a:srgbClr val="172B3A"/>
@@ -5615,6 +5712,7 @@
               </a:defRPr>
             </a:lvl6pPr>
             <a:lvl7pPr algn="ctr">
+              <a:buNone/>
               <a:defRPr sz="1425" b="0">
                 <a:solidFill>
                   <a:srgbClr val="172B3A"/>
@@ -5625,6 +5723,7 @@
               </a:defRPr>
             </a:lvl7pPr>
             <a:lvl8pPr algn="ctr">
+              <a:buNone/>
               <a:defRPr sz="1425" b="0">
                 <a:solidFill>
                   <a:srgbClr val="172B3A"/>
@@ -5635,6 +5734,7 @@
               </a:defRPr>
             </a:lvl8pPr>
             <a:lvl9pPr algn="ctr">
+              <a:buNone/>
               <a:defRPr sz="1425" b="0">
                 <a:solidFill>
                   <a:srgbClr val="172B3A"/>
@@ -5647,6 +5747,7 @@
           </a:lstStyle>
           <a:p xmlns:a="http://schemas.openxmlformats.org/drawingml/2006/main">
             <a:pPr algn="ctr">
+              <a:buNone/>
               <a:defRPr sz="1425" b="0">
                 <a:solidFill>
                   <a:srgbClr val="172B3A"/>
@@ -5778,6 +5879,7 @@
               </a:defRPr>
             </a:defPPr>
             <a:lvl1pPr algn="ctr">
+              <a:buNone/>
               <a:defRPr sz="1650" b="1">
                 <a:solidFill>
                   <a:srgbClr val="102A43"/>
@@ -5788,6 +5890,7 @@
               </a:defRPr>
             </a:lvl1pPr>
             <a:lvl2pPr algn="ctr">
+              <a:buNone/>
               <a:defRPr sz="1650" b="1">
                 <a:solidFill>
                   <a:srgbClr val="102A43"/>
@@ -5798,6 +5901,7 @@
               </a:defRPr>
             </a:lvl2pPr>
             <a:lvl3pPr algn="ctr">
+              <a:buNone/>
               <a:defRPr sz="1650" b="1">
                 <a:solidFill>
                   <a:srgbClr val="102A43"/>
@@ -5808,6 +5912,7 @@
               </a:defRPr>
             </a:lvl3pPr>
             <a:lvl4pPr algn="ctr">
+              <a:buNone/>
               <a:defRPr sz="1650" b="1">
                 <a:solidFill>
                   <a:srgbClr val="102A43"/>
@@ -5818,6 +5923,7 @@
               </a:defRPr>
             </a:lvl4pPr>
             <a:lvl5pPr algn="ctr">
+              <a:buNone/>
               <a:defRPr sz="1650" b="1">
                 <a:solidFill>
                   <a:srgbClr val="102A43"/>
@@ -5828,6 +5934,7 @@
               </a:defRPr>
             </a:lvl5pPr>
             <a:lvl6pPr algn="ctr">
+              <a:buNone/>
               <a:defRPr sz="1650" b="1">
                 <a:solidFill>
                   <a:srgbClr val="102A43"/>
@@ -5838,6 +5945,7 @@
               </a:defRPr>
             </a:lvl6pPr>
             <a:lvl7pPr algn="ctr">
+              <a:buNone/>
               <a:defRPr sz="1650" b="1">
                 <a:solidFill>
                   <a:srgbClr val="102A43"/>
@@ -5848,6 +5956,7 @@
               </a:defRPr>
             </a:lvl7pPr>
             <a:lvl8pPr algn="ctr">
+              <a:buNone/>
               <a:defRPr sz="1650" b="1">
                 <a:solidFill>
                   <a:srgbClr val="102A43"/>
@@ -5858,6 +5967,7 @@
               </a:defRPr>
             </a:lvl8pPr>
             <a:lvl9pPr algn="ctr">
+              <a:buNone/>
               <a:defRPr sz="1650" b="1">
                 <a:solidFill>
                   <a:srgbClr val="102A43"/>
@@ -5870,6 +5980,7 @@
           </a:lstStyle>
           <a:p xmlns:a="http://schemas.openxmlformats.org/drawingml/2006/main">
             <a:pPr algn="ctr">
+              <a:buNone/>
               <a:defRPr sz="1650" b="1">
                 <a:solidFill>
                   <a:srgbClr val="102A43"/>
@@ -5937,6 +6048,7 @@
               </a:defRPr>
             </a:defPPr>
             <a:lvl1pPr algn="ctr">
+              <a:buNone/>
               <a:defRPr sz="1425" b="0">
                 <a:solidFill>
                   <a:srgbClr val="172B3A"/>
@@ -5947,6 +6059,7 @@
               </a:defRPr>
             </a:lvl1pPr>
             <a:lvl2pPr algn="ctr">
+              <a:buNone/>
               <a:defRPr sz="1425" b="0">
                 <a:solidFill>
                   <a:srgbClr val="172B3A"/>
@@ -5957,6 +6070,7 @@
               </a:defRPr>
             </a:lvl2pPr>
             <a:lvl3pPr algn="ctr">
+              <a:buNone/>
               <a:defRPr sz="1425" b="0">
                 <a:solidFill>
                   <a:srgbClr val="172B3A"/>
@@ -5967,6 +6081,7 @@
               </a:defRPr>
             </a:lvl3pPr>
             <a:lvl4pPr algn="ctr">
+              <a:buNone/>
               <a:defRPr sz="1425" b="0">
                 <a:solidFill>
                   <a:srgbClr val="172B3A"/>
@@ -5977,6 +6092,7 @@
               </a:defRPr>
             </a:lvl4pPr>
             <a:lvl5pPr algn="ctr">
+              <a:buNone/>
               <a:defRPr sz="1425" b="0">
                 <a:solidFill>
                   <a:srgbClr val="172B3A"/>
@@ -5987,6 +6103,7 @@
               </a:defRPr>
             </a:lvl5pPr>
             <a:lvl6pPr algn="ctr">
+              <a:buNone/>
               <a:defRPr sz="1425" b="0">
                 <a:solidFill>
                   <a:srgbClr val="172B3A"/>
@@ -5997,6 +6114,7 @@
               </a:defRPr>
             </a:lvl6pPr>
             <a:lvl7pPr algn="ctr">
+              <a:buNone/>
               <a:defRPr sz="1425" b="0">
                 <a:solidFill>
                   <a:srgbClr val="172B3A"/>
@@ -6007,6 +6125,7 @@
               </a:defRPr>
             </a:lvl7pPr>
             <a:lvl8pPr algn="ctr">
+              <a:buNone/>
               <a:defRPr sz="1425" b="0">
                 <a:solidFill>
                   <a:srgbClr val="172B3A"/>
@@ -6017,6 +6136,7 @@
               </a:defRPr>
             </a:lvl8pPr>
             <a:lvl9pPr algn="ctr">
+              <a:buNone/>
               <a:defRPr sz="1425" b="0">
                 <a:solidFill>
                   <a:srgbClr val="172B3A"/>
@@ -6029,6 +6149,7 @@
           </a:lstStyle>
           <a:p xmlns:a="http://schemas.openxmlformats.org/drawingml/2006/main">
             <a:pPr algn="ctr">
+              <a:buNone/>
               <a:defRPr sz="1425" b="0">
                 <a:solidFill>
                   <a:srgbClr val="172B3A"/>
@@ -6052,6 +6173,7 @@
           </a:p>
           <a:p xmlns:a="http://schemas.openxmlformats.org/drawingml/2006/main">
             <a:pPr algn="ctr">
+              <a:buNone/>
               <a:defRPr sz="1425" b="0">
                 <a:solidFill>
                   <a:srgbClr val="172B3A"/>
@@ -6183,6 +6305,7 @@
               </a:defRPr>
             </a:defPPr>
             <a:lvl1pPr algn="ctr">
+              <a:buNone/>
               <a:defRPr sz="1650" b="1">
                 <a:solidFill>
                   <a:srgbClr val="102A43"/>
@@ -6193,6 +6316,7 @@
               </a:defRPr>
             </a:lvl1pPr>
             <a:lvl2pPr algn="ctr">
+              <a:buNone/>
               <a:defRPr sz="1650" b="1">
                 <a:solidFill>
                   <a:srgbClr val="102A43"/>
@@ -6203,6 +6327,7 @@
               </a:defRPr>
             </a:lvl2pPr>
             <a:lvl3pPr algn="ctr">
+              <a:buNone/>
               <a:defRPr sz="1650" b="1">
                 <a:solidFill>
                   <a:srgbClr val="102A43"/>
@@ -6213,6 +6338,7 @@
               </a:defRPr>
             </a:lvl3pPr>
             <a:lvl4pPr algn="ctr">
+              <a:buNone/>
               <a:defRPr sz="1650" b="1">
                 <a:solidFill>
                   <a:srgbClr val="102A43"/>
@@ -6223,6 +6349,7 @@
               </a:defRPr>
             </a:lvl4pPr>
             <a:lvl5pPr algn="ctr">
+              <a:buNone/>
               <a:defRPr sz="1650" b="1">
                 <a:solidFill>
                   <a:srgbClr val="102A43"/>
@@ -6233,6 +6360,7 @@
               </a:defRPr>
             </a:lvl5pPr>
             <a:lvl6pPr algn="ctr">
+              <a:buNone/>
               <a:defRPr sz="1650" b="1">
                 <a:solidFill>
                   <a:srgbClr val="102A43"/>
@@ -6243,6 +6371,7 @@
               </a:defRPr>
             </a:lvl6pPr>
             <a:lvl7pPr algn="ctr">
+              <a:buNone/>
               <a:defRPr sz="1650" b="1">
                 <a:solidFill>
                   <a:srgbClr val="102A43"/>
@@ -6253,6 +6382,7 @@
               </a:defRPr>
             </a:lvl7pPr>
             <a:lvl8pPr algn="ctr">
+              <a:buNone/>
               <a:defRPr sz="1650" b="1">
                 <a:solidFill>
                   <a:srgbClr val="102A43"/>
@@ -6263,6 +6393,7 @@
               </a:defRPr>
             </a:lvl8pPr>
             <a:lvl9pPr algn="ctr">
+              <a:buNone/>
               <a:defRPr sz="1650" b="1">
                 <a:solidFill>
                   <a:srgbClr val="102A43"/>
@@ -6275,6 +6406,7 @@
           </a:lstStyle>
           <a:p xmlns:a="http://schemas.openxmlformats.org/drawingml/2006/main">
             <a:pPr algn="ctr">
+              <a:buNone/>
               <a:defRPr sz="1650" b="1">
                 <a:solidFill>
                   <a:srgbClr val="102A43"/>
@@ -6342,6 +6474,7 @@
               </a:defRPr>
             </a:defPPr>
             <a:lvl1pPr algn="ctr">
+              <a:buNone/>
               <a:defRPr sz="1425" b="0">
                 <a:solidFill>
                   <a:srgbClr val="172B3A"/>
@@ -6352,6 +6485,7 @@
               </a:defRPr>
             </a:lvl1pPr>
             <a:lvl2pPr algn="ctr">
+              <a:buNone/>
               <a:defRPr sz="1425" b="0">
                 <a:solidFill>
                   <a:srgbClr val="172B3A"/>
@@ -6362,6 +6496,7 @@
               </a:defRPr>
             </a:lvl2pPr>
             <a:lvl3pPr algn="ctr">
+              <a:buNone/>
               <a:defRPr sz="1425" b="0">
                 <a:solidFill>
                   <a:srgbClr val="172B3A"/>
@@ -6372,6 +6507,7 @@
               </a:defRPr>
             </a:lvl3pPr>
             <a:lvl4pPr algn="ctr">
+              <a:buNone/>
               <a:defRPr sz="1425" b="0">
                 <a:solidFill>
                   <a:srgbClr val="172B3A"/>
@@ -6382,6 +6518,7 @@
               </a:defRPr>
             </a:lvl4pPr>
             <a:lvl5pPr algn="ctr">
+              <a:buNone/>
               <a:defRPr sz="1425" b="0">
                 <a:solidFill>
                   <a:srgbClr val="172B3A"/>
@@ -6392,6 +6529,7 @@
               </a:defRPr>
             </a:lvl5pPr>
             <a:lvl6pPr algn="ctr">
+              <a:buNone/>
               <a:defRPr sz="1425" b="0">
                 <a:solidFill>
                   <a:srgbClr val="172B3A"/>
@@ -6402,6 +6540,7 @@
               </a:defRPr>
             </a:lvl6pPr>
             <a:lvl7pPr algn="ctr">
+              <a:buNone/>
               <a:defRPr sz="1425" b="0">
                 <a:solidFill>
                   <a:srgbClr val="172B3A"/>
@@ -6412,6 +6551,7 @@
               </a:defRPr>
             </a:lvl7pPr>
             <a:lvl8pPr algn="ctr">
+              <a:buNone/>
               <a:defRPr sz="1425" b="0">
                 <a:solidFill>
                   <a:srgbClr val="172B3A"/>
@@ -6422,6 +6562,7 @@
               </a:defRPr>
             </a:lvl8pPr>
             <a:lvl9pPr algn="ctr">
+              <a:buNone/>
               <a:defRPr sz="1425" b="0">
                 <a:solidFill>
                   <a:srgbClr val="172B3A"/>
@@ -6434,6 +6575,7 @@
           </a:lstStyle>
           <a:p xmlns:a="http://schemas.openxmlformats.org/drawingml/2006/main">
             <a:pPr algn="ctr">
+              <a:buNone/>
               <a:defRPr sz="1425" b="0">
                 <a:solidFill>
                   <a:srgbClr val="172B3A"/>
@@ -6457,6 +6599,7 @@
           </a:p>
           <a:p xmlns:a="http://schemas.openxmlformats.org/drawingml/2006/main">
             <a:pPr algn="ctr">
+              <a:buNone/>
               <a:defRPr sz="1425" b="0">
                 <a:solidFill>
                   <a:srgbClr val="172B3A"/>
@@ -6588,6 +6731,7 @@
               </a:defRPr>
             </a:defPPr>
             <a:lvl1pPr algn="ctr">
+              <a:buNone/>
               <a:defRPr sz="1650" b="1">
                 <a:solidFill>
                   <a:srgbClr val="102A43"/>
@@ -6598,6 +6742,7 @@
               </a:defRPr>
             </a:lvl1pPr>
             <a:lvl2pPr algn="ctr">
+              <a:buNone/>
               <a:defRPr sz="1650" b="1">
                 <a:solidFill>
                   <a:srgbClr val="102A43"/>
@@ -6608,6 +6753,7 @@
               </a:defRPr>
             </a:lvl2pPr>
             <a:lvl3pPr algn="ctr">
+              <a:buNone/>
               <a:defRPr sz="1650" b="1">
                 <a:solidFill>
                   <a:srgbClr val="102A43"/>
@@ -6618,6 +6764,7 @@
               </a:defRPr>
             </a:lvl3pPr>
             <a:lvl4pPr algn="ctr">
+              <a:buNone/>
               <a:defRPr sz="1650" b="1">
                 <a:solidFill>
                   <a:srgbClr val="102A43"/>
@@ -6628,6 +6775,7 @@
               </a:defRPr>
             </a:lvl4pPr>
             <a:lvl5pPr algn="ctr">
+              <a:buNone/>
               <a:defRPr sz="1650" b="1">
                 <a:solidFill>
                   <a:srgbClr val="102A43"/>
@@ -6638,6 +6786,7 @@
               </a:defRPr>
             </a:lvl5pPr>
             <a:lvl6pPr algn="ctr">
+              <a:buNone/>
               <a:defRPr sz="1650" b="1">
                 <a:solidFill>
                   <a:srgbClr val="102A43"/>
@@ -6648,6 +6797,7 @@
               </a:defRPr>
             </a:lvl6pPr>
             <a:lvl7pPr algn="ctr">
+              <a:buNone/>
               <a:defRPr sz="1650" b="1">
                 <a:solidFill>
                   <a:srgbClr val="102A43"/>
@@ -6658,6 +6808,7 @@
               </a:defRPr>
             </a:lvl7pPr>
             <a:lvl8pPr algn="ctr">
+              <a:buNone/>
               <a:defRPr sz="1650" b="1">
                 <a:solidFill>
                   <a:srgbClr val="102A43"/>
@@ -6668,6 +6819,7 @@
               </a:defRPr>
             </a:lvl8pPr>
             <a:lvl9pPr algn="ctr">
+              <a:buNone/>
               <a:defRPr sz="1650" b="1">
                 <a:solidFill>
                   <a:srgbClr val="102A43"/>
@@ -6680,6 +6832,7 @@
           </a:lstStyle>
           <a:p xmlns:a="http://schemas.openxmlformats.org/drawingml/2006/main">
             <a:pPr algn="ctr">
+              <a:buNone/>
               <a:defRPr sz="1650" b="1">
                 <a:solidFill>
                   <a:srgbClr val="102A43"/>
@@ -6747,6 +6900,7 @@
               </a:defRPr>
             </a:defPPr>
             <a:lvl1pPr algn="ctr">
+              <a:buNone/>
               <a:defRPr sz="1425" b="0">
                 <a:solidFill>
                   <a:srgbClr val="172B3A"/>
@@ -6757,6 +6911,7 @@
               </a:defRPr>
             </a:lvl1pPr>
             <a:lvl2pPr algn="ctr">
+              <a:buNone/>
               <a:defRPr sz="1425" b="0">
                 <a:solidFill>
                   <a:srgbClr val="172B3A"/>
@@ -6767,6 +6922,7 @@
               </a:defRPr>
             </a:lvl2pPr>
             <a:lvl3pPr algn="ctr">
+              <a:buNone/>
               <a:defRPr sz="1425" b="0">
                 <a:solidFill>
                   <a:srgbClr val="172B3A"/>
@@ -6777,6 +6933,7 @@
               </a:defRPr>
             </a:lvl3pPr>
             <a:lvl4pPr algn="ctr">
+              <a:buNone/>
               <a:defRPr sz="1425" b="0">
                 <a:solidFill>
                   <a:srgbClr val="172B3A"/>
@@ -6787,6 +6944,7 @@
               </a:defRPr>
             </a:lvl4pPr>
             <a:lvl5pPr algn="ctr">
+              <a:buNone/>
               <a:defRPr sz="1425" b="0">
                 <a:solidFill>
                   <a:srgbClr val="172B3A"/>
@@ -6797,6 +6955,7 @@
               </a:defRPr>
             </a:lvl5pPr>
             <a:lvl6pPr algn="ctr">
+              <a:buNone/>
               <a:defRPr sz="1425" b="0">
                 <a:solidFill>
                   <a:srgbClr val="172B3A"/>
@@ -6807,6 +6966,7 @@
               </a:defRPr>
             </a:lvl6pPr>
             <a:lvl7pPr algn="ctr">
+              <a:buNone/>
               <a:defRPr sz="1425" b="0">
                 <a:solidFill>
                   <a:srgbClr val="172B3A"/>
@@ -6817,6 +6977,7 @@
               </a:defRPr>
             </a:lvl7pPr>
             <a:lvl8pPr algn="ctr">
+              <a:buNone/>
               <a:defRPr sz="1425" b="0">
                 <a:solidFill>
                   <a:srgbClr val="172B3A"/>
@@ -6827,6 +6988,7 @@
               </a:defRPr>
             </a:lvl8pPr>
             <a:lvl9pPr algn="ctr">
+              <a:buNone/>
               <a:defRPr sz="1425" b="0">
                 <a:solidFill>
                   <a:srgbClr val="172B3A"/>
@@ -6839,6 +7001,7 @@
           </a:lstStyle>
           <a:p xmlns:a="http://schemas.openxmlformats.org/drawingml/2006/main">
             <a:pPr algn="ctr">
+              <a:buNone/>
               <a:defRPr sz="1425" b="0">
                 <a:solidFill>
                   <a:srgbClr val="172B3A"/>
@@ -6862,6 +7025,7 @@
           </a:p>
           <a:p xmlns:a="http://schemas.openxmlformats.org/drawingml/2006/main">
             <a:pPr algn="ctr">
+              <a:buNone/>
               <a:defRPr sz="1425" b="0">
                 <a:solidFill>
                   <a:srgbClr val="172B3A"/>
@@ -6929,6 +7093,7 @@
               </a:defRPr>
             </a:defPPr>
             <a:lvl1pPr algn="l">
+              <a:buNone/>
               <a:defRPr sz="1575" b="1">
                 <a:solidFill>
                   <a:srgbClr val="102A43"/>
@@ -6939,6 +7104,7 @@
               </a:defRPr>
             </a:lvl1pPr>
             <a:lvl2pPr algn="l">
+              <a:buNone/>
               <a:defRPr sz="1575" b="1">
                 <a:solidFill>
                   <a:srgbClr val="102A43"/>
@@ -6949,6 +7115,7 @@
               </a:defRPr>
             </a:lvl2pPr>
             <a:lvl3pPr algn="l">
+              <a:buNone/>
               <a:defRPr sz="1575" b="1">
                 <a:solidFill>
                   <a:srgbClr val="102A43"/>
@@ -6959,6 +7126,7 @@
               </a:defRPr>
             </a:lvl3pPr>
             <a:lvl4pPr algn="l">
+              <a:buNone/>
               <a:defRPr sz="1575" b="1">
                 <a:solidFill>
                   <a:srgbClr val="102A43"/>
@@ -6969,6 +7137,7 @@
               </a:defRPr>
             </a:lvl4pPr>
             <a:lvl5pPr algn="l">
+              <a:buNone/>
               <a:defRPr sz="1575" b="1">
                 <a:solidFill>
                   <a:srgbClr val="102A43"/>
@@ -6979,6 +7148,7 @@
               </a:defRPr>
             </a:lvl5pPr>
             <a:lvl6pPr algn="l">
+              <a:buNone/>
               <a:defRPr sz="1575" b="1">
                 <a:solidFill>
                   <a:srgbClr val="102A43"/>
@@ -6989,6 +7159,7 @@
               </a:defRPr>
             </a:lvl6pPr>
             <a:lvl7pPr algn="l">
+              <a:buNone/>
               <a:defRPr sz="1575" b="1">
                 <a:solidFill>
                   <a:srgbClr val="102A43"/>
@@ -6999,6 +7170,7 @@
               </a:defRPr>
             </a:lvl7pPr>
             <a:lvl8pPr algn="l">
+              <a:buNone/>
               <a:defRPr sz="1575" b="1">
                 <a:solidFill>
                   <a:srgbClr val="102A43"/>
@@ -7009,6 +7181,7 @@
               </a:defRPr>
             </a:lvl8pPr>
             <a:lvl9pPr algn="l">
+              <a:buNone/>
               <a:defRPr sz="1575" b="1">
                 <a:solidFill>
                   <a:srgbClr val="102A43"/>
@@ -7021,6 +7194,7 @@
           </a:lstStyle>
           <a:p xmlns:a="http://schemas.openxmlformats.org/drawingml/2006/main">
             <a:pPr algn="l">
+              <a:buNone/>
               <a:defRPr sz="1575" b="1">
                 <a:solidFill>
                   <a:srgbClr val="102A43"/>
@@ -7088,6 +7262,7 @@
               </a:defRPr>
             </a:defPPr>
             <a:lvl1pPr algn="l">
+              <a:buNone/>
               <a:defRPr sz="1500" b="0">
                 <a:solidFill>
                   <a:srgbClr val="526777"/>
@@ -7098,6 +7273,7 @@
               </a:defRPr>
             </a:lvl1pPr>
             <a:lvl2pPr algn="l">
+              <a:buNone/>
               <a:defRPr sz="1500" b="0">
                 <a:solidFill>
                   <a:srgbClr val="526777"/>
@@ -7108,6 +7284,7 @@
               </a:defRPr>
             </a:lvl2pPr>
             <a:lvl3pPr algn="l">
+              <a:buNone/>
               <a:defRPr sz="1500" b="0">
                 <a:solidFill>
                   <a:srgbClr val="526777"/>
@@ -7118,6 +7295,7 @@
               </a:defRPr>
             </a:lvl3pPr>
             <a:lvl4pPr algn="l">
+              <a:buNone/>
               <a:defRPr sz="1500" b="0">
                 <a:solidFill>
                   <a:srgbClr val="526777"/>
@@ -7128,6 +7306,7 @@
               </a:defRPr>
             </a:lvl4pPr>
             <a:lvl5pPr algn="l">
+              <a:buNone/>
               <a:defRPr sz="1500" b="0">
                 <a:solidFill>
                   <a:srgbClr val="526777"/>
@@ -7138,6 +7317,7 @@
               </a:defRPr>
             </a:lvl5pPr>
             <a:lvl6pPr algn="l">
+              <a:buNone/>
               <a:defRPr sz="1500" b="0">
                 <a:solidFill>
                   <a:srgbClr val="526777"/>
@@ -7148,6 +7328,7 @@
               </a:defRPr>
             </a:lvl6pPr>
             <a:lvl7pPr algn="l">
+              <a:buNone/>
               <a:defRPr sz="1500" b="0">
                 <a:solidFill>
                   <a:srgbClr val="526777"/>
@@ -7158,6 +7339,7 @@
               </a:defRPr>
             </a:lvl7pPr>
             <a:lvl8pPr algn="l">
+              <a:buNone/>
               <a:defRPr sz="1500" b="0">
                 <a:solidFill>
                   <a:srgbClr val="526777"/>
@@ -7168,6 +7350,7 @@
               </a:defRPr>
             </a:lvl8pPr>
             <a:lvl9pPr algn="l">
+              <a:buNone/>
               <a:defRPr sz="1500" b="0">
                 <a:solidFill>
                   <a:srgbClr val="526777"/>
@@ -7180,6 +7363,7 @@
           </a:lstStyle>
           <a:p xmlns:a="http://schemas.openxmlformats.org/drawingml/2006/main">
             <a:pPr algn="l">
+              <a:buNone/>
               <a:defRPr sz="1500" b="0">
                 <a:solidFill>
                   <a:srgbClr val="526777"/>
@@ -7247,6 +7431,7 @@
               </a:defRPr>
             </a:defPPr>
             <a:lvl1pPr algn="ctr">
+              <a:buNone/>
               <a:defRPr sz="1575" b="1">
                 <a:solidFill>
                   <a:srgbClr val="147D79"/>
@@ -7257,6 +7442,7 @@
               </a:defRPr>
             </a:lvl1pPr>
             <a:lvl2pPr algn="ctr">
+              <a:buNone/>
               <a:defRPr sz="1575" b="1">
                 <a:solidFill>
                   <a:srgbClr val="147D79"/>
@@ -7267,6 +7453,7 @@
               </a:defRPr>
             </a:lvl2pPr>
             <a:lvl3pPr algn="ctr">
+              <a:buNone/>
               <a:defRPr sz="1575" b="1">
                 <a:solidFill>
                   <a:srgbClr val="147D79"/>
@@ -7277,6 +7464,7 @@
               </a:defRPr>
             </a:lvl3pPr>
             <a:lvl4pPr algn="ctr">
+              <a:buNone/>
               <a:defRPr sz="1575" b="1">
                 <a:solidFill>
                   <a:srgbClr val="147D79"/>
@@ -7287,6 +7475,7 @@
               </a:defRPr>
             </a:lvl4pPr>
             <a:lvl5pPr algn="ctr">
+              <a:buNone/>
               <a:defRPr sz="1575" b="1">
                 <a:solidFill>
                   <a:srgbClr val="147D79"/>
@@ -7297,6 +7486,7 @@
               </a:defRPr>
             </a:lvl5pPr>
             <a:lvl6pPr algn="ctr">
+              <a:buNone/>
               <a:defRPr sz="1575" b="1">
                 <a:solidFill>
                   <a:srgbClr val="147D79"/>
@@ -7307,6 +7497,7 @@
               </a:defRPr>
             </a:lvl6pPr>
             <a:lvl7pPr algn="ctr">
+              <a:buNone/>
               <a:defRPr sz="1575" b="1">
                 <a:solidFill>
                   <a:srgbClr val="147D79"/>
@@ -7317,6 +7508,7 @@
               </a:defRPr>
             </a:lvl7pPr>
             <a:lvl8pPr algn="ctr">
+              <a:buNone/>
               <a:defRPr sz="1575" b="1">
                 <a:solidFill>
                   <a:srgbClr val="147D79"/>
@@ -7327,6 +7519,7 @@
               </a:defRPr>
             </a:lvl8pPr>
             <a:lvl9pPr algn="ctr">
+              <a:buNone/>
               <a:defRPr sz="1575" b="1">
                 <a:solidFill>
                   <a:srgbClr val="147D79"/>
@@ -7339,6 +7532,7 @@
           </a:lstStyle>
           <a:p xmlns:a="http://schemas.openxmlformats.org/drawingml/2006/main">
             <a:pPr algn="ctr">
+              <a:buNone/>
               <a:defRPr sz="1575" b="1">
                 <a:solidFill>
                   <a:srgbClr val="147D79"/>
@@ -7435,6 +7629,7 @@
               </a:defRPr>
             </a:defPPr>
             <a:lvl1pPr algn="l">
+              <a:buNone/>
               <a:defRPr sz="3300" b="1">
                 <a:solidFill>
                   <a:srgbClr val="102A43"/>
@@ -7445,6 +7640,7 @@
               </a:defRPr>
             </a:lvl1pPr>
             <a:lvl2pPr algn="l">
+              <a:buNone/>
               <a:defRPr sz="3300" b="1">
                 <a:solidFill>
                   <a:srgbClr val="102A43"/>
@@ -7455,6 +7651,7 @@
               </a:defRPr>
             </a:lvl2pPr>
             <a:lvl3pPr algn="l">
+              <a:buNone/>
               <a:defRPr sz="3300" b="1">
                 <a:solidFill>
                   <a:srgbClr val="102A43"/>
@@ -7465,6 +7662,7 @@
               </a:defRPr>
             </a:lvl3pPr>
             <a:lvl4pPr algn="l">
+              <a:buNone/>
               <a:defRPr sz="3300" b="1">
                 <a:solidFill>
                   <a:srgbClr val="102A43"/>
@@ -7475,6 +7673,7 @@
               </a:defRPr>
             </a:lvl4pPr>
             <a:lvl5pPr algn="l">
+              <a:buNone/>
               <a:defRPr sz="3300" b="1">
                 <a:solidFill>
                   <a:srgbClr val="102A43"/>
@@ -7485,6 +7684,7 @@
               </a:defRPr>
             </a:lvl5pPr>
             <a:lvl6pPr algn="l">
+              <a:buNone/>
               <a:defRPr sz="3300" b="1">
                 <a:solidFill>
                   <a:srgbClr val="102A43"/>
@@ -7495,6 +7695,7 @@
               </a:defRPr>
             </a:lvl6pPr>
             <a:lvl7pPr algn="l">
+              <a:buNone/>
               <a:defRPr sz="3300" b="1">
                 <a:solidFill>
                   <a:srgbClr val="102A43"/>
@@ -7505,6 +7706,7 @@
               </a:defRPr>
             </a:lvl7pPr>
             <a:lvl8pPr algn="l">
+              <a:buNone/>
               <a:defRPr sz="3300" b="1">
                 <a:solidFill>
                   <a:srgbClr val="102A43"/>
@@ -7515,6 +7717,7 @@
               </a:defRPr>
             </a:lvl8pPr>
             <a:lvl9pPr algn="l">
+              <a:buNone/>
               <a:defRPr sz="3300" b="1">
                 <a:solidFill>
                   <a:srgbClr val="102A43"/>
@@ -7527,6 +7730,7 @@
           </a:lstStyle>
           <a:p xmlns:a="http://schemas.openxmlformats.org/drawingml/2006/main">
             <a:pPr algn="l">
+              <a:buNone/>
               <a:defRPr sz="3300" b="1">
                 <a:solidFill>
                   <a:srgbClr val="102A43"/>
@@ -7594,6 +7798,7 @@
               </a:defRPr>
             </a:defPPr>
             <a:lvl1pPr algn="l">
+              <a:buNone/>
               <a:defRPr sz="1650" b="0">
                 <a:solidFill>
                   <a:srgbClr val="526777"/>
@@ -7604,6 +7809,7 @@
               </a:defRPr>
             </a:lvl1pPr>
             <a:lvl2pPr algn="l">
+              <a:buNone/>
               <a:defRPr sz="1650" b="0">
                 <a:solidFill>
                   <a:srgbClr val="526777"/>
@@ -7614,6 +7820,7 @@
               </a:defRPr>
             </a:lvl2pPr>
             <a:lvl3pPr algn="l">
+              <a:buNone/>
               <a:defRPr sz="1650" b="0">
                 <a:solidFill>
                   <a:srgbClr val="526777"/>
@@ -7624,6 +7831,7 @@
               </a:defRPr>
             </a:lvl3pPr>
             <a:lvl4pPr algn="l">
+              <a:buNone/>
               <a:defRPr sz="1650" b="0">
                 <a:solidFill>
                   <a:srgbClr val="526777"/>
@@ -7634,6 +7842,7 @@
               </a:defRPr>
             </a:lvl4pPr>
             <a:lvl5pPr algn="l">
+              <a:buNone/>
               <a:defRPr sz="1650" b="0">
                 <a:solidFill>
                   <a:srgbClr val="526777"/>
@@ -7644,6 +7853,7 @@
               </a:defRPr>
             </a:lvl5pPr>
             <a:lvl6pPr algn="l">
+              <a:buNone/>
               <a:defRPr sz="1650" b="0">
                 <a:solidFill>
                   <a:srgbClr val="526777"/>
@@ -7654,6 +7864,7 @@
               </a:defRPr>
             </a:lvl6pPr>
             <a:lvl7pPr algn="l">
+              <a:buNone/>
               <a:defRPr sz="1650" b="0">
                 <a:solidFill>
                   <a:srgbClr val="526777"/>
@@ -7664,6 +7875,7 @@
               </a:defRPr>
             </a:lvl7pPr>
             <a:lvl8pPr algn="l">
+              <a:buNone/>
               <a:defRPr sz="1650" b="0">
                 <a:solidFill>
                   <a:srgbClr val="526777"/>
@@ -7674,6 +7886,7 @@
               </a:defRPr>
             </a:lvl8pPr>
             <a:lvl9pPr algn="l">
+              <a:buNone/>
               <a:defRPr sz="1650" b="0">
                 <a:solidFill>
                   <a:srgbClr val="526777"/>
@@ -7686,6 +7899,7 @@
           </a:lstStyle>
           <a:p xmlns:a="http://schemas.openxmlformats.org/drawingml/2006/main">
             <a:pPr algn="l">
+              <a:buNone/>
               <a:defRPr sz="1650" b="0">
                 <a:solidFill>
                   <a:srgbClr val="526777"/>
@@ -7784,6 +7998,7 @@
               </a:defRPr>
             </a:defPPr>
             <a:lvl1pPr algn="l">
+              <a:buNone/>
               <a:defRPr sz="1125" b="0">
                 <a:solidFill>
                   <a:srgbClr val="526777"/>
@@ -7794,6 +8009,7 @@
               </a:defRPr>
             </a:lvl1pPr>
             <a:lvl2pPr algn="l">
+              <a:buNone/>
               <a:defRPr sz="1125" b="0">
                 <a:solidFill>
                   <a:srgbClr val="526777"/>
@@ -7804,6 +8020,7 @@
               </a:defRPr>
             </a:lvl2pPr>
             <a:lvl3pPr algn="l">
+              <a:buNone/>
               <a:defRPr sz="1125" b="0">
                 <a:solidFill>
                   <a:srgbClr val="526777"/>
@@ -7814,6 +8031,7 @@
               </a:defRPr>
             </a:lvl3pPr>
             <a:lvl4pPr algn="l">
+              <a:buNone/>
               <a:defRPr sz="1125" b="0">
                 <a:solidFill>
                   <a:srgbClr val="526777"/>
@@ -7824,6 +8042,7 @@
               </a:defRPr>
             </a:lvl4pPr>
             <a:lvl5pPr algn="l">
+              <a:buNone/>
               <a:defRPr sz="1125" b="0">
                 <a:solidFill>
                   <a:srgbClr val="526777"/>
@@ -7834,6 +8053,7 @@
               </a:defRPr>
             </a:lvl5pPr>
             <a:lvl6pPr algn="l">
+              <a:buNone/>
               <a:defRPr sz="1125" b="0">
                 <a:solidFill>
                   <a:srgbClr val="526777"/>
@@ -7844,6 +8064,7 @@
               </a:defRPr>
             </a:lvl6pPr>
             <a:lvl7pPr algn="l">
+              <a:buNone/>
               <a:defRPr sz="1125" b="0">
                 <a:solidFill>
                   <a:srgbClr val="526777"/>
@@ -7854,6 +8075,7 @@
               </a:defRPr>
             </a:lvl7pPr>
             <a:lvl8pPr algn="l">
+              <a:buNone/>
               <a:defRPr sz="1125" b="0">
                 <a:solidFill>
                   <a:srgbClr val="526777"/>
@@ -7864,6 +8086,7 @@
               </a:defRPr>
             </a:lvl8pPr>
             <a:lvl9pPr algn="l">
+              <a:buNone/>
               <a:defRPr sz="1125" b="0">
                 <a:solidFill>
                   <a:srgbClr val="526777"/>
@@ -7876,6 +8099,7 @@
           </a:lstStyle>
           <a:p xmlns:a="http://schemas.openxmlformats.org/drawingml/2006/main">
             <a:pPr algn="l">
+              <a:buNone/>
               <a:defRPr sz="1125" b="0">
                 <a:solidFill>
                   <a:srgbClr val="526777"/>
@@ -7943,6 +8167,7 @@
               </a:defRPr>
             </a:defPPr>
             <a:lvl1pPr algn="r">
+              <a:buNone/>
               <a:defRPr sz="1125" b="1">
                 <a:solidFill>
                   <a:srgbClr val="526777"/>
@@ -7953,6 +8178,7 @@
               </a:defRPr>
             </a:lvl1pPr>
             <a:lvl2pPr algn="r">
+              <a:buNone/>
               <a:defRPr sz="1125" b="1">
                 <a:solidFill>
                   <a:srgbClr val="526777"/>
@@ -7963,6 +8189,7 @@
               </a:defRPr>
             </a:lvl2pPr>
             <a:lvl3pPr algn="r">
+              <a:buNone/>
               <a:defRPr sz="1125" b="1">
                 <a:solidFill>
                   <a:srgbClr val="526777"/>
@@ -7973,6 +8200,7 @@
               </a:defRPr>
             </a:lvl3pPr>
             <a:lvl4pPr algn="r">
+              <a:buNone/>
               <a:defRPr sz="1125" b="1">
                 <a:solidFill>
                   <a:srgbClr val="526777"/>
@@ -7983,6 +8211,7 @@
               </a:defRPr>
             </a:lvl4pPr>
             <a:lvl5pPr algn="r">
+              <a:buNone/>
               <a:defRPr sz="1125" b="1">
                 <a:solidFill>
                   <a:srgbClr val="526777"/>
@@ -7993,6 +8222,7 @@
               </a:defRPr>
             </a:lvl5pPr>
             <a:lvl6pPr algn="r">
+              <a:buNone/>
               <a:defRPr sz="1125" b="1">
                 <a:solidFill>
                   <a:srgbClr val="526777"/>
@@ -8003,6 +8233,7 @@
               </a:defRPr>
             </a:lvl6pPr>
             <a:lvl7pPr algn="r">
+              <a:buNone/>
               <a:defRPr sz="1125" b="1">
                 <a:solidFill>
                   <a:srgbClr val="526777"/>
@@ -8013,6 +8244,7 @@
               </a:defRPr>
             </a:lvl7pPr>
             <a:lvl8pPr algn="r">
+              <a:buNone/>
               <a:defRPr sz="1125" b="1">
                 <a:solidFill>
                   <a:srgbClr val="526777"/>
@@ -8023,6 +8255,7 @@
               </a:defRPr>
             </a:lvl8pPr>
             <a:lvl9pPr algn="r">
+              <a:buNone/>
               <a:defRPr sz="1125" b="1">
                 <a:solidFill>
                   <a:srgbClr val="526777"/>
@@ -8035,6 +8268,7 @@
           </a:lstStyle>
           <a:p xmlns:a="http://schemas.openxmlformats.org/drawingml/2006/main">
             <a:pPr algn="r">
+              <a:buNone/>
               <a:defRPr sz="1125" b="1">
                 <a:solidFill>
                   <a:srgbClr val="526777"/>
@@ -8063,7 +8297,7 @@
           <p:cNvPr id="6" name="">
             <a:extLst xmlns:a="http://schemas.openxmlformats.org/drawingml/2006/main">
               <a:ext uri="{FF2B5EF4-FFF2-40B4-BE49-F238E27FC236}">
-                <a16:creationId xmlns:a16="http://schemas.microsoft.com/office/drawing/2014/main" id="{F96C2248-54A6-4048-B0B7-953C44324558}"/>
+                <a16:creationId xmlns:a16="http://schemas.microsoft.com/office/drawing/2014/main" id="{AB7B485D-F6E9-4068-AA44-5AC64EF37017}"/>
               </a:ext>
             </a:extLst>
           </p:cNvPr>
@@ -8090,7 +8324,9 @@
                     </a:bodyPr>
                     <a:lstStyle/>
                     <a:p>
-                      <a:pPr algn="l"/>
+                      <a:pPr algn="l">
+                        <a:buNone/>
+                      </a:pPr>
                       <a:r>
                         <a:rPr sz="1500" b="1">
                           <a:solidFill>
@@ -8141,7 +8377,9 @@
                     </a:bodyPr>
                     <a:lstStyle/>
                     <a:p>
-                      <a:pPr algn="l"/>
+                      <a:pPr algn="l">
+                        <a:buNone/>
+                      </a:pPr>
                       <a:r>
                         <a:rPr sz="1500" b="1">
                           <a:solidFill>
@@ -8188,7 +8426,9 @@
                     </a:bodyPr>
                     <a:lstStyle/>
                     <a:p>
-                      <a:pPr algn="l"/>
+                      <a:pPr algn="l">
+                        <a:buNone/>
+                      </a:pPr>
                       <a:r>
                         <a:rPr sz="1425" b="0">
                           <a:solidFill>
@@ -8233,7 +8473,9 @@
                     </a:bodyPr>
                     <a:lstStyle/>
                     <a:p>
-                      <a:pPr algn="l"/>
+                      <a:pPr algn="l">
+                        <a:buNone/>
+                      </a:pPr>
                       <a:r>
                         <a:rPr sz="1425" b="0">
                           <a:solidFill>
@@ -8274,7 +8516,9 @@
                     </a:bodyPr>
                     <a:lstStyle/>
                     <a:p>
-                      <a:pPr algn="l"/>
+                      <a:pPr algn="l">
+                        <a:buNone/>
+                      </a:pPr>
                       <a:r>
                         <a:rPr sz="1425" b="0">
                           <a:solidFill>
@@ -8319,7 +8563,9 @@
                     </a:bodyPr>
                     <a:lstStyle/>
                     <a:p>
-                      <a:pPr algn="l"/>
+                      <a:pPr algn="l">
+                        <a:buNone/>
+                      </a:pPr>
                       <a:r>
                         <a:rPr sz="1425" b="0">
                           <a:solidFill>
@@ -8360,7 +8606,9 @@
                     </a:bodyPr>
                     <a:lstStyle/>
                     <a:p>
-                      <a:pPr algn="l"/>
+                      <a:pPr algn="l">
+                        <a:buNone/>
+                      </a:pPr>
                       <a:r>
                         <a:rPr sz="1425" b="0">
                           <a:solidFill>
@@ -8405,7 +8653,9 @@
                     </a:bodyPr>
                     <a:lstStyle/>
                     <a:p>
-                      <a:pPr algn="l"/>
+                      <a:pPr algn="l">
+                        <a:buNone/>
+                      </a:pPr>
                       <a:r>
                         <a:rPr sz="1425" b="0">
                           <a:solidFill>
@@ -8446,7 +8696,9 @@
                     </a:bodyPr>
                     <a:lstStyle/>
                     <a:p>
-                      <a:pPr algn="l"/>
+                      <a:pPr algn="l">
+                        <a:buNone/>
+                      </a:pPr>
                       <a:r>
                         <a:rPr sz="1425" b="0">
                           <a:solidFill>
@@ -8491,7 +8743,9 @@
                     </a:bodyPr>
                     <a:lstStyle/>
                     <a:p>
-                      <a:pPr algn="l"/>
+                      <a:pPr algn="l">
+                        <a:buNone/>
+                      </a:pPr>
                       <a:r>
                         <a:rPr sz="1425" b="0">
                           <a:solidFill>
@@ -8533,7 +8787,7 @@
           <p:cNvPr id="7" name="">
             <a:extLst xmlns:a="http://schemas.openxmlformats.org/drawingml/2006/main">
               <a:ext uri="{FF2B5EF4-FFF2-40B4-BE49-F238E27FC236}">
-                <a16:creationId xmlns:a16="http://schemas.microsoft.com/office/drawing/2014/main" id="{41020327-EE5E-43B2-8CC8-DF9D5F9692BA}"/>
+                <a16:creationId xmlns:a16="http://schemas.microsoft.com/office/drawing/2014/main" id="{57DDC585-7EB2-4A96-8B47-ABC70C5C3BE6}"/>
               </a:ext>
             </a:extLst>
           </p:cNvPr>
@@ -8560,7 +8814,9 @@
                     </a:bodyPr>
                     <a:lstStyle/>
                     <a:p>
-                      <a:pPr algn="l"/>
+                      <a:pPr algn="l">
+                        <a:buNone/>
+                      </a:pPr>
                       <a:r>
                         <a:rPr sz="1425" b="1">
                           <a:solidFill>
@@ -8611,7 +8867,9 @@
                     </a:bodyPr>
                     <a:lstStyle/>
                     <a:p>
-                      <a:pPr algn="l"/>
+                      <a:pPr algn="l">
+                        <a:buNone/>
+                      </a:pPr>
                       <a:r>
                         <a:rPr sz="1425" b="1">
                           <a:solidFill>
@@ -8658,7 +8916,9 @@
                     </a:bodyPr>
                     <a:lstStyle/>
                     <a:p>
-                      <a:pPr algn="l"/>
+                      <a:pPr algn="l">
+                        <a:buNone/>
+                      </a:pPr>
                       <a:r>
                         <a:rPr sz="1350" b="0">
                           <a:solidFill>
@@ -8703,7 +8963,9 @@
                     </a:bodyPr>
                     <a:lstStyle/>
                     <a:p>
-                      <a:pPr algn="l"/>
+                      <a:pPr algn="l">
+                        <a:buNone/>
+                      </a:pPr>
                       <a:r>
                         <a:rPr sz="1350" b="0">
                           <a:solidFill>
@@ -8744,7 +9006,9 @@
                     </a:bodyPr>
                     <a:lstStyle/>
                     <a:p>
-                      <a:pPr algn="l"/>
+                      <a:pPr algn="l">
+                        <a:buNone/>
+                      </a:pPr>
                       <a:r>
                         <a:rPr sz="1350" b="0">
                           <a:solidFill>
@@ -8789,7 +9053,9 @@
                     </a:bodyPr>
                     <a:lstStyle/>
                     <a:p>
-                      <a:pPr algn="l"/>
+                      <a:pPr algn="l">
+                        <a:buNone/>
+                      </a:pPr>
                       <a:r>
                         <a:rPr sz="1350" b="0">
                           <a:solidFill>
@@ -8830,7 +9096,9 @@
                     </a:bodyPr>
                     <a:lstStyle/>
                     <a:p>
-                      <a:pPr algn="l"/>
+                      <a:pPr algn="l">
+                        <a:buNone/>
+                      </a:pPr>
                       <a:r>
                         <a:rPr sz="1350" b="0">
                           <a:solidFill>
@@ -8875,7 +9143,9 @@
                     </a:bodyPr>
                     <a:lstStyle/>
                     <a:p>
-                      <a:pPr algn="l"/>
+                      <a:pPr algn="l">
+                        <a:buNone/>
+                      </a:pPr>
                       <a:r>
                         <a:rPr sz="1350" b="0">
                           <a:solidFill>
@@ -8956,6 +9226,7 @@
               </a:defRPr>
             </a:defPPr>
             <a:lvl1pPr algn="l">
+              <a:buNone/>
               <a:defRPr sz="1500" b="1">
                 <a:solidFill>
                   <a:srgbClr val="147D79"/>
@@ -8966,6 +9237,7 @@
               </a:defRPr>
             </a:lvl1pPr>
             <a:lvl2pPr algn="l">
+              <a:buNone/>
               <a:defRPr sz="1500" b="1">
                 <a:solidFill>
                   <a:srgbClr val="147D79"/>
@@ -8976,6 +9248,7 @@
               </a:defRPr>
             </a:lvl2pPr>
             <a:lvl3pPr algn="l">
+              <a:buNone/>
               <a:defRPr sz="1500" b="1">
                 <a:solidFill>
                   <a:srgbClr val="147D79"/>
@@ -8986,6 +9259,7 @@
               </a:defRPr>
             </a:lvl3pPr>
             <a:lvl4pPr algn="l">
+              <a:buNone/>
               <a:defRPr sz="1500" b="1">
                 <a:solidFill>
                   <a:srgbClr val="147D79"/>
@@ -8996,6 +9270,7 @@
               </a:defRPr>
             </a:lvl4pPr>
             <a:lvl5pPr algn="l">
+              <a:buNone/>
               <a:defRPr sz="1500" b="1">
                 <a:solidFill>
                   <a:srgbClr val="147D79"/>
@@ -9006,6 +9281,7 @@
               </a:defRPr>
             </a:lvl5pPr>
             <a:lvl6pPr algn="l">
+              <a:buNone/>
               <a:defRPr sz="1500" b="1">
                 <a:solidFill>
                   <a:srgbClr val="147D79"/>
@@ -9016,6 +9292,7 @@
               </a:defRPr>
             </a:lvl6pPr>
             <a:lvl7pPr algn="l">
+              <a:buNone/>
               <a:defRPr sz="1500" b="1">
                 <a:solidFill>
                   <a:srgbClr val="147D79"/>
@@ -9026,6 +9303,7 @@
               </a:defRPr>
             </a:lvl7pPr>
             <a:lvl8pPr algn="l">
+              <a:buNone/>
               <a:defRPr sz="1500" b="1">
                 <a:solidFill>
                   <a:srgbClr val="147D79"/>
@@ -9036,6 +9314,7 @@
               </a:defRPr>
             </a:lvl8pPr>
             <a:lvl9pPr algn="l">
+              <a:buNone/>
               <a:defRPr sz="1500" b="1">
                 <a:solidFill>
                   <a:srgbClr val="147D79"/>
@@ -9048,6 +9327,7 @@
           </a:lstStyle>
           <a:p xmlns:a="http://schemas.openxmlformats.org/drawingml/2006/main">
             <a:pPr algn="l">
+              <a:buNone/>
               <a:defRPr sz="1500" b="1">
                 <a:solidFill>
                   <a:srgbClr val="147D79"/>
@@ -9144,6 +9424,7 @@
               </a:defRPr>
             </a:defPPr>
             <a:lvl1pPr algn="l">
+              <a:buNone/>
               <a:defRPr sz="3300" b="1">
                 <a:solidFill>
                   <a:srgbClr val="102A43"/>
@@ -9154,6 +9435,7 @@
               </a:defRPr>
             </a:lvl1pPr>
             <a:lvl2pPr algn="l">
+              <a:buNone/>
               <a:defRPr sz="3300" b="1">
                 <a:solidFill>
                   <a:srgbClr val="102A43"/>
@@ -9164,6 +9446,7 @@
               </a:defRPr>
             </a:lvl2pPr>
             <a:lvl3pPr algn="l">
+              <a:buNone/>
               <a:defRPr sz="3300" b="1">
                 <a:solidFill>
                   <a:srgbClr val="102A43"/>
@@ -9174,6 +9457,7 @@
               </a:defRPr>
             </a:lvl3pPr>
             <a:lvl4pPr algn="l">
+              <a:buNone/>
               <a:defRPr sz="3300" b="1">
                 <a:solidFill>
                   <a:srgbClr val="102A43"/>
@@ -9184,6 +9468,7 @@
               </a:defRPr>
             </a:lvl4pPr>
             <a:lvl5pPr algn="l">
+              <a:buNone/>
               <a:defRPr sz="3300" b="1">
                 <a:solidFill>
                   <a:srgbClr val="102A43"/>
@@ -9194,6 +9479,7 @@
               </a:defRPr>
             </a:lvl5pPr>
             <a:lvl6pPr algn="l">
+              <a:buNone/>
               <a:defRPr sz="3300" b="1">
                 <a:solidFill>
                   <a:srgbClr val="102A43"/>
@@ -9204,6 +9490,7 @@
               </a:defRPr>
             </a:lvl6pPr>
             <a:lvl7pPr algn="l">
+              <a:buNone/>
               <a:defRPr sz="3300" b="1">
                 <a:solidFill>
                   <a:srgbClr val="102A43"/>
@@ -9214,6 +9501,7 @@
               </a:defRPr>
             </a:lvl7pPr>
             <a:lvl8pPr algn="l">
+              <a:buNone/>
               <a:defRPr sz="3300" b="1">
                 <a:solidFill>
                   <a:srgbClr val="102A43"/>
@@ -9224,6 +9512,7 @@
               </a:defRPr>
             </a:lvl8pPr>
             <a:lvl9pPr algn="l">
+              <a:buNone/>
               <a:defRPr sz="3300" b="1">
                 <a:solidFill>
                   <a:srgbClr val="102A43"/>
@@ -9236,6 +9525,7 @@
           </a:lstStyle>
           <a:p xmlns:a="http://schemas.openxmlformats.org/drawingml/2006/main">
             <a:pPr algn="l">
+              <a:buNone/>
               <a:defRPr sz="3300" b="1">
                 <a:solidFill>
                   <a:srgbClr val="102A43"/>
@@ -9303,6 +9593,7 @@
               </a:defRPr>
             </a:defPPr>
             <a:lvl1pPr algn="l">
+              <a:buNone/>
               <a:defRPr sz="1650" b="0">
                 <a:solidFill>
                   <a:srgbClr val="526777"/>
@@ -9313,6 +9604,7 @@
               </a:defRPr>
             </a:lvl1pPr>
             <a:lvl2pPr algn="l">
+              <a:buNone/>
               <a:defRPr sz="1650" b="0">
                 <a:solidFill>
                   <a:srgbClr val="526777"/>
@@ -9323,6 +9615,7 @@
               </a:defRPr>
             </a:lvl2pPr>
             <a:lvl3pPr algn="l">
+              <a:buNone/>
               <a:defRPr sz="1650" b="0">
                 <a:solidFill>
                   <a:srgbClr val="526777"/>
@@ -9333,6 +9626,7 @@
               </a:defRPr>
             </a:lvl3pPr>
             <a:lvl4pPr algn="l">
+              <a:buNone/>
               <a:defRPr sz="1650" b="0">
                 <a:solidFill>
                   <a:srgbClr val="526777"/>
@@ -9343,6 +9637,7 @@
               </a:defRPr>
             </a:lvl4pPr>
             <a:lvl5pPr algn="l">
+              <a:buNone/>
               <a:defRPr sz="1650" b="0">
                 <a:solidFill>
                   <a:srgbClr val="526777"/>
@@ -9353,6 +9648,7 @@
               </a:defRPr>
             </a:lvl5pPr>
             <a:lvl6pPr algn="l">
+              <a:buNone/>
               <a:defRPr sz="1650" b="0">
                 <a:solidFill>
                   <a:srgbClr val="526777"/>
@@ -9363,6 +9659,7 @@
               </a:defRPr>
             </a:lvl6pPr>
             <a:lvl7pPr algn="l">
+              <a:buNone/>
               <a:defRPr sz="1650" b="0">
                 <a:solidFill>
                   <a:srgbClr val="526777"/>
@@ -9373,6 +9670,7 @@
               </a:defRPr>
             </a:lvl7pPr>
             <a:lvl8pPr algn="l">
+              <a:buNone/>
               <a:defRPr sz="1650" b="0">
                 <a:solidFill>
                   <a:srgbClr val="526777"/>
@@ -9383,6 +9681,7 @@
               </a:defRPr>
             </a:lvl8pPr>
             <a:lvl9pPr algn="l">
+              <a:buNone/>
               <a:defRPr sz="1650" b="0">
                 <a:solidFill>
                   <a:srgbClr val="526777"/>
@@ -9395,6 +9694,7 @@
           </a:lstStyle>
           <a:p xmlns:a="http://schemas.openxmlformats.org/drawingml/2006/main">
             <a:pPr algn="l">
+              <a:buNone/>
               <a:defRPr sz="1650" b="0">
                 <a:solidFill>
                   <a:srgbClr val="526777"/>
@@ -9493,6 +9793,7 @@
               </a:defRPr>
             </a:defPPr>
             <a:lvl1pPr algn="l">
+              <a:buNone/>
               <a:defRPr sz="1125" b="0">
                 <a:solidFill>
                   <a:srgbClr val="526777"/>
@@ -9503,6 +9804,7 @@
               </a:defRPr>
             </a:lvl1pPr>
             <a:lvl2pPr algn="l">
+              <a:buNone/>
               <a:defRPr sz="1125" b="0">
                 <a:solidFill>
                   <a:srgbClr val="526777"/>
@@ -9513,6 +9815,7 @@
               </a:defRPr>
             </a:lvl2pPr>
             <a:lvl3pPr algn="l">
+              <a:buNone/>
               <a:defRPr sz="1125" b="0">
                 <a:solidFill>
                   <a:srgbClr val="526777"/>
@@ -9523,6 +9826,7 @@
               </a:defRPr>
             </a:lvl3pPr>
             <a:lvl4pPr algn="l">
+              <a:buNone/>
               <a:defRPr sz="1125" b="0">
                 <a:solidFill>
                   <a:srgbClr val="526777"/>
@@ -9533,6 +9837,7 @@
               </a:defRPr>
             </a:lvl4pPr>
             <a:lvl5pPr algn="l">
+              <a:buNone/>
               <a:defRPr sz="1125" b="0">
                 <a:solidFill>
                   <a:srgbClr val="526777"/>
@@ -9543,6 +9848,7 @@
               </a:defRPr>
             </a:lvl5pPr>
             <a:lvl6pPr algn="l">
+              <a:buNone/>
               <a:defRPr sz="1125" b="0">
                 <a:solidFill>
                   <a:srgbClr val="526777"/>
@@ -9553,6 +9859,7 @@
               </a:defRPr>
             </a:lvl6pPr>
             <a:lvl7pPr algn="l">
+              <a:buNone/>
               <a:defRPr sz="1125" b="0">
                 <a:solidFill>
                   <a:srgbClr val="526777"/>
@@ -9563,6 +9870,7 @@
               </a:defRPr>
             </a:lvl7pPr>
             <a:lvl8pPr algn="l">
+              <a:buNone/>
               <a:defRPr sz="1125" b="0">
                 <a:solidFill>
                   <a:srgbClr val="526777"/>
@@ -9573,6 +9881,7 @@
               </a:defRPr>
             </a:lvl8pPr>
             <a:lvl9pPr algn="l">
+              <a:buNone/>
               <a:defRPr sz="1125" b="0">
                 <a:solidFill>
                   <a:srgbClr val="526777"/>
@@ -9585,6 +9894,7 @@
           </a:lstStyle>
           <a:p xmlns:a="http://schemas.openxmlformats.org/drawingml/2006/main">
             <a:pPr algn="l">
+              <a:buNone/>
               <a:defRPr sz="1125" b="0">
                 <a:solidFill>
                   <a:srgbClr val="526777"/>
@@ -9652,6 +9962,7 @@
               </a:defRPr>
             </a:defPPr>
             <a:lvl1pPr algn="r">
+              <a:buNone/>
               <a:defRPr sz="1125" b="1">
                 <a:solidFill>
                   <a:srgbClr val="526777"/>
@@ -9662,6 +9973,7 @@
               </a:defRPr>
             </a:lvl1pPr>
             <a:lvl2pPr algn="r">
+              <a:buNone/>
               <a:defRPr sz="1125" b="1">
                 <a:solidFill>
                   <a:srgbClr val="526777"/>
@@ -9672,6 +9984,7 @@
               </a:defRPr>
             </a:lvl2pPr>
             <a:lvl3pPr algn="r">
+              <a:buNone/>
               <a:defRPr sz="1125" b="1">
                 <a:solidFill>
                   <a:srgbClr val="526777"/>
@@ -9682,6 +9995,7 @@
               </a:defRPr>
             </a:lvl3pPr>
             <a:lvl4pPr algn="r">
+              <a:buNone/>
               <a:defRPr sz="1125" b="1">
                 <a:solidFill>
                   <a:srgbClr val="526777"/>
@@ -9692,6 +10006,7 @@
               </a:defRPr>
             </a:lvl4pPr>
             <a:lvl5pPr algn="r">
+              <a:buNone/>
               <a:defRPr sz="1125" b="1">
                 <a:solidFill>
                   <a:srgbClr val="526777"/>
@@ -9702,6 +10017,7 @@
               </a:defRPr>
             </a:lvl5pPr>
             <a:lvl6pPr algn="r">
+              <a:buNone/>
               <a:defRPr sz="1125" b="1">
                 <a:solidFill>
                   <a:srgbClr val="526777"/>
@@ -9712,6 +10028,7 @@
               </a:defRPr>
             </a:lvl6pPr>
             <a:lvl7pPr algn="r">
+              <a:buNone/>
               <a:defRPr sz="1125" b="1">
                 <a:solidFill>
                   <a:srgbClr val="526777"/>
@@ -9722,6 +10039,7 @@
               </a:defRPr>
             </a:lvl7pPr>
             <a:lvl8pPr algn="r">
+              <a:buNone/>
               <a:defRPr sz="1125" b="1">
                 <a:solidFill>
                   <a:srgbClr val="526777"/>
@@ -9732,6 +10050,7 @@
               </a:defRPr>
             </a:lvl8pPr>
             <a:lvl9pPr algn="r">
+              <a:buNone/>
               <a:defRPr sz="1125" b="1">
                 <a:solidFill>
                   <a:srgbClr val="526777"/>
@@ -9744,6 +10063,7 @@
           </a:lstStyle>
           <a:p xmlns:a="http://schemas.openxmlformats.org/drawingml/2006/main">
             <a:pPr algn="r">
+              <a:buNone/>
               <a:defRPr sz="1125" b="1">
                 <a:solidFill>
                   <a:srgbClr val="526777"/>
@@ -9772,7 +10092,7 @@
           <p:cNvPr id="6" name="">
             <a:extLst xmlns:a="http://schemas.openxmlformats.org/drawingml/2006/main">
               <a:ext uri="{FF2B5EF4-FFF2-40B4-BE49-F238E27FC236}">
-                <a16:creationId xmlns:a16="http://schemas.microsoft.com/office/drawing/2014/main" id="{7F2F8F87-584D-4874-822D-4D8E58517899}"/>
+                <a16:creationId xmlns:a16="http://schemas.microsoft.com/office/drawing/2014/main" id="{3E58DCA9-9E36-4DD4-BF3E-63FEED9BBDF6}"/>
               </a:ext>
             </a:extLst>
           </p:cNvPr>
@@ -9800,7 +10120,9 @@
                     </a:bodyPr>
                     <a:lstStyle/>
                     <a:p>
-                      <a:pPr algn="l"/>
+                      <a:pPr algn="l">
+                        <a:buNone/>
+                      </a:pPr>
                       <a:r>
                         <a:rPr sz="1425" b="1">
                           <a:solidFill>
@@ -9851,7 +10173,9 @@
                     </a:bodyPr>
                     <a:lstStyle/>
                     <a:p>
-                      <a:pPr algn="l"/>
+                      <a:pPr algn="l">
+                        <a:buNone/>
+                      </a:pPr>
                       <a:r>
                         <a:rPr sz="1425" b="1">
                           <a:solidFill>
@@ -9896,7 +10220,9 @@
                     </a:bodyPr>
                     <a:lstStyle/>
                     <a:p>
-                      <a:pPr algn="l"/>
+                      <a:pPr algn="l">
+                        <a:buNone/>
+                      </a:pPr>
                       <a:r>
                         <a:rPr sz="1425" b="1">
                           <a:solidFill>
@@ -9943,7 +10269,9 @@
                     </a:bodyPr>
                     <a:lstStyle/>
                     <a:p>
-                      <a:pPr algn="l"/>
+                      <a:pPr algn="l">
+                        <a:buNone/>
+                      </a:pPr>
                       <a:r>
                         <a:rPr sz="1350" b="0">
                           <a:solidFill>
@@ -9988,7 +10316,9 @@
                     </a:bodyPr>
                     <a:lstStyle/>
                     <a:p>
-                      <a:pPr algn="l"/>
+                      <a:pPr algn="l">
+                        <a:buNone/>
+                      </a:pPr>
                       <a:r>
                         <a:rPr sz="1350" b="0">
                           <a:solidFill>
@@ -10027,7 +10357,9 @@
                     </a:bodyPr>
                     <a:lstStyle/>
                     <a:p>
-                      <a:pPr algn="l"/>
+                      <a:pPr algn="l">
+                        <a:buNone/>
+                      </a:pPr>
                       <a:r>
                         <a:rPr sz="1350" b="0">
                           <a:solidFill>
@@ -10068,7 +10400,9 @@
                     </a:bodyPr>
                     <a:lstStyle/>
                     <a:p>
-                      <a:pPr algn="l"/>
+                      <a:pPr algn="l">
+                        <a:buNone/>
+                      </a:pPr>
                       <a:r>
                         <a:rPr sz="1350" b="0">
                           <a:solidFill>
@@ -10113,7 +10447,9 @@
                     </a:bodyPr>
                     <a:lstStyle/>
                     <a:p>
-                      <a:pPr algn="l"/>
+                      <a:pPr algn="l">
+                        <a:buNone/>
+                      </a:pPr>
                       <a:r>
                         <a:rPr sz="1350" b="0">
                           <a:solidFill>
@@ -10152,7 +10488,9 @@
                     </a:bodyPr>
                     <a:lstStyle/>
                     <a:p>
-                      <a:pPr algn="l"/>
+                      <a:pPr algn="l">
+                        <a:buNone/>
+                      </a:pPr>
                       <a:r>
                         <a:rPr sz="1350" b="0">
                           <a:solidFill>
@@ -10193,7 +10531,9 @@
                     </a:bodyPr>
                     <a:lstStyle/>
                     <a:p>
-                      <a:pPr algn="l"/>
+                      <a:pPr algn="l">
+                        <a:buNone/>
+                      </a:pPr>
                       <a:r>
                         <a:rPr sz="1350" b="0">
                           <a:solidFill>
@@ -10238,7 +10578,9 @@
                     </a:bodyPr>
                     <a:lstStyle/>
                     <a:p>
-                      <a:pPr algn="l"/>
+                      <a:pPr algn="l">
+                        <a:buNone/>
+                      </a:pPr>
                       <a:r>
                         <a:rPr sz="1350" b="0">
                           <a:solidFill>
@@ -10277,7 +10619,9 @@
                     </a:bodyPr>
                     <a:lstStyle/>
                     <a:p>
-                      <a:pPr algn="l"/>
+                      <a:pPr algn="l">
+                        <a:buNone/>
+                      </a:pPr>
                       <a:r>
                         <a:rPr sz="1350" b="0">
                           <a:solidFill>
@@ -10318,7 +10662,9 @@
                     </a:bodyPr>
                     <a:lstStyle/>
                     <a:p>
-                      <a:pPr algn="l"/>
+                      <a:pPr algn="l">
+                        <a:buNone/>
+                      </a:pPr>
                       <a:r>
                         <a:rPr sz="1350" b="0">
                           <a:solidFill>
@@ -10363,7 +10709,9 @@
                     </a:bodyPr>
                     <a:lstStyle/>
                     <a:p>
-                      <a:pPr algn="l"/>
+                      <a:pPr algn="l">
+                        <a:buNone/>
+                      </a:pPr>
                       <a:r>
                         <a:rPr sz="1350" b="0">
                           <a:solidFill>
@@ -10402,7 +10750,9 @@
                     </a:bodyPr>
                     <a:lstStyle/>
                     <a:p>
-                      <a:pPr algn="l"/>
+                      <a:pPr algn="l">
+                        <a:buNone/>
+                      </a:pPr>
                       <a:r>
                         <a:rPr sz="1350" b="0">
                           <a:solidFill>
@@ -10443,7 +10793,9 @@
                     </a:bodyPr>
                     <a:lstStyle/>
                     <a:p>
-                      <a:pPr algn="l"/>
+                      <a:pPr algn="l">
+                        <a:buNone/>
+                      </a:pPr>
                       <a:r>
                         <a:rPr sz="1350" b="0">
                           <a:solidFill>
@@ -10488,7 +10840,9 @@
                     </a:bodyPr>
                     <a:lstStyle/>
                     <a:p>
-                      <a:pPr algn="l"/>
+                      <a:pPr algn="l">
+                        <a:buNone/>
+                      </a:pPr>
                       <a:r>
                         <a:rPr sz="1350" b="0">
                           <a:solidFill>
@@ -10527,7 +10881,9 @@
                     </a:bodyPr>
                     <a:lstStyle/>
                     <a:p>
-                      <a:pPr algn="l"/>
+                      <a:pPr algn="l">
+                        <a:buNone/>
+                      </a:pPr>
                       <a:r>
                         <a:rPr sz="1350" b="0">
                           <a:solidFill>
@@ -10568,7 +10924,9 @@
                     </a:bodyPr>
                     <a:lstStyle/>
                     <a:p>
-                      <a:pPr algn="l"/>
+                      <a:pPr algn="l">
+                        <a:buNone/>
+                      </a:pPr>
                       <a:r>
                         <a:rPr sz="1350" b="0">
                           <a:solidFill>
@@ -10613,7 +10971,9 @@
                     </a:bodyPr>
                     <a:lstStyle/>
                     <a:p>
-                      <a:pPr algn="l"/>
+                      <a:pPr algn="l">
+                        <a:buNone/>
+                      </a:pPr>
                       <a:r>
                         <a:rPr sz="1350" b="0">
                           <a:solidFill>
@@ -10652,7 +11012,9 @@
                     </a:bodyPr>
                     <a:lstStyle/>
                     <a:p>
-                      <a:pPr algn="l"/>
+                      <a:pPr algn="l">
+                        <a:buNone/>
+                      </a:pPr>
                       <a:r>
                         <a:rPr sz="1350" b="0">
                           <a:solidFill>
@@ -10733,6 +11095,7 @@
               </a:defRPr>
             </a:defPPr>
             <a:lvl1pPr algn="l">
+              <a:buNone/>
               <a:defRPr sz="1425" b="1">
                 <a:solidFill>
                   <a:srgbClr val="147D79"/>
@@ -10743,6 +11106,7 @@
               </a:defRPr>
             </a:lvl1pPr>
             <a:lvl2pPr algn="l">
+              <a:buNone/>
               <a:defRPr sz="1425" b="1">
                 <a:solidFill>
                   <a:srgbClr val="147D79"/>
@@ -10753,6 +11117,7 @@
               </a:defRPr>
             </a:lvl2pPr>
             <a:lvl3pPr algn="l">
+              <a:buNone/>
               <a:defRPr sz="1425" b="1">
                 <a:solidFill>
                   <a:srgbClr val="147D79"/>
@@ -10763,6 +11128,7 @@
               </a:defRPr>
             </a:lvl3pPr>
             <a:lvl4pPr algn="l">
+              <a:buNone/>
               <a:defRPr sz="1425" b="1">
                 <a:solidFill>
                   <a:srgbClr val="147D79"/>
@@ -10773,6 +11139,7 @@
               </a:defRPr>
             </a:lvl4pPr>
             <a:lvl5pPr algn="l">
+              <a:buNone/>
               <a:defRPr sz="1425" b="1">
                 <a:solidFill>
                   <a:srgbClr val="147D79"/>
@@ -10783,6 +11150,7 @@
               </a:defRPr>
             </a:lvl5pPr>
             <a:lvl6pPr algn="l">
+              <a:buNone/>
               <a:defRPr sz="1425" b="1">
                 <a:solidFill>
                   <a:srgbClr val="147D79"/>
@@ -10793,6 +11161,7 @@
               </a:defRPr>
             </a:lvl6pPr>
             <a:lvl7pPr algn="l">
+              <a:buNone/>
               <a:defRPr sz="1425" b="1">
                 <a:solidFill>
                   <a:srgbClr val="147D79"/>
@@ -10803,6 +11172,7 @@
               </a:defRPr>
             </a:lvl7pPr>
             <a:lvl8pPr algn="l">
+              <a:buNone/>
               <a:defRPr sz="1425" b="1">
                 <a:solidFill>
                   <a:srgbClr val="147D79"/>
@@ -10813,6 +11183,7 @@
               </a:defRPr>
             </a:lvl8pPr>
             <a:lvl9pPr algn="l">
+              <a:buNone/>
               <a:defRPr sz="1425" b="1">
                 <a:solidFill>
                   <a:srgbClr val="147D79"/>
@@ -10825,6 +11196,7 @@
           </a:lstStyle>
           <a:p xmlns:a="http://schemas.openxmlformats.org/drawingml/2006/main">
             <a:pPr algn="l">
+              <a:buNone/>
               <a:defRPr sz="1425" b="1">
                 <a:solidFill>
                   <a:srgbClr val="147D79"/>
@@ -10921,6 +11293,7 @@
               </a:defRPr>
             </a:defPPr>
             <a:lvl1pPr algn="l">
+              <a:buNone/>
               <a:defRPr sz="3300" b="1">
                 <a:solidFill>
                   <a:srgbClr val="102A43"/>
@@ -10931,6 +11304,7 @@
               </a:defRPr>
             </a:lvl1pPr>
             <a:lvl2pPr algn="l">
+              <a:buNone/>
               <a:defRPr sz="3300" b="1">
                 <a:solidFill>
                   <a:srgbClr val="102A43"/>
@@ -10941,6 +11315,7 @@
               </a:defRPr>
             </a:lvl2pPr>
             <a:lvl3pPr algn="l">
+              <a:buNone/>
               <a:defRPr sz="3300" b="1">
                 <a:solidFill>
                   <a:srgbClr val="102A43"/>
@@ -10951,6 +11326,7 @@
               </a:defRPr>
             </a:lvl3pPr>
             <a:lvl4pPr algn="l">
+              <a:buNone/>
               <a:defRPr sz="3300" b="1">
                 <a:solidFill>
                   <a:srgbClr val="102A43"/>
@@ -10961,6 +11337,7 @@
               </a:defRPr>
             </a:lvl4pPr>
             <a:lvl5pPr algn="l">
+              <a:buNone/>
               <a:defRPr sz="3300" b="1">
                 <a:solidFill>
                   <a:srgbClr val="102A43"/>
@@ -10971,6 +11348,7 @@
               </a:defRPr>
             </a:lvl5pPr>
             <a:lvl6pPr algn="l">
+              <a:buNone/>
               <a:defRPr sz="3300" b="1">
                 <a:solidFill>
                   <a:srgbClr val="102A43"/>
@@ -10981,6 +11359,7 @@
               </a:defRPr>
             </a:lvl6pPr>
             <a:lvl7pPr algn="l">
+              <a:buNone/>
               <a:defRPr sz="3300" b="1">
                 <a:solidFill>
                   <a:srgbClr val="102A43"/>
@@ -10991,6 +11370,7 @@
               </a:defRPr>
             </a:lvl7pPr>
             <a:lvl8pPr algn="l">
+              <a:buNone/>
               <a:defRPr sz="3300" b="1">
                 <a:solidFill>
                   <a:srgbClr val="102A43"/>
@@ -11001,6 +11381,7 @@
               </a:defRPr>
             </a:lvl8pPr>
             <a:lvl9pPr algn="l">
+              <a:buNone/>
               <a:defRPr sz="3300" b="1">
                 <a:solidFill>
                   <a:srgbClr val="102A43"/>
@@ -11013,6 +11394,7 @@
           </a:lstStyle>
           <a:p xmlns:a="http://schemas.openxmlformats.org/drawingml/2006/main">
             <a:pPr algn="l">
+              <a:buNone/>
               <a:defRPr sz="3300" b="1">
                 <a:solidFill>
                   <a:srgbClr val="102A43"/>
@@ -11080,6 +11462,7 @@
               </a:defRPr>
             </a:defPPr>
             <a:lvl1pPr algn="l">
+              <a:buNone/>
               <a:defRPr sz="1650" b="0">
                 <a:solidFill>
                   <a:srgbClr val="526777"/>
@@ -11090,6 +11473,7 @@
               </a:defRPr>
             </a:lvl1pPr>
             <a:lvl2pPr algn="l">
+              <a:buNone/>
               <a:defRPr sz="1650" b="0">
                 <a:solidFill>
                   <a:srgbClr val="526777"/>
@@ -11100,6 +11484,7 @@
               </a:defRPr>
             </a:lvl2pPr>
             <a:lvl3pPr algn="l">
+              <a:buNone/>
               <a:defRPr sz="1650" b="0">
                 <a:solidFill>
                   <a:srgbClr val="526777"/>
@@ -11110,6 +11495,7 @@
               </a:defRPr>
             </a:lvl3pPr>
             <a:lvl4pPr algn="l">
+              <a:buNone/>
               <a:defRPr sz="1650" b="0">
                 <a:solidFill>
                   <a:srgbClr val="526777"/>
@@ -11120,6 +11506,7 @@
               </a:defRPr>
             </a:lvl4pPr>
             <a:lvl5pPr algn="l">
+              <a:buNone/>
               <a:defRPr sz="1650" b="0">
                 <a:solidFill>
                   <a:srgbClr val="526777"/>
@@ -11130,6 +11517,7 @@
               </a:defRPr>
             </a:lvl5pPr>
             <a:lvl6pPr algn="l">
+              <a:buNone/>
               <a:defRPr sz="1650" b="0">
                 <a:solidFill>
                   <a:srgbClr val="526777"/>
@@ -11140,6 +11528,7 @@
               </a:defRPr>
             </a:lvl6pPr>
             <a:lvl7pPr algn="l">
+              <a:buNone/>
               <a:defRPr sz="1650" b="0">
                 <a:solidFill>
                   <a:srgbClr val="526777"/>
@@ -11150,6 +11539,7 @@
               </a:defRPr>
             </a:lvl7pPr>
             <a:lvl8pPr algn="l">
+              <a:buNone/>
               <a:defRPr sz="1650" b="0">
                 <a:solidFill>
                   <a:srgbClr val="526777"/>
@@ -11160,6 +11550,7 @@
               </a:defRPr>
             </a:lvl8pPr>
             <a:lvl9pPr algn="l">
+              <a:buNone/>
               <a:defRPr sz="1650" b="0">
                 <a:solidFill>
                   <a:srgbClr val="526777"/>
@@ -11172,6 +11563,7 @@
           </a:lstStyle>
           <a:p xmlns:a="http://schemas.openxmlformats.org/drawingml/2006/main">
             <a:pPr algn="l">
+              <a:buNone/>
               <a:defRPr sz="1650" b="0">
                 <a:solidFill>
                   <a:srgbClr val="526777"/>
@@ -11270,6 +11662,7 @@
               </a:defRPr>
             </a:defPPr>
             <a:lvl1pPr algn="l">
+              <a:buNone/>
               <a:defRPr sz="1125" b="0">
                 <a:solidFill>
                   <a:srgbClr val="526777"/>
@@ -11280,6 +11673,7 @@
               </a:defRPr>
             </a:lvl1pPr>
             <a:lvl2pPr algn="l">
+              <a:buNone/>
               <a:defRPr sz="1125" b="0">
                 <a:solidFill>
                   <a:srgbClr val="526777"/>
@@ -11290,6 +11684,7 @@
               </a:defRPr>
             </a:lvl2pPr>
             <a:lvl3pPr algn="l">
+              <a:buNone/>
               <a:defRPr sz="1125" b="0">
                 <a:solidFill>
                   <a:srgbClr val="526777"/>
@@ -11300,6 +11695,7 @@
               </a:defRPr>
             </a:lvl3pPr>
             <a:lvl4pPr algn="l">
+              <a:buNone/>
               <a:defRPr sz="1125" b="0">
                 <a:solidFill>
                   <a:srgbClr val="526777"/>
@@ -11310,6 +11706,7 @@
               </a:defRPr>
             </a:lvl4pPr>
             <a:lvl5pPr algn="l">
+              <a:buNone/>
               <a:defRPr sz="1125" b="0">
                 <a:solidFill>
                   <a:srgbClr val="526777"/>
@@ -11320,6 +11717,7 @@
               </a:defRPr>
             </a:lvl5pPr>
             <a:lvl6pPr algn="l">
+              <a:buNone/>
               <a:defRPr sz="1125" b="0">
                 <a:solidFill>
                   <a:srgbClr val="526777"/>
@@ -11330,6 +11728,7 @@
               </a:defRPr>
             </a:lvl6pPr>
             <a:lvl7pPr algn="l">
+              <a:buNone/>
               <a:defRPr sz="1125" b="0">
                 <a:solidFill>
                   <a:srgbClr val="526777"/>
@@ -11340,6 +11739,7 @@
               </a:defRPr>
             </a:lvl7pPr>
             <a:lvl8pPr algn="l">
+              <a:buNone/>
               <a:defRPr sz="1125" b="0">
                 <a:solidFill>
                   <a:srgbClr val="526777"/>
@@ -11350,6 +11750,7 @@
               </a:defRPr>
             </a:lvl8pPr>
             <a:lvl9pPr algn="l">
+              <a:buNone/>
               <a:defRPr sz="1125" b="0">
                 <a:solidFill>
                   <a:srgbClr val="526777"/>
@@ -11362,6 +11763,7 @@
           </a:lstStyle>
           <a:p xmlns:a="http://schemas.openxmlformats.org/drawingml/2006/main">
             <a:pPr algn="l">
+              <a:buNone/>
               <a:defRPr sz="1125" b="0">
                 <a:solidFill>
                   <a:srgbClr val="526777"/>
@@ -11429,6 +11831,7 @@
               </a:defRPr>
             </a:defPPr>
             <a:lvl1pPr algn="r">
+              <a:buNone/>
               <a:defRPr sz="1125" b="1">
                 <a:solidFill>
                   <a:srgbClr val="526777"/>
@@ -11439,6 +11842,7 @@
               </a:defRPr>
             </a:lvl1pPr>
             <a:lvl2pPr algn="r">
+              <a:buNone/>
               <a:defRPr sz="1125" b="1">
                 <a:solidFill>
                   <a:srgbClr val="526777"/>
@@ -11449,6 +11853,7 @@
               </a:defRPr>
             </a:lvl2pPr>
             <a:lvl3pPr algn="r">
+              <a:buNone/>
               <a:defRPr sz="1125" b="1">
                 <a:solidFill>
                   <a:srgbClr val="526777"/>
@@ -11459,6 +11864,7 @@
               </a:defRPr>
             </a:lvl3pPr>
             <a:lvl4pPr algn="r">
+              <a:buNone/>
               <a:defRPr sz="1125" b="1">
                 <a:solidFill>
                   <a:srgbClr val="526777"/>
@@ -11469,6 +11875,7 @@
               </a:defRPr>
             </a:lvl4pPr>
             <a:lvl5pPr algn="r">
+              <a:buNone/>
               <a:defRPr sz="1125" b="1">
                 <a:solidFill>
                   <a:srgbClr val="526777"/>
@@ -11479,6 +11886,7 @@
               </a:defRPr>
             </a:lvl5pPr>
             <a:lvl6pPr algn="r">
+              <a:buNone/>
               <a:defRPr sz="1125" b="1">
                 <a:solidFill>
                   <a:srgbClr val="526777"/>
@@ -11489,6 +11897,7 @@
               </a:defRPr>
             </a:lvl6pPr>
             <a:lvl7pPr algn="r">
+              <a:buNone/>
               <a:defRPr sz="1125" b="1">
                 <a:solidFill>
                   <a:srgbClr val="526777"/>
@@ -11499,6 +11908,7 @@
               </a:defRPr>
             </a:lvl7pPr>
             <a:lvl8pPr algn="r">
+              <a:buNone/>
               <a:defRPr sz="1125" b="1">
                 <a:solidFill>
                   <a:srgbClr val="526777"/>
@@ -11509,6 +11919,7 @@
               </a:defRPr>
             </a:lvl8pPr>
             <a:lvl9pPr algn="r">
+              <a:buNone/>
               <a:defRPr sz="1125" b="1">
                 <a:solidFill>
                   <a:srgbClr val="526777"/>
@@ -11521,6 +11932,7 @@
           </a:lstStyle>
           <a:p xmlns:a="http://schemas.openxmlformats.org/drawingml/2006/main">
             <a:pPr algn="r">
+              <a:buNone/>
               <a:defRPr sz="1125" b="1">
                 <a:solidFill>
                   <a:srgbClr val="526777"/>
@@ -11549,7 +11961,7 @@
           <p:cNvPr id="6" name="">
             <a:extLst xmlns:a="http://schemas.openxmlformats.org/drawingml/2006/main">
               <a:ext uri="{FF2B5EF4-FFF2-40B4-BE49-F238E27FC236}">
-                <a16:creationId xmlns:a16="http://schemas.microsoft.com/office/drawing/2014/main" id="{F97204EA-D0FA-4859-97EA-AEA544517FDA}"/>
+                <a16:creationId xmlns:a16="http://schemas.microsoft.com/office/drawing/2014/main" id="{BC03025B-3375-4170-A7E1-4F4385567842}"/>
               </a:ext>
             </a:extLst>
           </p:cNvPr>
@@ -11577,7 +11989,9 @@
                     </a:bodyPr>
                     <a:lstStyle/>
                     <a:p>
-                      <a:pPr algn="l"/>
+                      <a:pPr algn="l">
+                        <a:buNone/>
+                      </a:pPr>
                       <a:r>
                         <a:rPr sz="1350" b="1">
                           <a:solidFill>
@@ -11628,7 +12042,9 @@
                     </a:bodyPr>
                     <a:lstStyle/>
                     <a:p>
-                      <a:pPr algn="l"/>
+                      <a:pPr algn="l">
+                        <a:buNone/>
+                      </a:pPr>
                       <a:r>
                         <a:rPr sz="1350" b="1">
                           <a:solidFill>
@@ -11673,7 +12089,9 @@
                     </a:bodyPr>
                     <a:lstStyle/>
                     <a:p>
-                      <a:pPr algn="l"/>
+                      <a:pPr algn="l">
+                        <a:buNone/>
+                      </a:pPr>
                       <a:r>
                         <a:rPr sz="1350" b="1">
                           <a:solidFill>
@@ -11720,7 +12138,9 @@
                     </a:bodyPr>
                     <a:lstStyle/>
                     <a:p>
-                      <a:pPr algn="l"/>
+                      <a:pPr algn="l">
+                        <a:buNone/>
+                      </a:pPr>
                       <a:r>
                         <a:rPr sz="1275" b="0">
                           <a:solidFill>
@@ -11765,7 +12185,9 @@
                     </a:bodyPr>
                     <a:lstStyle/>
                     <a:p>
-                      <a:pPr algn="l"/>
+                      <a:pPr algn="l">
+                        <a:buNone/>
+                      </a:pPr>
                       <a:r>
                         <a:rPr sz="1275" b="0">
                           <a:solidFill>
@@ -11804,7 +12226,9 @@
                     </a:bodyPr>
                     <a:lstStyle/>
                     <a:p>
-                      <a:pPr algn="l"/>
+                      <a:pPr algn="l">
+                        <a:buNone/>
+                      </a:pPr>
                       <a:r>
                         <a:rPr sz="1275" b="0">
                           <a:solidFill>
@@ -11845,7 +12269,9 @@
                     </a:bodyPr>
                     <a:lstStyle/>
                     <a:p>
-                      <a:pPr algn="l"/>
+                      <a:pPr algn="l">
+                        <a:buNone/>
+                      </a:pPr>
                       <a:r>
                         <a:rPr sz="1275" b="0">
                           <a:solidFill>
@@ -11890,7 +12316,9 @@
                     </a:bodyPr>
                     <a:lstStyle/>
                     <a:p>
-                      <a:pPr algn="l"/>
+                      <a:pPr algn="l">
+                        <a:buNone/>
+                      </a:pPr>
                       <a:r>
                         <a:rPr sz="1275" b="0">
                           <a:solidFill>
@@ -11929,7 +12357,9 @@
                     </a:bodyPr>
                     <a:lstStyle/>
                     <a:p>
-                      <a:pPr algn="l"/>
+                      <a:pPr algn="l">
+                        <a:buNone/>
+                      </a:pPr>
                       <a:r>
                         <a:rPr sz="1275" b="0">
                           <a:solidFill>
@@ -11970,7 +12400,9 @@
                     </a:bodyPr>
                     <a:lstStyle/>
                     <a:p>
-                      <a:pPr algn="l"/>
+                      <a:pPr algn="l">
+                        <a:buNone/>
+                      </a:pPr>
                       <a:r>
                         <a:rPr sz="1275" b="0">
                           <a:solidFill>
@@ -12015,7 +12447,9 @@
                     </a:bodyPr>
                     <a:lstStyle/>
                     <a:p>
-                      <a:pPr algn="l"/>
+                      <a:pPr algn="l">
+                        <a:buNone/>
+                      </a:pPr>
                       <a:r>
                         <a:rPr sz="1275" b="0">
                           <a:solidFill>
@@ -12054,7 +12488,9 @@
                     </a:bodyPr>
                     <a:lstStyle/>
                     <a:p>
-                      <a:pPr algn="l"/>
+                      <a:pPr algn="l">
+                        <a:buNone/>
+                      </a:pPr>
                       <a:r>
                         <a:rPr sz="1275" b="0">
                           <a:solidFill>
@@ -12095,7 +12531,9 @@
                     </a:bodyPr>
                     <a:lstStyle/>
                     <a:p>
-                      <a:pPr algn="l"/>
+                      <a:pPr algn="l">
+                        <a:buNone/>
+                      </a:pPr>
                       <a:r>
                         <a:rPr sz="1275" b="0">
                           <a:solidFill>
@@ -12140,7 +12578,9 @@
                     </a:bodyPr>
                     <a:lstStyle/>
                     <a:p>
-                      <a:pPr algn="l"/>
+                      <a:pPr algn="l">
+                        <a:buNone/>
+                      </a:pPr>
                       <a:r>
                         <a:rPr sz="1275" b="0">
                           <a:solidFill>
@@ -12179,7 +12619,9 @@
                     </a:bodyPr>
                     <a:lstStyle/>
                     <a:p>
-                      <a:pPr algn="l"/>
+                      <a:pPr algn="l">
+                        <a:buNone/>
+                      </a:pPr>
                       <a:r>
                         <a:rPr sz="1275" b="0">
                           <a:solidFill>
@@ -12220,7 +12662,9 @@
                     </a:bodyPr>
                     <a:lstStyle/>
                     <a:p>
-                      <a:pPr algn="l"/>
+                      <a:pPr algn="l">
+                        <a:buNone/>
+                      </a:pPr>
                       <a:r>
                         <a:rPr sz="1275" b="0">
                           <a:solidFill>
@@ -12265,7 +12709,9 @@
                     </a:bodyPr>
                     <a:lstStyle/>
                     <a:p>
-                      <a:pPr algn="l"/>
+                      <a:pPr algn="l">
+                        <a:buNone/>
+                      </a:pPr>
                       <a:r>
                         <a:rPr sz="1275" b="0">
                           <a:solidFill>
@@ -12304,7 +12750,9 @@
                     </a:bodyPr>
                     <a:lstStyle/>
                     <a:p>
-                      <a:pPr algn="l"/>
+                      <a:pPr algn="l">
+                        <a:buNone/>
+                      </a:pPr>
                       <a:r>
                         <a:rPr sz="1275" b="0">
                           <a:solidFill>
@@ -12345,7 +12793,9 @@
                     </a:bodyPr>
                     <a:lstStyle/>
                     <a:p>
-                      <a:pPr algn="l"/>
+                      <a:pPr algn="l">
+                        <a:buNone/>
+                      </a:pPr>
                       <a:r>
                         <a:rPr sz="1275" b="0">
                           <a:solidFill>
@@ -12390,7 +12840,9 @@
                     </a:bodyPr>
                     <a:lstStyle/>
                     <a:p>
-                      <a:pPr algn="l"/>
+                      <a:pPr algn="l">
+                        <a:buNone/>
+                      </a:pPr>
                       <a:r>
                         <a:rPr sz="1275" b="0">
                           <a:solidFill>
@@ -12429,7 +12881,9 @@
                     </a:bodyPr>
                     <a:lstStyle/>
                     <a:p>
-                      <a:pPr algn="l"/>
+                      <a:pPr algn="l">
+                        <a:buNone/>
+                      </a:pPr>
                       <a:r>
                         <a:rPr sz="1275" b="0">
                           <a:solidFill>
@@ -12470,7 +12924,9 @@
                     </a:bodyPr>
                     <a:lstStyle/>
                     <a:p>
-                      <a:pPr algn="l"/>
+                      <a:pPr algn="l">
+                        <a:buNone/>
+                      </a:pPr>
                       <a:r>
                         <a:rPr sz="1275" b="0">
                           <a:solidFill>
@@ -12515,7 +12971,9 @@
                     </a:bodyPr>
                     <a:lstStyle/>
                     <a:p>
-                      <a:pPr algn="l"/>
+                      <a:pPr algn="l">
+                        <a:buNone/>
+                      </a:pPr>
                       <a:r>
                         <a:rPr sz="1275" b="0">
                           <a:solidFill>
@@ -12554,7 +13012,9 @@
                     </a:bodyPr>
                     <a:lstStyle/>
                     <a:p>
-                      <a:pPr algn="l"/>
+                      <a:pPr algn="l">
+                        <a:buNone/>
+                      </a:pPr>
                       <a:r>
                         <a:rPr sz="1275" b="0">
                           <a:solidFill>
@@ -12635,6 +13095,7 @@
               </a:defRPr>
             </a:defPPr>
             <a:lvl1pPr algn="l">
+              <a:buNone/>
               <a:defRPr sz="1425" b="1">
                 <a:solidFill>
                   <a:srgbClr val="147D79"/>
@@ -12645,6 +13106,7 @@
               </a:defRPr>
             </a:lvl1pPr>
             <a:lvl2pPr algn="l">
+              <a:buNone/>
               <a:defRPr sz="1425" b="1">
                 <a:solidFill>
                   <a:srgbClr val="147D79"/>
@@ -12655,6 +13117,7 @@
               </a:defRPr>
             </a:lvl2pPr>
             <a:lvl3pPr algn="l">
+              <a:buNone/>
               <a:defRPr sz="1425" b="1">
                 <a:solidFill>
                   <a:srgbClr val="147D79"/>
@@ -12665,6 +13128,7 @@
               </a:defRPr>
             </a:lvl3pPr>
             <a:lvl4pPr algn="l">
+              <a:buNone/>
               <a:defRPr sz="1425" b="1">
                 <a:solidFill>
                   <a:srgbClr val="147D79"/>
@@ -12675,6 +13139,7 @@
               </a:defRPr>
             </a:lvl4pPr>
             <a:lvl5pPr algn="l">
+              <a:buNone/>
               <a:defRPr sz="1425" b="1">
                 <a:solidFill>
                   <a:srgbClr val="147D79"/>
@@ -12685,6 +13150,7 @@
               </a:defRPr>
             </a:lvl5pPr>
             <a:lvl6pPr algn="l">
+              <a:buNone/>
               <a:defRPr sz="1425" b="1">
                 <a:solidFill>
                   <a:srgbClr val="147D79"/>
@@ -12695,6 +13161,7 @@
               </a:defRPr>
             </a:lvl6pPr>
             <a:lvl7pPr algn="l">
+              <a:buNone/>
               <a:defRPr sz="1425" b="1">
                 <a:solidFill>
                   <a:srgbClr val="147D79"/>
@@ -12705,6 +13172,7 @@
               </a:defRPr>
             </a:lvl7pPr>
             <a:lvl8pPr algn="l">
+              <a:buNone/>
               <a:defRPr sz="1425" b="1">
                 <a:solidFill>
                   <a:srgbClr val="147D79"/>
@@ -12715,6 +13183,7 @@
               </a:defRPr>
             </a:lvl8pPr>
             <a:lvl9pPr algn="l">
+              <a:buNone/>
               <a:defRPr sz="1425" b="1">
                 <a:solidFill>
                   <a:srgbClr val="147D79"/>
@@ -12727,6 +13196,7 @@
           </a:lstStyle>
           <a:p xmlns:a="http://schemas.openxmlformats.org/drawingml/2006/main">
             <a:pPr algn="l">
+              <a:buNone/>
               <a:defRPr sz="1425" b="1">
                 <a:solidFill>
                   <a:srgbClr val="147D79"/>
@@ -12823,6 +13293,7 @@
               </a:defRPr>
             </a:defPPr>
             <a:lvl1pPr algn="l">
+              <a:buNone/>
               <a:defRPr sz="3300" b="1">
                 <a:solidFill>
                   <a:srgbClr val="102A43"/>
@@ -12833,6 +13304,7 @@
               </a:defRPr>
             </a:lvl1pPr>
             <a:lvl2pPr algn="l">
+              <a:buNone/>
               <a:defRPr sz="3300" b="1">
                 <a:solidFill>
                   <a:srgbClr val="102A43"/>
@@ -12843,6 +13315,7 @@
               </a:defRPr>
             </a:lvl2pPr>
             <a:lvl3pPr algn="l">
+              <a:buNone/>
               <a:defRPr sz="3300" b="1">
                 <a:solidFill>
                   <a:srgbClr val="102A43"/>
@@ -12853,6 +13326,7 @@
               </a:defRPr>
             </a:lvl3pPr>
             <a:lvl4pPr algn="l">
+              <a:buNone/>
               <a:defRPr sz="3300" b="1">
                 <a:solidFill>
                   <a:srgbClr val="102A43"/>
@@ -12863,6 +13337,7 @@
               </a:defRPr>
             </a:lvl4pPr>
             <a:lvl5pPr algn="l">
+              <a:buNone/>
               <a:defRPr sz="3300" b="1">
                 <a:solidFill>
                   <a:srgbClr val="102A43"/>
@@ -12873,6 +13348,7 @@
               </a:defRPr>
             </a:lvl5pPr>
             <a:lvl6pPr algn="l">
+              <a:buNone/>
               <a:defRPr sz="3300" b="1">
                 <a:solidFill>
                   <a:srgbClr val="102A43"/>
@@ -12883,6 +13359,7 @@
               </a:defRPr>
             </a:lvl6pPr>
             <a:lvl7pPr algn="l">
+              <a:buNone/>
               <a:defRPr sz="3300" b="1">
                 <a:solidFill>
                   <a:srgbClr val="102A43"/>
@@ -12893,6 +13370,7 @@
               </a:defRPr>
             </a:lvl7pPr>
             <a:lvl8pPr algn="l">
+              <a:buNone/>
               <a:defRPr sz="3300" b="1">
                 <a:solidFill>
                   <a:srgbClr val="102A43"/>
@@ -12903,6 +13381,7 @@
               </a:defRPr>
             </a:lvl8pPr>
             <a:lvl9pPr algn="l">
+              <a:buNone/>
               <a:defRPr sz="3300" b="1">
                 <a:solidFill>
                   <a:srgbClr val="102A43"/>
@@ -12915,6 +13394,7 @@
           </a:lstStyle>
           <a:p xmlns:a="http://schemas.openxmlformats.org/drawingml/2006/main">
             <a:pPr algn="l">
+              <a:buNone/>
               <a:defRPr sz="3300" b="1">
                 <a:solidFill>
                   <a:srgbClr val="102A43"/>
@@ -12982,6 +13462,7 @@
               </a:defRPr>
             </a:defPPr>
             <a:lvl1pPr algn="l">
+              <a:buNone/>
               <a:defRPr sz="1650" b="0">
                 <a:solidFill>
                   <a:srgbClr val="526777"/>
@@ -12992,6 +13473,7 @@
               </a:defRPr>
             </a:lvl1pPr>
             <a:lvl2pPr algn="l">
+              <a:buNone/>
               <a:defRPr sz="1650" b="0">
                 <a:solidFill>
                   <a:srgbClr val="526777"/>
@@ -13002,6 +13484,7 @@
               </a:defRPr>
             </a:lvl2pPr>
             <a:lvl3pPr algn="l">
+              <a:buNone/>
               <a:defRPr sz="1650" b="0">
                 <a:solidFill>
                   <a:srgbClr val="526777"/>
@@ -13012,6 +13495,7 @@
               </a:defRPr>
             </a:lvl3pPr>
             <a:lvl4pPr algn="l">
+              <a:buNone/>
               <a:defRPr sz="1650" b="0">
                 <a:solidFill>
                   <a:srgbClr val="526777"/>
@@ -13022,6 +13506,7 @@
               </a:defRPr>
             </a:lvl4pPr>
             <a:lvl5pPr algn="l">
+              <a:buNone/>
               <a:defRPr sz="1650" b="0">
                 <a:solidFill>
                   <a:srgbClr val="526777"/>
@@ -13032,6 +13517,7 @@
               </a:defRPr>
             </a:lvl5pPr>
             <a:lvl6pPr algn="l">
+              <a:buNone/>
               <a:defRPr sz="1650" b="0">
                 <a:solidFill>
                   <a:srgbClr val="526777"/>
@@ -13042,6 +13528,7 @@
               </a:defRPr>
             </a:lvl6pPr>
             <a:lvl7pPr algn="l">
+              <a:buNone/>
               <a:defRPr sz="1650" b="0">
                 <a:solidFill>
                   <a:srgbClr val="526777"/>
@@ -13052,6 +13539,7 @@
               </a:defRPr>
             </a:lvl7pPr>
             <a:lvl8pPr algn="l">
+              <a:buNone/>
               <a:defRPr sz="1650" b="0">
                 <a:solidFill>
                   <a:srgbClr val="526777"/>
@@ -13062,6 +13550,7 @@
               </a:defRPr>
             </a:lvl8pPr>
             <a:lvl9pPr algn="l">
+              <a:buNone/>
               <a:defRPr sz="1650" b="0">
                 <a:solidFill>
                   <a:srgbClr val="526777"/>
@@ -13074,6 +13563,7 @@
           </a:lstStyle>
           <a:p xmlns:a="http://schemas.openxmlformats.org/drawingml/2006/main">
             <a:pPr algn="l">
+              <a:buNone/>
               <a:defRPr sz="1650" b="0">
                 <a:solidFill>
                   <a:srgbClr val="526777"/>
@@ -13172,6 +13662,7 @@
               </a:defRPr>
             </a:defPPr>
             <a:lvl1pPr algn="l">
+              <a:buNone/>
               <a:defRPr sz="1125" b="0">
                 <a:solidFill>
                   <a:srgbClr val="526777"/>
@@ -13182,6 +13673,7 @@
               </a:defRPr>
             </a:lvl1pPr>
             <a:lvl2pPr algn="l">
+              <a:buNone/>
               <a:defRPr sz="1125" b="0">
                 <a:solidFill>
                   <a:srgbClr val="526777"/>
@@ -13192,6 +13684,7 @@
               </a:defRPr>
             </a:lvl2pPr>
             <a:lvl3pPr algn="l">
+              <a:buNone/>
               <a:defRPr sz="1125" b="0">
                 <a:solidFill>
                   <a:srgbClr val="526777"/>
@@ -13202,6 +13695,7 @@
               </a:defRPr>
             </a:lvl3pPr>
             <a:lvl4pPr algn="l">
+              <a:buNone/>
               <a:defRPr sz="1125" b="0">
                 <a:solidFill>
                   <a:srgbClr val="526777"/>
@@ -13212,6 +13706,7 @@
               </a:defRPr>
             </a:lvl4pPr>
             <a:lvl5pPr algn="l">
+              <a:buNone/>
               <a:defRPr sz="1125" b="0">
                 <a:solidFill>
                   <a:srgbClr val="526777"/>
@@ -13222,6 +13717,7 @@
               </a:defRPr>
             </a:lvl5pPr>
             <a:lvl6pPr algn="l">
+              <a:buNone/>
               <a:defRPr sz="1125" b="0">
                 <a:solidFill>
                   <a:srgbClr val="526777"/>
@@ -13232,6 +13728,7 @@
               </a:defRPr>
             </a:lvl6pPr>
             <a:lvl7pPr algn="l">
+              <a:buNone/>
               <a:defRPr sz="1125" b="0">
                 <a:solidFill>
                   <a:srgbClr val="526777"/>
@@ -13242,6 +13739,7 @@
               </a:defRPr>
             </a:lvl7pPr>
             <a:lvl8pPr algn="l">
+              <a:buNone/>
               <a:defRPr sz="1125" b="0">
                 <a:solidFill>
                   <a:srgbClr val="526777"/>
@@ -13252,6 +13750,7 @@
               </a:defRPr>
             </a:lvl8pPr>
             <a:lvl9pPr algn="l">
+              <a:buNone/>
               <a:defRPr sz="1125" b="0">
                 <a:solidFill>
                   <a:srgbClr val="526777"/>
@@ -13264,6 +13763,7 @@
           </a:lstStyle>
           <a:p xmlns:a="http://schemas.openxmlformats.org/drawingml/2006/main">
             <a:pPr algn="l">
+              <a:buNone/>
               <a:defRPr sz="1125" b="0">
                 <a:solidFill>
                   <a:srgbClr val="526777"/>
@@ -13331,6 +13831,7 @@
               </a:defRPr>
             </a:defPPr>
             <a:lvl1pPr algn="r">
+              <a:buNone/>
               <a:defRPr sz="1125" b="1">
                 <a:solidFill>
                   <a:srgbClr val="526777"/>
@@ -13341,6 +13842,7 @@
               </a:defRPr>
             </a:lvl1pPr>
             <a:lvl2pPr algn="r">
+              <a:buNone/>
               <a:defRPr sz="1125" b="1">
                 <a:solidFill>
                   <a:srgbClr val="526777"/>
@@ -13351,6 +13853,7 @@
               </a:defRPr>
             </a:lvl2pPr>
             <a:lvl3pPr algn="r">
+              <a:buNone/>
               <a:defRPr sz="1125" b="1">
                 <a:solidFill>
                   <a:srgbClr val="526777"/>
@@ -13361,6 +13864,7 @@
               </a:defRPr>
             </a:lvl3pPr>
             <a:lvl4pPr algn="r">
+              <a:buNone/>
               <a:defRPr sz="1125" b="1">
                 <a:solidFill>
                   <a:srgbClr val="526777"/>
@@ -13371,6 +13875,7 @@
               </a:defRPr>
             </a:lvl4pPr>
             <a:lvl5pPr algn="r">
+              <a:buNone/>
               <a:defRPr sz="1125" b="1">
                 <a:solidFill>
                   <a:srgbClr val="526777"/>
@@ -13381,6 +13886,7 @@
               </a:defRPr>
             </a:lvl5pPr>
             <a:lvl6pPr algn="r">
+              <a:buNone/>
               <a:defRPr sz="1125" b="1">
                 <a:solidFill>
                   <a:srgbClr val="526777"/>
@@ -13391,6 +13897,7 @@
               </a:defRPr>
             </a:lvl6pPr>
             <a:lvl7pPr algn="r">
+              <a:buNone/>
               <a:defRPr sz="1125" b="1">
                 <a:solidFill>
                   <a:srgbClr val="526777"/>
@@ -13401,6 +13908,7 @@
               </a:defRPr>
             </a:lvl7pPr>
             <a:lvl8pPr algn="r">
+              <a:buNone/>
               <a:defRPr sz="1125" b="1">
                 <a:solidFill>
                   <a:srgbClr val="526777"/>
@@ -13411,6 +13919,7 @@
               </a:defRPr>
             </a:lvl8pPr>
             <a:lvl9pPr algn="r">
+              <a:buNone/>
               <a:defRPr sz="1125" b="1">
                 <a:solidFill>
                   <a:srgbClr val="526777"/>
@@ -13423,6 +13932,7 @@
           </a:lstStyle>
           <a:p xmlns:a="http://schemas.openxmlformats.org/drawingml/2006/main">
             <a:pPr algn="r">
+              <a:buNone/>
               <a:defRPr sz="1125" b="1">
                 <a:solidFill>
                   <a:srgbClr val="526777"/>
@@ -13451,7 +13961,7 @@
           <p:cNvPr id="6" name="">
             <a:extLst xmlns:a="http://schemas.openxmlformats.org/drawingml/2006/main">
               <a:ext uri="{FF2B5EF4-FFF2-40B4-BE49-F238E27FC236}">
-                <a16:creationId xmlns:a16="http://schemas.microsoft.com/office/drawing/2014/main" id="{4B1AEE2C-6E70-4D05-8453-5CC43EB4AC29}"/>
+                <a16:creationId xmlns:a16="http://schemas.microsoft.com/office/drawing/2014/main" id="{B8E9E2F7-D725-4F4B-B2C3-5078061874F7}"/>
               </a:ext>
             </a:extLst>
           </p:cNvPr>
@@ -13479,7 +13989,9 @@
                     </a:bodyPr>
                     <a:lstStyle/>
                     <a:p>
-                      <a:pPr algn="l"/>
+                      <a:pPr algn="l">
+                        <a:buNone/>
+                      </a:pPr>
                       <a:r>
                         <a:rPr sz="1500" b="1">
                           <a:solidFill>
@@ -13530,7 +14042,9 @@
                     </a:bodyPr>
                     <a:lstStyle/>
                     <a:p>
-                      <a:pPr algn="l"/>
+                      <a:pPr algn="l">
+                        <a:buNone/>
+                      </a:pPr>
                       <a:r>
                         <a:rPr sz="1500" b="1">
                           <a:solidFill>
@@ -13575,7 +14089,9 @@
                     </a:bodyPr>
                     <a:lstStyle/>
                     <a:p>
-                      <a:pPr algn="l"/>
+                      <a:pPr algn="l">
+                        <a:buNone/>
+                      </a:pPr>
                       <a:r>
                         <a:rPr sz="1500" b="1">
                           <a:solidFill>
@@ -13622,7 +14138,9 @@
                     </a:bodyPr>
                     <a:lstStyle/>
                     <a:p>
-                      <a:pPr algn="l"/>
+                      <a:pPr algn="l">
+                        <a:buNone/>
+                      </a:pPr>
                       <a:r>
                         <a:rPr sz="1425" b="0">
                           <a:solidFill>
@@ -13667,7 +14185,9 @@
                     </a:bodyPr>
                     <a:lstStyle/>
                     <a:p>
-                      <a:pPr algn="l"/>
+                      <a:pPr algn="l">
+                        <a:buNone/>
+                      </a:pPr>
                       <a:r>
                         <a:rPr sz="1425" b="0">
                           <a:solidFill>
@@ -13706,7 +14226,9 @@
                     </a:bodyPr>
                     <a:lstStyle/>
                     <a:p>
-                      <a:pPr algn="l"/>
+                      <a:pPr algn="l">
+                        <a:buNone/>
+                      </a:pPr>
                       <a:r>
                         <a:rPr sz="1425" b="0">
                           <a:solidFill>
@@ -13747,7 +14269,9 @@
                     </a:bodyPr>
                     <a:lstStyle/>
                     <a:p>
-                      <a:pPr algn="l"/>
+                      <a:pPr algn="l">
+                        <a:buNone/>
+                      </a:pPr>
                       <a:r>
                         <a:rPr sz="1425" b="0">
                           <a:solidFill>
@@ -13792,7 +14316,9 @@
                     </a:bodyPr>
                     <a:lstStyle/>
                     <a:p>
-                      <a:pPr algn="l"/>
+                      <a:pPr algn="l">
+                        <a:buNone/>
+                      </a:pPr>
                       <a:r>
                         <a:rPr sz="1425" b="0">
                           <a:solidFill>
@@ -13831,7 +14357,9 @@
                     </a:bodyPr>
                     <a:lstStyle/>
                     <a:p>
-                      <a:pPr algn="l"/>
+                      <a:pPr algn="l">
+                        <a:buNone/>
+                      </a:pPr>
                       <a:r>
                         <a:rPr sz="1425" b="0">
                           <a:solidFill>
@@ -13872,7 +14400,9 @@
                     </a:bodyPr>
                     <a:lstStyle/>
                     <a:p>
-                      <a:pPr algn="l"/>
+                      <a:pPr algn="l">
+                        <a:buNone/>
+                      </a:pPr>
                       <a:r>
                         <a:rPr sz="1425" b="0">
                           <a:solidFill>
@@ -13917,7 +14447,9 @@
                     </a:bodyPr>
                     <a:lstStyle/>
                     <a:p>
-                      <a:pPr algn="l"/>
+                      <a:pPr algn="l">
+                        <a:buNone/>
+                      </a:pPr>
                       <a:r>
                         <a:rPr sz="1425" b="0">
                           <a:solidFill>
@@ -13956,7 +14488,9 @@
                     </a:bodyPr>
                     <a:lstStyle/>
                     <a:p>
-                      <a:pPr algn="l"/>
+                      <a:pPr algn="l">
+                        <a:buNone/>
+                      </a:pPr>
                       <a:r>
                         <a:rPr sz="1425" b="0">
                           <a:solidFill>
@@ -13997,7 +14531,9 @@
                     </a:bodyPr>
                     <a:lstStyle/>
                     <a:p>
-                      <a:pPr algn="l"/>
+                      <a:pPr algn="l">
+                        <a:buNone/>
+                      </a:pPr>
                       <a:r>
                         <a:rPr sz="1425" b="0">
                           <a:solidFill>
@@ -14042,7 +14578,9 @@
                     </a:bodyPr>
                     <a:lstStyle/>
                     <a:p>
-                      <a:pPr algn="l"/>
+                      <a:pPr algn="l">
+                        <a:buNone/>
+                      </a:pPr>
                       <a:r>
                         <a:rPr sz="1425" b="0">
                           <a:solidFill>
@@ -14081,7 +14619,9 @@
                     </a:bodyPr>
                     <a:lstStyle/>
                     <a:p>
-                      <a:pPr algn="l"/>
+                      <a:pPr algn="l">
+                        <a:buNone/>
+                      </a:pPr>
                       <a:r>
                         <a:rPr sz="1425" b="0">
                           <a:solidFill>
@@ -14162,6 +14702,7 @@
               </a:defRPr>
             </a:defPPr>
             <a:lvl1pPr algn="l">
+              <a:buNone/>
               <a:defRPr sz="1800" b="1">
                 <a:solidFill>
                   <a:srgbClr val="102A43"/>
@@ -14172,6 +14713,7 @@
               </a:defRPr>
             </a:lvl1pPr>
             <a:lvl2pPr algn="l">
+              <a:buNone/>
               <a:defRPr sz="1800" b="1">
                 <a:solidFill>
                   <a:srgbClr val="102A43"/>
@@ -14182,6 +14724,7 @@
               </a:defRPr>
             </a:lvl2pPr>
             <a:lvl3pPr algn="l">
+              <a:buNone/>
               <a:defRPr sz="1800" b="1">
                 <a:solidFill>
                   <a:srgbClr val="102A43"/>
@@ -14192,6 +14735,7 @@
               </a:defRPr>
             </a:lvl3pPr>
             <a:lvl4pPr algn="l">
+              <a:buNone/>
               <a:defRPr sz="1800" b="1">
                 <a:solidFill>
                   <a:srgbClr val="102A43"/>
@@ -14202,6 +14746,7 @@
               </a:defRPr>
             </a:lvl4pPr>
             <a:lvl5pPr algn="l">
+              <a:buNone/>
               <a:defRPr sz="1800" b="1">
                 <a:solidFill>
                   <a:srgbClr val="102A43"/>
@@ -14212,6 +14757,7 @@
               </a:defRPr>
             </a:lvl5pPr>
             <a:lvl6pPr algn="l">
+              <a:buNone/>
               <a:defRPr sz="1800" b="1">
                 <a:solidFill>
                   <a:srgbClr val="102A43"/>
@@ -14222,6 +14768,7 @@
               </a:defRPr>
             </a:lvl6pPr>
             <a:lvl7pPr algn="l">
+              <a:buNone/>
               <a:defRPr sz="1800" b="1">
                 <a:solidFill>
                   <a:srgbClr val="102A43"/>
@@ -14232,6 +14779,7 @@
               </a:defRPr>
             </a:lvl7pPr>
             <a:lvl8pPr algn="l">
+              <a:buNone/>
               <a:defRPr sz="1800" b="1">
                 <a:solidFill>
                   <a:srgbClr val="102A43"/>
@@ -14242,6 +14790,7 @@
               </a:defRPr>
             </a:lvl8pPr>
             <a:lvl9pPr algn="l">
+              <a:buNone/>
               <a:defRPr sz="1800" b="1">
                 <a:solidFill>
                   <a:srgbClr val="102A43"/>
@@ -14254,6 +14803,7 @@
           </a:lstStyle>
           <a:p xmlns:a="http://schemas.openxmlformats.org/drawingml/2006/main">
             <a:pPr algn="l">
+              <a:buNone/>
               <a:defRPr sz="1800" b="1">
                 <a:solidFill>
                   <a:srgbClr val="102A43"/>
@@ -14321,6 +14871,7 @@
               </a:defRPr>
             </a:defPPr>
             <a:lvl1pPr algn="l">
+              <a:buNone/>
               <a:defRPr sz="1650" b="1">
                 <a:solidFill>
                   <a:srgbClr val="147D79"/>
@@ -14331,6 +14882,7 @@
               </a:defRPr>
             </a:lvl1pPr>
             <a:lvl2pPr algn="l">
+              <a:buNone/>
               <a:defRPr sz="1650" b="1">
                 <a:solidFill>
                   <a:srgbClr val="147D79"/>
@@ -14341,6 +14893,7 @@
               </a:defRPr>
             </a:lvl2pPr>
             <a:lvl3pPr algn="l">
+              <a:buNone/>
               <a:defRPr sz="1650" b="1">
                 <a:solidFill>
                   <a:srgbClr val="147D79"/>
@@ -14351,6 +14904,7 @@
               </a:defRPr>
             </a:lvl3pPr>
             <a:lvl4pPr algn="l">
+              <a:buNone/>
               <a:defRPr sz="1650" b="1">
                 <a:solidFill>
                   <a:srgbClr val="147D79"/>
@@ -14361,6 +14915,7 @@
               </a:defRPr>
             </a:lvl4pPr>
             <a:lvl5pPr algn="l">
+              <a:buNone/>
               <a:defRPr sz="1650" b="1">
                 <a:solidFill>
                   <a:srgbClr val="147D79"/>
@@ -14371,6 +14926,7 @@
               </a:defRPr>
             </a:lvl5pPr>
             <a:lvl6pPr algn="l">
+              <a:buNone/>
               <a:defRPr sz="1650" b="1">
                 <a:solidFill>
                   <a:srgbClr val="147D79"/>
@@ -14381,6 +14937,7 @@
               </a:defRPr>
             </a:lvl6pPr>
             <a:lvl7pPr algn="l">
+              <a:buNone/>
               <a:defRPr sz="1650" b="1">
                 <a:solidFill>
                   <a:srgbClr val="147D79"/>
@@ -14391,6 +14948,7 @@
               </a:defRPr>
             </a:lvl7pPr>
             <a:lvl8pPr algn="l">
+              <a:buNone/>
               <a:defRPr sz="1650" b="1">
                 <a:solidFill>
                   <a:srgbClr val="147D79"/>
@@ -14401,6 +14959,7 @@
               </a:defRPr>
             </a:lvl8pPr>
             <a:lvl9pPr algn="l">
+              <a:buNone/>
               <a:defRPr sz="1650" b="1">
                 <a:solidFill>
                   <a:srgbClr val="147D79"/>
@@ -14413,6 +14972,7 @@
           </a:lstStyle>
           <a:p xmlns:a="http://schemas.openxmlformats.org/drawingml/2006/main">
             <a:pPr algn="l">
+              <a:buNone/>
               <a:defRPr sz="1650" b="1">
                 <a:solidFill>
                   <a:srgbClr val="147D79"/>
@@ -14480,6 +15040,7 @@
               </a:defRPr>
             </a:defPPr>
             <a:lvl1pPr algn="l">
+              <a:buNone/>
               <a:defRPr sz="1500" b="0">
                 <a:solidFill>
                   <a:srgbClr val="526777"/>
@@ -14490,6 +15051,7 @@
               </a:defRPr>
             </a:lvl1pPr>
             <a:lvl2pPr algn="l">
+              <a:buNone/>
               <a:defRPr sz="1500" b="0">
                 <a:solidFill>
                   <a:srgbClr val="526777"/>
@@ -14500,6 +15062,7 @@
               </a:defRPr>
             </a:lvl2pPr>
             <a:lvl3pPr algn="l">
+              <a:buNone/>
               <a:defRPr sz="1500" b="0">
                 <a:solidFill>
                   <a:srgbClr val="526777"/>
@@ -14510,6 +15073,7 @@
               </a:defRPr>
             </a:lvl3pPr>
             <a:lvl4pPr algn="l">
+              <a:buNone/>
               <a:defRPr sz="1500" b="0">
                 <a:solidFill>
                   <a:srgbClr val="526777"/>
@@ -14520,6 +15084,7 @@
               </a:defRPr>
             </a:lvl4pPr>
             <a:lvl5pPr algn="l">
+              <a:buNone/>
               <a:defRPr sz="1500" b="0">
                 <a:solidFill>
                   <a:srgbClr val="526777"/>
@@ -14530,6 +15095,7 @@
               </a:defRPr>
             </a:lvl5pPr>
             <a:lvl6pPr algn="l">
+              <a:buNone/>
               <a:defRPr sz="1500" b="0">
                 <a:solidFill>
                   <a:srgbClr val="526777"/>
@@ -14540,6 +15106,7 @@
               </a:defRPr>
             </a:lvl6pPr>
             <a:lvl7pPr algn="l">
+              <a:buNone/>
               <a:defRPr sz="1500" b="0">
                 <a:solidFill>
                   <a:srgbClr val="526777"/>
@@ -14550,6 +15117,7 @@
               </a:defRPr>
             </a:lvl7pPr>
             <a:lvl8pPr algn="l">
+              <a:buNone/>
               <a:defRPr sz="1500" b="0">
                 <a:solidFill>
                   <a:srgbClr val="526777"/>
@@ -14560,6 +15128,7 @@
               </a:defRPr>
             </a:lvl8pPr>
             <a:lvl9pPr algn="l">
+              <a:buNone/>
               <a:defRPr sz="1500" b="0">
                 <a:solidFill>
                   <a:srgbClr val="526777"/>
@@ -14572,6 +15141,7 @@
           </a:lstStyle>
           <a:p xmlns:a="http://schemas.openxmlformats.org/drawingml/2006/main">
             <a:pPr algn="l">
+              <a:buNone/>
               <a:defRPr sz="1500" b="0">
                 <a:solidFill>
                   <a:srgbClr val="526777"/>
@@ -14668,6 +15238,7 @@
               </a:defRPr>
             </a:defPPr>
             <a:lvl1pPr algn="l">
+              <a:buNone/>
               <a:defRPr sz="3300" b="1">
                 <a:solidFill>
                   <a:srgbClr val="102A43"/>
@@ -14678,6 +15249,7 @@
               </a:defRPr>
             </a:lvl1pPr>
             <a:lvl2pPr algn="l">
+              <a:buNone/>
               <a:defRPr sz="3300" b="1">
                 <a:solidFill>
                   <a:srgbClr val="102A43"/>
@@ -14688,6 +15260,7 @@
               </a:defRPr>
             </a:lvl2pPr>
             <a:lvl3pPr algn="l">
+              <a:buNone/>
               <a:defRPr sz="3300" b="1">
                 <a:solidFill>
                   <a:srgbClr val="102A43"/>
@@ -14698,6 +15271,7 @@
               </a:defRPr>
             </a:lvl3pPr>
             <a:lvl4pPr algn="l">
+              <a:buNone/>
               <a:defRPr sz="3300" b="1">
                 <a:solidFill>
                   <a:srgbClr val="102A43"/>
@@ -14708,6 +15282,7 @@
               </a:defRPr>
             </a:lvl4pPr>
             <a:lvl5pPr algn="l">
+              <a:buNone/>
               <a:defRPr sz="3300" b="1">
                 <a:solidFill>
                   <a:srgbClr val="102A43"/>
@@ -14718,6 +15293,7 @@
               </a:defRPr>
             </a:lvl5pPr>
             <a:lvl6pPr algn="l">
+              <a:buNone/>
               <a:defRPr sz="3300" b="1">
                 <a:solidFill>
                   <a:srgbClr val="102A43"/>
@@ -14728,6 +15304,7 @@
               </a:defRPr>
             </a:lvl6pPr>
             <a:lvl7pPr algn="l">
+              <a:buNone/>
               <a:defRPr sz="3300" b="1">
                 <a:solidFill>
                   <a:srgbClr val="102A43"/>
@@ -14738,6 +15315,7 @@
               </a:defRPr>
             </a:lvl7pPr>
             <a:lvl8pPr algn="l">
+              <a:buNone/>
               <a:defRPr sz="3300" b="1">
                 <a:solidFill>
                   <a:srgbClr val="102A43"/>
@@ -14748,6 +15326,7 @@
               </a:defRPr>
             </a:lvl8pPr>
             <a:lvl9pPr algn="l">
+              <a:buNone/>
               <a:defRPr sz="3300" b="1">
                 <a:solidFill>
                   <a:srgbClr val="102A43"/>
@@ -14760,6 +15339,7 @@
           </a:lstStyle>
           <a:p xmlns:a="http://schemas.openxmlformats.org/drawingml/2006/main">
             <a:pPr algn="l">
+              <a:buNone/>
               <a:defRPr sz="3300" b="1">
                 <a:solidFill>
                   <a:srgbClr val="102A43"/>
@@ -14827,6 +15407,7 @@
               </a:defRPr>
             </a:defPPr>
             <a:lvl1pPr algn="l">
+              <a:buNone/>
               <a:defRPr sz="1650" b="0">
                 <a:solidFill>
                   <a:srgbClr val="526777"/>
@@ -14837,6 +15418,7 @@
               </a:defRPr>
             </a:lvl1pPr>
             <a:lvl2pPr algn="l">
+              <a:buNone/>
               <a:defRPr sz="1650" b="0">
                 <a:solidFill>
                   <a:srgbClr val="526777"/>
@@ -14847,6 +15429,7 @@
               </a:defRPr>
             </a:lvl2pPr>
             <a:lvl3pPr algn="l">
+              <a:buNone/>
               <a:defRPr sz="1650" b="0">
                 <a:solidFill>
                   <a:srgbClr val="526777"/>
@@ -14857,6 +15440,7 @@
               </a:defRPr>
             </a:lvl3pPr>
             <a:lvl4pPr algn="l">
+              <a:buNone/>
               <a:defRPr sz="1650" b="0">
                 <a:solidFill>
                   <a:srgbClr val="526777"/>
@@ -14867,6 +15451,7 @@
               </a:defRPr>
             </a:lvl4pPr>
             <a:lvl5pPr algn="l">
+              <a:buNone/>
               <a:defRPr sz="1650" b="0">
                 <a:solidFill>
                   <a:srgbClr val="526777"/>
@@ -14877,6 +15462,7 @@
               </a:defRPr>
             </a:lvl5pPr>
             <a:lvl6pPr algn="l">
+              <a:buNone/>
               <a:defRPr sz="1650" b="0">
                 <a:solidFill>
                   <a:srgbClr val="526777"/>
@@ -14887,6 +15473,7 @@
               </a:defRPr>
             </a:lvl6pPr>
             <a:lvl7pPr algn="l">
+              <a:buNone/>
               <a:defRPr sz="1650" b="0">
                 <a:solidFill>
                   <a:srgbClr val="526777"/>
@@ -14897,6 +15484,7 @@
               </a:defRPr>
             </a:lvl7pPr>
             <a:lvl8pPr algn="l">
+              <a:buNone/>
               <a:defRPr sz="1650" b="0">
                 <a:solidFill>
                   <a:srgbClr val="526777"/>
@@ -14907,6 +15495,7 @@
               </a:defRPr>
             </a:lvl8pPr>
             <a:lvl9pPr algn="l">
+              <a:buNone/>
               <a:defRPr sz="1650" b="0">
                 <a:solidFill>
                   <a:srgbClr val="526777"/>
@@ -14919,6 +15508,7 @@
           </a:lstStyle>
           <a:p xmlns:a="http://schemas.openxmlformats.org/drawingml/2006/main">
             <a:pPr algn="l">
+              <a:buNone/>
               <a:defRPr sz="1650" b="0">
                 <a:solidFill>
                   <a:srgbClr val="526777"/>
@@ -15017,6 +15607,7 @@
               </a:defRPr>
             </a:defPPr>
             <a:lvl1pPr algn="l">
+              <a:buNone/>
               <a:defRPr sz="1125" b="0">
                 <a:solidFill>
                   <a:srgbClr val="526777"/>
@@ -15027,6 +15618,7 @@
               </a:defRPr>
             </a:lvl1pPr>
             <a:lvl2pPr algn="l">
+              <a:buNone/>
               <a:defRPr sz="1125" b="0">
                 <a:solidFill>
                   <a:srgbClr val="526777"/>
@@ -15037,6 +15629,7 @@
               </a:defRPr>
             </a:lvl2pPr>
             <a:lvl3pPr algn="l">
+              <a:buNone/>
               <a:defRPr sz="1125" b="0">
                 <a:solidFill>
                   <a:srgbClr val="526777"/>
@@ -15047,6 +15640,7 @@
               </a:defRPr>
             </a:lvl3pPr>
             <a:lvl4pPr algn="l">
+              <a:buNone/>
               <a:defRPr sz="1125" b="0">
                 <a:solidFill>
                   <a:srgbClr val="526777"/>
@@ -15057,6 +15651,7 @@
               </a:defRPr>
             </a:lvl4pPr>
             <a:lvl5pPr algn="l">
+              <a:buNone/>
               <a:defRPr sz="1125" b="0">
                 <a:solidFill>
                   <a:srgbClr val="526777"/>
@@ -15067,6 +15662,7 @@
               </a:defRPr>
             </a:lvl5pPr>
             <a:lvl6pPr algn="l">
+              <a:buNone/>
               <a:defRPr sz="1125" b="0">
                 <a:solidFill>
                   <a:srgbClr val="526777"/>
@@ -15077,6 +15673,7 @@
               </a:defRPr>
             </a:lvl6pPr>
             <a:lvl7pPr algn="l">
+              <a:buNone/>
               <a:defRPr sz="1125" b="0">
                 <a:solidFill>
                   <a:srgbClr val="526777"/>
@@ -15087,6 +15684,7 @@
               </a:defRPr>
             </a:lvl7pPr>
             <a:lvl8pPr algn="l">
+              <a:buNone/>
               <a:defRPr sz="1125" b="0">
                 <a:solidFill>
                   <a:srgbClr val="526777"/>
@@ -15097,6 +15695,7 @@
               </a:defRPr>
             </a:lvl8pPr>
             <a:lvl9pPr algn="l">
+              <a:buNone/>
               <a:defRPr sz="1125" b="0">
                 <a:solidFill>
                   <a:srgbClr val="526777"/>
@@ -15109,6 +15708,7 @@
           </a:lstStyle>
           <a:p xmlns:a="http://schemas.openxmlformats.org/drawingml/2006/main">
             <a:pPr algn="l">
+              <a:buNone/>
               <a:defRPr sz="1125" b="0">
                 <a:solidFill>
                   <a:srgbClr val="526777"/>
@@ -15176,6 +15776,7 @@
               </a:defRPr>
             </a:defPPr>
             <a:lvl1pPr algn="r">
+              <a:buNone/>
               <a:defRPr sz="1125" b="1">
                 <a:solidFill>
                   <a:srgbClr val="526777"/>
@@ -15186,6 +15787,7 @@
               </a:defRPr>
             </a:lvl1pPr>
             <a:lvl2pPr algn="r">
+              <a:buNone/>
               <a:defRPr sz="1125" b="1">
                 <a:solidFill>
                   <a:srgbClr val="526777"/>
@@ -15196,6 +15798,7 @@
               </a:defRPr>
             </a:lvl2pPr>
             <a:lvl3pPr algn="r">
+              <a:buNone/>
               <a:defRPr sz="1125" b="1">
                 <a:solidFill>
                   <a:srgbClr val="526777"/>
@@ -15206,6 +15809,7 @@
               </a:defRPr>
             </a:lvl3pPr>
             <a:lvl4pPr algn="r">
+              <a:buNone/>
               <a:defRPr sz="1125" b="1">
                 <a:solidFill>
                   <a:srgbClr val="526777"/>
@@ -15216,6 +15820,7 @@
               </a:defRPr>
             </a:lvl4pPr>
             <a:lvl5pPr algn="r">
+              <a:buNone/>
               <a:defRPr sz="1125" b="1">
                 <a:solidFill>
                   <a:srgbClr val="526777"/>
@@ -15226,6 +15831,7 @@
               </a:defRPr>
             </a:lvl5pPr>
             <a:lvl6pPr algn="r">
+              <a:buNone/>
               <a:defRPr sz="1125" b="1">
                 <a:solidFill>
                   <a:srgbClr val="526777"/>
@@ -15236,6 +15842,7 @@
               </a:defRPr>
             </a:lvl6pPr>
             <a:lvl7pPr algn="r">
+              <a:buNone/>
               <a:defRPr sz="1125" b="1">
                 <a:solidFill>
                   <a:srgbClr val="526777"/>
@@ -15246,6 +15853,7 @@
               </a:defRPr>
             </a:lvl7pPr>
             <a:lvl8pPr algn="r">
+              <a:buNone/>
               <a:defRPr sz="1125" b="1">
                 <a:solidFill>
                   <a:srgbClr val="526777"/>
@@ -15256,6 +15864,7 @@
               </a:defRPr>
             </a:lvl8pPr>
             <a:lvl9pPr algn="r">
+              <a:buNone/>
               <a:defRPr sz="1125" b="1">
                 <a:solidFill>
                   <a:srgbClr val="526777"/>
@@ -15268,6 +15877,7 @@
           </a:lstStyle>
           <a:p xmlns:a="http://schemas.openxmlformats.org/drawingml/2006/main">
             <a:pPr algn="r">
+              <a:buNone/>
               <a:defRPr sz="1125" b="1">
                 <a:solidFill>
                   <a:srgbClr val="526777"/>
@@ -15296,7 +15906,7 @@
           <p:cNvPr id="6" name="">
             <a:extLst xmlns:a="http://schemas.openxmlformats.org/drawingml/2006/main">
               <a:ext uri="{FF2B5EF4-FFF2-40B4-BE49-F238E27FC236}">
-                <a16:creationId xmlns:a16="http://schemas.microsoft.com/office/drawing/2014/main" id="{48D86176-78D9-4D42-ADA0-235261B9A03D}"/>
+                <a16:creationId xmlns:a16="http://schemas.microsoft.com/office/drawing/2014/main" id="{BE534F86-9343-4E83-92FD-C080ED05B11F}"/>
               </a:ext>
             </a:extLst>
           </p:cNvPr>
@@ -15323,7 +15933,9 @@
                     </a:bodyPr>
                     <a:lstStyle/>
                     <a:p>
-                      <a:pPr algn="l"/>
+                      <a:pPr algn="l">
+                        <a:buNone/>
+                      </a:pPr>
                       <a:r>
                         <a:rPr sz="1425" b="1">
                           <a:solidFill>
@@ -15374,7 +15986,9 @@
                     </a:bodyPr>
                     <a:lstStyle/>
                     <a:p>
-                      <a:pPr algn="l"/>
+                      <a:pPr algn="l">
+                        <a:buNone/>
+                      </a:pPr>
                       <a:r>
                         <a:rPr sz="1425" b="1">
                           <a:solidFill>
@@ -15421,7 +16035,9 @@
                     </a:bodyPr>
                     <a:lstStyle/>
                     <a:p>
-                      <a:pPr algn="l"/>
+                      <a:pPr algn="l">
+                        <a:buNone/>
+                      </a:pPr>
                       <a:r>
                         <a:rPr sz="1350" b="0">
                           <a:solidFill>
@@ -15466,7 +16082,9 @@
                     </a:bodyPr>
                     <a:lstStyle/>
                     <a:p>
-                      <a:pPr algn="l"/>
+                      <a:pPr algn="l">
+                        <a:buNone/>
+                      </a:pPr>
                       <a:r>
                         <a:rPr sz="1350" b="0">
                           <a:solidFill>
@@ -15507,7 +16125,9 @@
                     </a:bodyPr>
                     <a:lstStyle/>
                     <a:p>
-                      <a:pPr algn="l"/>
+                      <a:pPr algn="l">
+                        <a:buNone/>
+                      </a:pPr>
                       <a:r>
                         <a:rPr sz="1350" b="0">
                           <a:solidFill>
@@ -15552,7 +16172,9 @@
                     </a:bodyPr>
                     <a:lstStyle/>
                     <a:p>
-                      <a:pPr algn="l"/>
+                      <a:pPr algn="l">
+                        <a:buNone/>
+                      </a:pPr>
                       <a:r>
                         <a:rPr sz="1350" b="0">
                           <a:solidFill>
@@ -15593,7 +16215,9 @@
                     </a:bodyPr>
                     <a:lstStyle/>
                     <a:p>
-                      <a:pPr algn="l"/>
+                      <a:pPr algn="l">
+                        <a:buNone/>
+                      </a:pPr>
                       <a:r>
                         <a:rPr sz="1350" b="0">
                           <a:solidFill>
@@ -15638,7 +16262,9 @@
                     </a:bodyPr>
                     <a:lstStyle/>
                     <a:p>
-                      <a:pPr algn="l"/>
+                      <a:pPr algn="l">
+                        <a:buNone/>
+                      </a:pPr>
                       <a:r>
                         <a:rPr sz="1350" b="0">
                           <a:solidFill>
@@ -15679,7 +16305,9 @@
                     </a:bodyPr>
                     <a:lstStyle/>
                     <a:p>
-                      <a:pPr algn="l"/>
+                      <a:pPr algn="l">
+                        <a:buNone/>
+                      </a:pPr>
                       <a:r>
                         <a:rPr sz="1350" b="0">
                           <a:solidFill>
@@ -15724,7 +16352,9 @@
                     </a:bodyPr>
                     <a:lstStyle/>
                     <a:p>
-                      <a:pPr algn="l"/>
+                      <a:pPr algn="l">
+                        <a:buNone/>
+                      </a:pPr>
                       <a:r>
                         <a:rPr sz="1350" b="0">
                           <a:solidFill>
@@ -15765,7 +16395,9 @@
                     </a:bodyPr>
                     <a:lstStyle/>
                     <a:p>
-                      <a:pPr algn="l"/>
+                      <a:pPr algn="l">
+                        <a:buNone/>
+                      </a:pPr>
                       <a:r>
                         <a:rPr sz="1350" b="0">
                           <a:solidFill>
@@ -15810,7 +16442,9 @@
                     </a:bodyPr>
                     <a:lstStyle/>
                     <a:p>
-                      <a:pPr algn="l"/>
+                      <a:pPr algn="l">
+                        <a:buNone/>
+                      </a:pPr>
                       <a:r>
                         <a:rPr sz="1350" b="0">
                           <a:solidFill>
@@ -15851,7 +16485,9 @@
                     </a:bodyPr>
                     <a:lstStyle/>
                     <a:p>
-                      <a:pPr algn="l"/>
+                      <a:pPr algn="l">
+                        <a:buNone/>
+                      </a:pPr>
                       <a:r>
                         <a:rPr sz="1350" b="0">
                           <a:solidFill>
@@ -15896,7 +16532,9 @@
                     </a:bodyPr>
                     <a:lstStyle/>
                     <a:p>
-                      <a:pPr algn="l"/>
+                      <a:pPr algn="l">
+                        <a:buNone/>
+                      </a:pPr>
                       <a:r>
                         <a:rPr sz="1350" b="0">
                           <a:solidFill>
@@ -15938,7 +16576,7 @@
           <p:cNvPr id="7" name="">
             <a:extLst xmlns:a="http://schemas.openxmlformats.org/drawingml/2006/main">
               <a:ext uri="{FF2B5EF4-FFF2-40B4-BE49-F238E27FC236}">
-                <a16:creationId xmlns:a16="http://schemas.microsoft.com/office/drawing/2014/main" id="{8BF0D465-E668-4010-A611-E48A221803EF}"/>
+                <a16:creationId xmlns:a16="http://schemas.microsoft.com/office/drawing/2014/main" id="{51C16959-9CFC-4FF2-A0A0-EAC5127A197E}"/>
               </a:ext>
             </a:extLst>
           </p:cNvPr>
@@ -15966,7 +16604,9 @@
                     </a:bodyPr>
                     <a:lstStyle/>
                     <a:p>
-                      <a:pPr algn="l"/>
+                      <a:pPr algn="l">
+                        <a:buNone/>
+                      </a:pPr>
                       <a:r>
                         <a:rPr sz="1350" b="1">
                           <a:solidFill>
@@ -16017,7 +16657,9 @@
                     </a:bodyPr>
                     <a:lstStyle/>
                     <a:p>
-                      <a:pPr algn="l"/>
+                      <a:pPr algn="l">
+                        <a:buNone/>
+                      </a:pPr>
                       <a:r>
                         <a:rPr sz="1350" b="1">
                           <a:solidFill>
@@ -16062,7 +16704,9 @@
                     </a:bodyPr>
                     <a:lstStyle/>
                     <a:p>
-                      <a:pPr algn="l"/>
+                      <a:pPr algn="l">
+                        <a:buNone/>
+                      </a:pPr>
                       <a:r>
                         <a:rPr sz="1350" b="1">
                           <a:solidFill>
@@ -16109,7 +16753,9 @@
                     </a:bodyPr>
                     <a:lstStyle/>
                     <a:p>
-                      <a:pPr algn="l"/>
+                      <a:pPr algn="l">
+                        <a:buNone/>
+                      </a:pPr>
                       <a:r>
                         <a:rPr sz="1275" b="0">
                           <a:solidFill>
@@ -16154,7 +16800,9 @@
                     </a:bodyPr>
                     <a:lstStyle/>
                     <a:p>
-                      <a:pPr algn="l"/>
+                      <a:pPr algn="l">
+                        <a:buNone/>
+                      </a:pPr>
                       <a:r>
                         <a:rPr sz="1275" b="0">
                           <a:solidFill>
@@ -16193,7 +16841,9 @@
                     </a:bodyPr>
                     <a:lstStyle/>
                     <a:p>
-                      <a:pPr algn="l"/>
+                      <a:pPr algn="l">
+                        <a:buNone/>
+                      </a:pPr>
                       <a:r>
                         <a:rPr sz="1275" b="0">
                           <a:solidFill>
@@ -16234,7 +16884,9 @@
                     </a:bodyPr>
                     <a:lstStyle/>
                     <a:p>
-                      <a:pPr algn="l"/>
+                      <a:pPr algn="l">
+                        <a:buNone/>
+                      </a:pPr>
                       <a:r>
                         <a:rPr sz="1275" b="0">
                           <a:solidFill>
@@ -16279,7 +16931,9 @@
                     </a:bodyPr>
                     <a:lstStyle/>
                     <a:p>
-                      <a:pPr algn="l"/>
+                      <a:pPr algn="l">
+                        <a:buNone/>
+                      </a:pPr>
                       <a:r>
                         <a:rPr sz="1275" b="0">
                           <a:solidFill>
@@ -16318,7 +16972,9 @@
                     </a:bodyPr>
                     <a:lstStyle/>
                     <a:p>
-                      <a:pPr algn="l"/>
+                      <a:pPr algn="l">
+                        <a:buNone/>
+                      </a:pPr>
                       <a:r>
                         <a:rPr sz="1275" b="0">
                           <a:solidFill>
@@ -16359,7 +17015,9 @@
                     </a:bodyPr>
                     <a:lstStyle/>
                     <a:p>
-                      <a:pPr algn="l"/>
+                      <a:pPr algn="l">
+                        <a:buNone/>
+                      </a:pPr>
                       <a:r>
                         <a:rPr sz="1275" b="0">
                           <a:solidFill>
@@ -16404,7 +17062,9 @@
                     </a:bodyPr>
                     <a:lstStyle/>
                     <a:p>
-                      <a:pPr algn="l"/>
+                      <a:pPr algn="l">
+                        <a:buNone/>
+                      </a:pPr>
                       <a:r>
                         <a:rPr sz="1275" b="0">
                           <a:solidFill>
@@ -16443,7 +17103,9 @@
                     </a:bodyPr>
                     <a:lstStyle/>
                     <a:p>
-                      <a:pPr algn="l"/>
+                      <a:pPr algn="l">
+                        <a:buNone/>
+                      </a:pPr>
                       <a:r>
                         <a:rPr sz="1275" b="0">
                           <a:solidFill>
@@ -16553,6 +17215,7 @@
               </a:defRPr>
             </a:defPPr>
             <a:lvl1pPr algn="l">
+              <a:buNone/>
               <a:defRPr sz="3300" b="1">
                 <a:solidFill>
                   <a:srgbClr val="102A43"/>
@@ -16563,6 +17226,7 @@
               </a:defRPr>
             </a:lvl1pPr>
             <a:lvl2pPr algn="l">
+              <a:buNone/>
               <a:defRPr sz="3300" b="1">
                 <a:solidFill>
                   <a:srgbClr val="102A43"/>
@@ -16573,6 +17237,7 @@
               </a:defRPr>
             </a:lvl2pPr>
             <a:lvl3pPr algn="l">
+              <a:buNone/>
               <a:defRPr sz="3300" b="1">
                 <a:solidFill>
                   <a:srgbClr val="102A43"/>
@@ -16583,6 +17248,7 @@
               </a:defRPr>
             </a:lvl3pPr>
             <a:lvl4pPr algn="l">
+              <a:buNone/>
               <a:defRPr sz="3300" b="1">
                 <a:solidFill>
                   <a:srgbClr val="102A43"/>
@@ -16593,6 +17259,7 @@
               </a:defRPr>
             </a:lvl4pPr>
             <a:lvl5pPr algn="l">
+              <a:buNone/>
               <a:defRPr sz="3300" b="1">
                 <a:solidFill>
                   <a:srgbClr val="102A43"/>
@@ -16603,6 +17270,7 @@
               </a:defRPr>
             </a:lvl5pPr>
             <a:lvl6pPr algn="l">
+              <a:buNone/>
               <a:defRPr sz="3300" b="1">
                 <a:solidFill>
                   <a:srgbClr val="102A43"/>
@@ -16613,6 +17281,7 @@
               </a:defRPr>
             </a:lvl6pPr>
             <a:lvl7pPr algn="l">
+              <a:buNone/>
               <a:defRPr sz="3300" b="1">
                 <a:solidFill>
                   <a:srgbClr val="102A43"/>
@@ -16623,6 +17292,7 @@
               </a:defRPr>
             </a:lvl7pPr>
             <a:lvl8pPr algn="l">
+              <a:buNone/>
               <a:defRPr sz="3300" b="1">
                 <a:solidFill>
                   <a:srgbClr val="102A43"/>
@@ -16633,6 +17303,7 @@
               </a:defRPr>
             </a:lvl8pPr>
             <a:lvl9pPr algn="l">
+              <a:buNone/>
               <a:defRPr sz="3300" b="1">
                 <a:solidFill>
                   <a:srgbClr val="102A43"/>
@@ -16645,6 +17316,7 @@
           </a:lstStyle>
           <a:p xmlns:a="http://schemas.openxmlformats.org/drawingml/2006/main">
             <a:pPr algn="l">
+              <a:buNone/>
               <a:defRPr sz="3300" b="1">
                 <a:solidFill>
                   <a:srgbClr val="102A43"/>
@@ -16712,6 +17384,7 @@
               </a:defRPr>
             </a:defPPr>
             <a:lvl1pPr algn="l">
+              <a:buNone/>
               <a:defRPr sz="1650" b="0">
                 <a:solidFill>
                   <a:srgbClr val="526777"/>
@@ -16722,6 +17395,7 @@
               </a:defRPr>
             </a:lvl1pPr>
             <a:lvl2pPr algn="l">
+              <a:buNone/>
               <a:defRPr sz="1650" b="0">
                 <a:solidFill>
                   <a:srgbClr val="526777"/>
@@ -16732,6 +17406,7 @@
               </a:defRPr>
             </a:lvl2pPr>
             <a:lvl3pPr algn="l">
+              <a:buNone/>
               <a:defRPr sz="1650" b="0">
                 <a:solidFill>
                   <a:srgbClr val="526777"/>
@@ -16742,6 +17417,7 @@
               </a:defRPr>
             </a:lvl3pPr>
             <a:lvl4pPr algn="l">
+              <a:buNone/>
               <a:defRPr sz="1650" b="0">
                 <a:solidFill>
                   <a:srgbClr val="526777"/>
@@ -16752,6 +17428,7 @@
               </a:defRPr>
             </a:lvl4pPr>
             <a:lvl5pPr algn="l">
+              <a:buNone/>
               <a:defRPr sz="1650" b="0">
                 <a:solidFill>
                   <a:srgbClr val="526777"/>
@@ -16762,6 +17439,7 @@
               </a:defRPr>
             </a:lvl5pPr>
             <a:lvl6pPr algn="l">
+              <a:buNone/>
               <a:defRPr sz="1650" b="0">
                 <a:solidFill>
                   <a:srgbClr val="526777"/>
@@ -16772,6 +17450,7 @@
               </a:defRPr>
             </a:lvl6pPr>
             <a:lvl7pPr algn="l">
+              <a:buNone/>
               <a:defRPr sz="1650" b="0">
                 <a:solidFill>
                   <a:srgbClr val="526777"/>
@@ -16782,6 +17461,7 @@
               </a:defRPr>
             </a:lvl7pPr>
             <a:lvl8pPr algn="l">
+              <a:buNone/>
               <a:defRPr sz="1650" b="0">
                 <a:solidFill>
                   <a:srgbClr val="526777"/>
@@ -16792,6 +17472,7 @@
               </a:defRPr>
             </a:lvl8pPr>
             <a:lvl9pPr algn="l">
+              <a:buNone/>
               <a:defRPr sz="1650" b="0">
                 <a:solidFill>
                   <a:srgbClr val="526777"/>
@@ -16804,6 +17485,7 @@
           </a:lstStyle>
           <a:p xmlns:a="http://schemas.openxmlformats.org/drawingml/2006/main">
             <a:pPr algn="l">
+              <a:buNone/>
               <a:defRPr sz="1650" b="0">
                 <a:solidFill>
                   <a:srgbClr val="526777"/>
@@ -16822,7 +17504,7 @@
                 <a:ea typeface="Arial"/>
                 <a:cs typeface="Arial"/>
               </a:rPr>
-              <a:t>Docker Compose runs the API and MySQL on the developer’s computer.</a:t>
+              <a:t>Local: Docker Compose + MySQL. Public API: Render + Aiven MySQL.</a:t>
             </a:r>
           </a:p>
         </p:txBody>
@@ -16902,6 +17584,7 @@
               </a:defRPr>
             </a:defPPr>
             <a:lvl1pPr algn="l">
+              <a:buNone/>
               <a:defRPr sz="1125" b="0">
                 <a:solidFill>
                   <a:srgbClr val="526777"/>
@@ -16912,6 +17595,7 @@
               </a:defRPr>
             </a:lvl1pPr>
             <a:lvl2pPr algn="l">
+              <a:buNone/>
               <a:defRPr sz="1125" b="0">
                 <a:solidFill>
                   <a:srgbClr val="526777"/>
@@ -16922,6 +17606,7 @@
               </a:defRPr>
             </a:lvl2pPr>
             <a:lvl3pPr algn="l">
+              <a:buNone/>
               <a:defRPr sz="1125" b="0">
                 <a:solidFill>
                   <a:srgbClr val="526777"/>
@@ -16932,6 +17617,7 @@
               </a:defRPr>
             </a:lvl3pPr>
             <a:lvl4pPr algn="l">
+              <a:buNone/>
               <a:defRPr sz="1125" b="0">
                 <a:solidFill>
                   <a:srgbClr val="526777"/>
@@ -16942,6 +17628,7 @@
               </a:defRPr>
             </a:lvl4pPr>
             <a:lvl5pPr algn="l">
+              <a:buNone/>
               <a:defRPr sz="1125" b="0">
                 <a:solidFill>
                   <a:srgbClr val="526777"/>
@@ -16952,6 +17639,7 @@
               </a:defRPr>
             </a:lvl5pPr>
             <a:lvl6pPr algn="l">
+              <a:buNone/>
               <a:defRPr sz="1125" b="0">
                 <a:solidFill>
                   <a:srgbClr val="526777"/>
@@ -16962,6 +17650,7 @@
               </a:defRPr>
             </a:lvl6pPr>
             <a:lvl7pPr algn="l">
+              <a:buNone/>
               <a:defRPr sz="1125" b="0">
                 <a:solidFill>
                   <a:srgbClr val="526777"/>
@@ -16972,6 +17661,7 @@
               </a:defRPr>
             </a:lvl7pPr>
             <a:lvl8pPr algn="l">
+              <a:buNone/>
               <a:defRPr sz="1125" b="0">
                 <a:solidFill>
                   <a:srgbClr val="526777"/>
@@ -16982,6 +17672,7 @@
               </a:defRPr>
             </a:lvl8pPr>
             <a:lvl9pPr algn="l">
+              <a:buNone/>
               <a:defRPr sz="1125" b="0">
                 <a:solidFill>
                   <a:srgbClr val="526777"/>
@@ -16994,6 +17685,7 @@
           </a:lstStyle>
           <a:p xmlns:a="http://schemas.openxmlformats.org/drawingml/2006/main">
             <a:pPr algn="l">
+              <a:buNone/>
               <a:defRPr sz="1125" b="0">
                 <a:solidFill>
                   <a:srgbClr val="526777"/>
@@ -17061,6 +17753,7 @@
               </a:defRPr>
             </a:defPPr>
             <a:lvl1pPr algn="r">
+              <a:buNone/>
               <a:defRPr sz="1125" b="1">
                 <a:solidFill>
                   <a:srgbClr val="526777"/>
@@ -17071,6 +17764,7 @@
               </a:defRPr>
             </a:lvl1pPr>
             <a:lvl2pPr algn="r">
+              <a:buNone/>
               <a:defRPr sz="1125" b="1">
                 <a:solidFill>
                   <a:srgbClr val="526777"/>
@@ -17081,6 +17775,7 @@
               </a:defRPr>
             </a:lvl2pPr>
             <a:lvl3pPr algn="r">
+              <a:buNone/>
               <a:defRPr sz="1125" b="1">
                 <a:solidFill>
                   <a:srgbClr val="526777"/>
@@ -17091,6 +17786,7 @@
               </a:defRPr>
             </a:lvl3pPr>
             <a:lvl4pPr algn="r">
+              <a:buNone/>
               <a:defRPr sz="1125" b="1">
                 <a:solidFill>
                   <a:srgbClr val="526777"/>
@@ -17101,6 +17797,7 @@
               </a:defRPr>
             </a:lvl4pPr>
             <a:lvl5pPr algn="r">
+              <a:buNone/>
               <a:defRPr sz="1125" b="1">
                 <a:solidFill>
                   <a:srgbClr val="526777"/>
@@ -17111,6 +17808,7 @@
               </a:defRPr>
             </a:lvl5pPr>
             <a:lvl6pPr algn="r">
+              <a:buNone/>
               <a:defRPr sz="1125" b="1">
                 <a:solidFill>
                   <a:srgbClr val="526777"/>
@@ -17121,6 +17819,7 @@
               </a:defRPr>
             </a:lvl6pPr>
             <a:lvl7pPr algn="r">
+              <a:buNone/>
               <a:defRPr sz="1125" b="1">
                 <a:solidFill>
                   <a:srgbClr val="526777"/>
@@ -17131,6 +17830,7 @@
               </a:defRPr>
             </a:lvl7pPr>
             <a:lvl8pPr algn="r">
+              <a:buNone/>
               <a:defRPr sz="1125" b="1">
                 <a:solidFill>
                   <a:srgbClr val="526777"/>
@@ -17141,6 +17841,7 @@
               </a:defRPr>
             </a:lvl8pPr>
             <a:lvl9pPr algn="r">
+              <a:buNone/>
               <a:defRPr sz="1125" b="1">
                 <a:solidFill>
                   <a:srgbClr val="526777"/>
@@ -17153,6 +17854,7 @@
           </a:lstStyle>
           <a:p xmlns:a="http://schemas.openxmlformats.org/drawingml/2006/main">
             <a:pPr algn="r">
+              <a:buNone/>
               <a:defRPr sz="1125" b="1">
                 <a:solidFill>
                   <a:srgbClr val="526777"/>
@@ -17253,6 +17955,7 @@
               </a:defRPr>
             </a:defPPr>
             <a:lvl1pPr algn="l">
+              <a:buNone/>
               <a:defRPr sz="1575" b="1">
                 <a:solidFill>
                   <a:srgbClr val="FFFFFF"/>
@@ -17263,6 +17966,7 @@
               </a:defRPr>
             </a:lvl1pPr>
             <a:lvl2pPr algn="l">
+              <a:buNone/>
               <a:defRPr sz="1575" b="1">
                 <a:solidFill>
                   <a:srgbClr val="FFFFFF"/>
@@ -17273,6 +17977,7 @@
               </a:defRPr>
             </a:lvl2pPr>
             <a:lvl3pPr algn="l">
+              <a:buNone/>
               <a:defRPr sz="1575" b="1">
                 <a:solidFill>
                   <a:srgbClr val="FFFFFF"/>
@@ -17283,6 +17988,7 @@
               </a:defRPr>
             </a:lvl3pPr>
             <a:lvl4pPr algn="l">
+              <a:buNone/>
               <a:defRPr sz="1575" b="1">
                 <a:solidFill>
                   <a:srgbClr val="FFFFFF"/>
@@ -17293,6 +17999,7 @@
               </a:defRPr>
             </a:lvl4pPr>
             <a:lvl5pPr algn="l">
+              <a:buNone/>
               <a:defRPr sz="1575" b="1">
                 <a:solidFill>
                   <a:srgbClr val="FFFFFF"/>
@@ -17303,6 +18010,7 @@
               </a:defRPr>
             </a:lvl5pPr>
             <a:lvl6pPr algn="l">
+              <a:buNone/>
               <a:defRPr sz="1575" b="1">
                 <a:solidFill>
                   <a:srgbClr val="FFFFFF"/>
@@ -17313,6 +18021,7 @@
               </a:defRPr>
             </a:lvl6pPr>
             <a:lvl7pPr algn="l">
+              <a:buNone/>
               <a:defRPr sz="1575" b="1">
                 <a:solidFill>
                   <a:srgbClr val="FFFFFF"/>
@@ -17323,6 +18032,7 @@
               </a:defRPr>
             </a:lvl7pPr>
             <a:lvl8pPr algn="l">
+              <a:buNone/>
               <a:defRPr sz="1575" b="1">
                 <a:solidFill>
                   <a:srgbClr val="FFFFFF"/>
@@ -17333,6 +18043,7 @@
               </a:defRPr>
             </a:lvl8pPr>
             <a:lvl9pPr algn="l">
+              <a:buNone/>
               <a:defRPr sz="1575" b="1">
                 <a:solidFill>
                   <a:srgbClr val="FFFFFF"/>
@@ -17345,6 +18056,7 @@
           </a:lstStyle>
           <a:p xmlns:a="http://schemas.openxmlformats.org/drawingml/2006/main">
             <a:pPr algn="l">
+              <a:buNone/>
               <a:defRPr sz="1575" b="1">
                 <a:solidFill>
                   <a:srgbClr val="FFFFFF"/>
@@ -17412,6 +18124,7 @@
               </a:defRPr>
             </a:defPPr>
             <a:lvl1pPr algn="l">
+              <a:buNone/>
               <a:defRPr sz="1425" b="0">
                 <a:solidFill>
                   <a:srgbClr val="D8E7EE"/>
@@ -17422,6 +18135,7 @@
               </a:defRPr>
             </a:lvl1pPr>
             <a:lvl2pPr algn="l">
+              <a:buNone/>
               <a:defRPr sz="1425" b="0">
                 <a:solidFill>
                   <a:srgbClr val="D8E7EE"/>
@@ -17432,6 +18146,7 @@
               </a:defRPr>
             </a:lvl2pPr>
             <a:lvl3pPr algn="l">
+              <a:buNone/>
               <a:defRPr sz="1425" b="0">
                 <a:solidFill>
                   <a:srgbClr val="D8E7EE"/>
@@ -17442,6 +18157,7 @@
               </a:defRPr>
             </a:lvl3pPr>
             <a:lvl4pPr algn="l">
+              <a:buNone/>
               <a:defRPr sz="1425" b="0">
                 <a:solidFill>
                   <a:srgbClr val="D8E7EE"/>
@@ -17452,6 +18168,7 @@
               </a:defRPr>
             </a:lvl4pPr>
             <a:lvl5pPr algn="l">
+              <a:buNone/>
               <a:defRPr sz="1425" b="0">
                 <a:solidFill>
                   <a:srgbClr val="D8E7EE"/>
@@ -17462,6 +18179,7 @@
               </a:defRPr>
             </a:lvl5pPr>
             <a:lvl6pPr algn="l">
+              <a:buNone/>
               <a:defRPr sz="1425" b="0">
                 <a:solidFill>
                   <a:srgbClr val="D8E7EE"/>
@@ -17472,6 +18190,7 @@
               </a:defRPr>
             </a:lvl6pPr>
             <a:lvl7pPr algn="l">
+              <a:buNone/>
               <a:defRPr sz="1425" b="0">
                 <a:solidFill>
                   <a:srgbClr val="D8E7EE"/>
@@ -17482,6 +18201,7 @@
               </a:defRPr>
             </a:lvl7pPr>
             <a:lvl8pPr algn="l">
+              <a:buNone/>
               <a:defRPr sz="1425" b="0">
                 <a:solidFill>
                   <a:srgbClr val="D8E7EE"/>
@@ -17492,6 +18212,7 @@
               </a:defRPr>
             </a:lvl8pPr>
             <a:lvl9pPr algn="l">
+              <a:buNone/>
               <a:defRPr sz="1425" b="0">
                 <a:solidFill>
                   <a:srgbClr val="D8E7EE"/>
@@ -17504,6 +18225,7 @@
           </a:lstStyle>
           <a:p xmlns:a="http://schemas.openxmlformats.org/drawingml/2006/main">
             <a:pPr algn="l">
+              <a:buNone/>
               <a:defRPr sz="1425" b="0">
                 <a:solidFill>
                   <a:srgbClr val="D8E7EE"/>
@@ -17571,6 +18293,7 @@
               </a:defRPr>
             </a:defPPr>
             <a:lvl1pPr algn="l">
+              <a:buNone/>
               <a:defRPr sz="1575" b="1">
                 <a:solidFill>
                   <a:srgbClr val="147D79"/>
@@ -17581,6 +18304,7 @@
               </a:defRPr>
             </a:lvl1pPr>
             <a:lvl2pPr algn="l">
+              <a:buNone/>
               <a:defRPr sz="1575" b="1">
                 <a:solidFill>
                   <a:srgbClr val="147D79"/>
@@ -17591,6 +18315,7 @@
               </a:defRPr>
             </a:lvl2pPr>
             <a:lvl3pPr algn="l">
+              <a:buNone/>
               <a:defRPr sz="1575" b="1">
                 <a:solidFill>
                   <a:srgbClr val="147D79"/>
@@ -17601,6 +18326,7 @@
               </a:defRPr>
             </a:lvl3pPr>
             <a:lvl4pPr algn="l">
+              <a:buNone/>
               <a:defRPr sz="1575" b="1">
                 <a:solidFill>
                   <a:srgbClr val="147D79"/>
@@ -17611,6 +18337,7 @@
               </a:defRPr>
             </a:lvl4pPr>
             <a:lvl5pPr algn="l">
+              <a:buNone/>
               <a:defRPr sz="1575" b="1">
                 <a:solidFill>
                   <a:srgbClr val="147D79"/>
@@ -17621,6 +18348,7 @@
               </a:defRPr>
             </a:lvl5pPr>
             <a:lvl6pPr algn="l">
+              <a:buNone/>
               <a:defRPr sz="1575" b="1">
                 <a:solidFill>
                   <a:srgbClr val="147D79"/>
@@ -17631,6 +18359,7 @@
               </a:defRPr>
             </a:lvl6pPr>
             <a:lvl7pPr algn="l">
+              <a:buNone/>
               <a:defRPr sz="1575" b="1">
                 <a:solidFill>
                   <a:srgbClr val="147D79"/>
@@ -17641,6 +18370,7 @@
               </a:defRPr>
             </a:lvl7pPr>
             <a:lvl8pPr algn="l">
+              <a:buNone/>
               <a:defRPr sz="1575" b="1">
                 <a:solidFill>
                   <a:srgbClr val="147D79"/>
@@ -17651,6 +18381,7 @@
               </a:defRPr>
             </a:lvl8pPr>
             <a:lvl9pPr algn="l">
+              <a:buNone/>
               <a:defRPr sz="1575" b="1">
                 <a:solidFill>
                   <a:srgbClr val="147D79"/>
@@ -17663,6 +18394,7 @@
           </a:lstStyle>
           <a:p xmlns:a="http://schemas.openxmlformats.org/drawingml/2006/main">
             <a:pPr algn="l">
+              <a:buNone/>
               <a:defRPr sz="1575" b="1">
                 <a:solidFill>
                   <a:srgbClr val="147D79"/>
@@ -17681,7 +18413,7 @@
                 <a:ea typeface="Arial"/>
                 <a:cs typeface="Arial"/>
               </a:rPr>
-              <a:t>Swagger: http://localhost:8000/docs</a:t>
+              <a:t>Local Swagger: http://localhost:8000/docs</a:t>
             </a:r>
           </a:p>
         </p:txBody>
@@ -17730,6 +18462,7 @@
               </a:defRPr>
             </a:defPPr>
             <a:lvl1pPr algn="l">
+              <a:buNone/>
               <a:defRPr sz="1725" b="1">
                 <a:solidFill>
                   <a:srgbClr val="102A43"/>
@@ -17740,6 +18473,7 @@
               </a:defRPr>
             </a:lvl1pPr>
             <a:lvl2pPr algn="l">
+              <a:buNone/>
               <a:defRPr sz="1725" b="1">
                 <a:solidFill>
                   <a:srgbClr val="102A43"/>
@@ -17750,6 +18484,7 @@
               </a:defRPr>
             </a:lvl2pPr>
             <a:lvl3pPr algn="l">
+              <a:buNone/>
               <a:defRPr sz="1725" b="1">
                 <a:solidFill>
                   <a:srgbClr val="102A43"/>
@@ -17760,6 +18495,7 @@
               </a:defRPr>
             </a:lvl3pPr>
             <a:lvl4pPr algn="l">
+              <a:buNone/>
               <a:defRPr sz="1725" b="1">
                 <a:solidFill>
                   <a:srgbClr val="102A43"/>
@@ -17770,6 +18506,7 @@
               </a:defRPr>
             </a:lvl4pPr>
             <a:lvl5pPr algn="l">
+              <a:buNone/>
               <a:defRPr sz="1725" b="1">
                 <a:solidFill>
                   <a:srgbClr val="102A43"/>
@@ -17780,6 +18517,7 @@
               </a:defRPr>
             </a:lvl5pPr>
             <a:lvl6pPr algn="l">
+              <a:buNone/>
               <a:defRPr sz="1725" b="1">
                 <a:solidFill>
                   <a:srgbClr val="102A43"/>
@@ -17790,6 +18528,7 @@
               </a:defRPr>
             </a:lvl6pPr>
             <a:lvl7pPr algn="l">
+              <a:buNone/>
               <a:defRPr sz="1725" b="1">
                 <a:solidFill>
                   <a:srgbClr val="102A43"/>
@@ -17800,6 +18539,7 @@
               </a:defRPr>
             </a:lvl7pPr>
             <a:lvl8pPr algn="l">
+              <a:buNone/>
               <a:defRPr sz="1725" b="1">
                 <a:solidFill>
                   <a:srgbClr val="102A43"/>
@@ -17810,6 +18550,7 @@
               </a:defRPr>
             </a:lvl8pPr>
             <a:lvl9pPr algn="l">
+              <a:buNone/>
               <a:defRPr sz="1725" b="1">
                 <a:solidFill>
                   <a:srgbClr val="102A43"/>
@@ -17822,6 +18563,7 @@
           </a:lstStyle>
           <a:p xmlns:a="http://schemas.openxmlformats.org/drawingml/2006/main">
             <a:pPr algn="l">
+              <a:buNone/>
               <a:defRPr sz="1725" b="1">
                 <a:solidFill>
                   <a:srgbClr val="102A43"/>
@@ -17889,6 +18631,7 @@
               </a:defRPr>
             </a:defPPr>
             <a:lvl1pPr algn="l">
+              <a:buNone/>
               <a:defRPr sz="1425" b="0">
                 <a:solidFill>
                   <a:srgbClr val="172B3A"/>
@@ -17899,6 +18642,7 @@
               </a:defRPr>
             </a:lvl1pPr>
             <a:lvl2pPr algn="l">
+              <a:buNone/>
               <a:defRPr sz="1425" b="0">
                 <a:solidFill>
                   <a:srgbClr val="172B3A"/>
@@ -17909,6 +18653,7 @@
               </a:defRPr>
             </a:lvl2pPr>
             <a:lvl3pPr algn="l">
+              <a:buNone/>
               <a:defRPr sz="1425" b="0">
                 <a:solidFill>
                   <a:srgbClr val="172B3A"/>
@@ -17919,6 +18664,7 @@
               </a:defRPr>
             </a:lvl3pPr>
             <a:lvl4pPr algn="l">
+              <a:buNone/>
               <a:defRPr sz="1425" b="0">
                 <a:solidFill>
                   <a:srgbClr val="172B3A"/>
@@ -17929,6 +18675,7 @@
               </a:defRPr>
             </a:lvl4pPr>
             <a:lvl5pPr algn="l">
+              <a:buNone/>
               <a:defRPr sz="1425" b="0">
                 <a:solidFill>
                   <a:srgbClr val="172B3A"/>
@@ -17939,6 +18686,7 @@
               </a:defRPr>
             </a:lvl5pPr>
             <a:lvl6pPr algn="l">
+              <a:buNone/>
               <a:defRPr sz="1425" b="0">
                 <a:solidFill>
                   <a:srgbClr val="172B3A"/>
@@ -17949,6 +18697,7 @@
               </a:defRPr>
             </a:lvl6pPr>
             <a:lvl7pPr algn="l">
+              <a:buNone/>
               <a:defRPr sz="1425" b="0">
                 <a:solidFill>
                   <a:srgbClr val="172B3A"/>
@@ -17959,6 +18708,7 @@
               </a:defRPr>
             </a:lvl7pPr>
             <a:lvl8pPr algn="l">
+              <a:buNone/>
               <a:defRPr sz="1425" b="0">
                 <a:solidFill>
                   <a:srgbClr val="172B3A"/>
@@ -17969,6 +18719,7 @@
               </a:defRPr>
             </a:lvl8pPr>
             <a:lvl9pPr algn="l">
+              <a:buNone/>
               <a:defRPr sz="1425" b="0">
                 <a:solidFill>
                   <a:srgbClr val="172B3A"/>
@@ -17981,6 +18732,7 @@
           </a:lstStyle>
           <a:p xmlns:a="http://schemas.openxmlformats.org/drawingml/2006/main">
             <a:pPr algn="l">
+              <a:buNone/>
               <a:defRPr sz="1425" b="0">
                 <a:solidFill>
                   <a:srgbClr val="172B3A"/>
@@ -18004,6 +18756,7 @@
           </a:p>
           <a:p xmlns:a="http://schemas.openxmlformats.org/drawingml/2006/main">
             <a:pPr algn="l">
+              <a:buNone/>
               <a:defRPr sz="1425" b="0">
                 <a:solidFill>
                   <a:srgbClr val="172B3A"/>
@@ -18027,6 +18780,7 @@
           </a:p>
           <a:p xmlns:a="http://schemas.openxmlformats.org/drawingml/2006/main">
             <a:pPr algn="l">
+              <a:buNone/>
               <a:defRPr sz="1425" b="0">
                 <a:solidFill>
                   <a:srgbClr val="172B3A"/>
@@ -18094,6 +18848,7 @@
               </a:defRPr>
             </a:defPPr>
             <a:lvl1pPr algn="l">
+              <a:buNone/>
               <a:defRPr sz="1725" b="1">
                 <a:solidFill>
                   <a:srgbClr val="102A43"/>
@@ -18104,6 +18859,7 @@
               </a:defRPr>
             </a:lvl1pPr>
             <a:lvl2pPr algn="l">
+              <a:buNone/>
               <a:defRPr sz="1725" b="1">
                 <a:solidFill>
                   <a:srgbClr val="102A43"/>
@@ -18114,6 +18870,7 @@
               </a:defRPr>
             </a:lvl2pPr>
             <a:lvl3pPr algn="l">
+              <a:buNone/>
               <a:defRPr sz="1725" b="1">
                 <a:solidFill>
                   <a:srgbClr val="102A43"/>
@@ -18124,6 +18881,7 @@
               </a:defRPr>
             </a:lvl3pPr>
             <a:lvl4pPr algn="l">
+              <a:buNone/>
               <a:defRPr sz="1725" b="1">
                 <a:solidFill>
                   <a:srgbClr val="102A43"/>
@@ -18134,6 +18892,7 @@
               </a:defRPr>
             </a:lvl4pPr>
             <a:lvl5pPr algn="l">
+              <a:buNone/>
               <a:defRPr sz="1725" b="1">
                 <a:solidFill>
                   <a:srgbClr val="102A43"/>
@@ -18144,6 +18903,7 @@
               </a:defRPr>
             </a:lvl5pPr>
             <a:lvl6pPr algn="l">
+              <a:buNone/>
               <a:defRPr sz="1725" b="1">
                 <a:solidFill>
                   <a:srgbClr val="102A43"/>
@@ -18154,6 +18914,7 @@
               </a:defRPr>
             </a:lvl6pPr>
             <a:lvl7pPr algn="l">
+              <a:buNone/>
               <a:defRPr sz="1725" b="1">
                 <a:solidFill>
                   <a:srgbClr val="102A43"/>
@@ -18164,6 +18925,7 @@
               </a:defRPr>
             </a:lvl7pPr>
             <a:lvl8pPr algn="l">
+              <a:buNone/>
               <a:defRPr sz="1725" b="1">
                 <a:solidFill>
                   <a:srgbClr val="102A43"/>
@@ -18174,6 +18936,7 @@
               </a:defRPr>
             </a:lvl8pPr>
             <a:lvl9pPr algn="l">
+              <a:buNone/>
               <a:defRPr sz="1725" b="1">
                 <a:solidFill>
                   <a:srgbClr val="102A43"/>
@@ -18186,6 +18949,7 @@
           </a:lstStyle>
           <a:p xmlns:a="http://schemas.openxmlformats.org/drawingml/2006/main">
             <a:pPr algn="l">
+              <a:buNone/>
               <a:defRPr sz="1725" b="1">
                 <a:solidFill>
                   <a:srgbClr val="102A43"/>
@@ -18253,6 +19017,7 @@
               </a:defRPr>
             </a:defPPr>
             <a:lvl1pPr algn="l">
+              <a:buNone/>
               <a:defRPr sz="1425" b="0">
                 <a:solidFill>
                   <a:srgbClr val="172B3A"/>
@@ -18263,6 +19028,7 @@
               </a:defRPr>
             </a:lvl1pPr>
             <a:lvl2pPr algn="l">
+              <a:buNone/>
               <a:defRPr sz="1425" b="0">
                 <a:solidFill>
                   <a:srgbClr val="172B3A"/>
@@ -18273,6 +19039,7 @@
               </a:defRPr>
             </a:lvl2pPr>
             <a:lvl3pPr algn="l">
+              <a:buNone/>
               <a:defRPr sz="1425" b="0">
                 <a:solidFill>
                   <a:srgbClr val="172B3A"/>
@@ -18283,6 +19050,7 @@
               </a:defRPr>
             </a:lvl3pPr>
             <a:lvl4pPr algn="l">
+              <a:buNone/>
               <a:defRPr sz="1425" b="0">
                 <a:solidFill>
                   <a:srgbClr val="172B3A"/>
@@ -18293,6 +19061,7 @@
               </a:defRPr>
             </a:lvl4pPr>
             <a:lvl5pPr algn="l">
+              <a:buNone/>
               <a:defRPr sz="1425" b="0">
                 <a:solidFill>
                   <a:srgbClr val="172B3A"/>
@@ -18303,6 +19072,7 @@
               </a:defRPr>
             </a:lvl5pPr>
             <a:lvl6pPr algn="l">
+              <a:buNone/>
               <a:defRPr sz="1425" b="0">
                 <a:solidFill>
                   <a:srgbClr val="172B3A"/>
@@ -18313,6 +19083,7 @@
               </a:defRPr>
             </a:lvl6pPr>
             <a:lvl7pPr algn="l">
+              <a:buNone/>
               <a:defRPr sz="1425" b="0">
                 <a:solidFill>
                   <a:srgbClr val="172B3A"/>
@@ -18323,6 +19094,7 @@
               </a:defRPr>
             </a:lvl7pPr>
             <a:lvl8pPr algn="l">
+              <a:buNone/>
               <a:defRPr sz="1425" b="0">
                 <a:solidFill>
                   <a:srgbClr val="172B3A"/>
@@ -18333,6 +19105,7 @@
               </a:defRPr>
             </a:lvl8pPr>
             <a:lvl9pPr algn="l">
+              <a:buNone/>
               <a:defRPr sz="1425" b="0">
                 <a:solidFill>
                   <a:srgbClr val="172B3A"/>
@@ -18345,6 +19118,7 @@
           </a:lstStyle>
           <a:p xmlns:a="http://schemas.openxmlformats.org/drawingml/2006/main">
             <a:pPr algn="l">
+              <a:buNone/>
               <a:defRPr sz="1425" b="0">
                 <a:solidFill>
                   <a:srgbClr val="172B3A"/>
@@ -18412,6 +19186,7 @@
               </a:defRPr>
             </a:defPPr>
             <a:lvl1pPr algn="l">
+              <a:buNone/>
               <a:defRPr sz="1725" b="1">
                 <a:solidFill>
                   <a:srgbClr val="102A43"/>
@@ -18422,6 +19197,7 @@
               </a:defRPr>
             </a:lvl1pPr>
             <a:lvl2pPr algn="l">
+              <a:buNone/>
               <a:defRPr sz="1725" b="1">
                 <a:solidFill>
                   <a:srgbClr val="102A43"/>
@@ -18432,6 +19208,7 @@
               </a:defRPr>
             </a:lvl2pPr>
             <a:lvl3pPr algn="l">
+              <a:buNone/>
               <a:defRPr sz="1725" b="1">
                 <a:solidFill>
                   <a:srgbClr val="102A43"/>
@@ -18442,6 +19219,7 @@
               </a:defRPr>
             </a:lvl3pPr>
             <a:lvl4pPr algn="l">
+              <a:buNone/>
               <a:defRPr sz="1725" b="1">
                 <a:solidFill>
                   <a:srgbClr val="102A43"/>
@@ -18452,6 +19230,7 @@
               </a:defRPr>
             </a:lvl4pPr>
             <a:lvl5pPr algn="l">
+              <a:buNone/>
               <a:defRPr sz="1725" b="1">
                 <a:solidFill>
                   <a:srgbClr val="102A43"/>
@@ -18462,6 +19241,7 @@
               </a:defRPr>
             </a:lvl5pPr>
             <a:lvl6pPr algn="l">
+              <a:buNone/>
               <a:defRPr sz="1725" b="1">
                 <a:solidFill>
                   <a:srgbClr val="102A43"/>
@@ -18472,6 +19252,7 @@
               </a:defRPr>
             </a:lvl6pPr>
             <a:lvl7pPr algn="l">
+              <a:buNone/>
               <a:defRPr sz="1725" b="1">
                 <a:solidFill>
                   <a:srgbClr val="102A43"/>
@@ -18482,6 +19263,7 @@
               </a:defRPr>
             </a:lvl7pPr>
             <a:lvl8pPr algn="l">
+              <a:buNone/>
               <a:defRPr sz="1725" b="1">
                 <a:solidFill>
                   <a:srgbClr val="102A43"/>
@@ -18492,6 +19274,7 @@
               </a:defRPr>
             </a:lvl8pPr>
             <a:lvl9pPr algn="l">
+              <a:buNone/>
               <a:defRPr sz="1725" b="1">
                 <a:solidFill>
                   <a:srgbClr val="102A43"/>
@@ -18504,6 +19287,7 @@
           </a:lstStyle>
           <a:p xmlns:a="http://schemas.openxmlformats.org/drawingml/2006/main">
             <a:pPr algn="l">
+              <a:buNone/>
               <a:defRPr sz="1725" b="1">
                 <a:solidFill>
                   <a:srgbClr val="102A43"/>
@@ -18571,6 +19355,7 @@
               </a:defRPr>
             </a:defPPr>
             <a:lvl1pPr algn="l">
+              <a:buNone/>
               <a:defRPr sz="1425" b="0">
                 <a:solidFill>
                   <a:srgbClr val="172B3A"/>
@@ -18581,6 +19366,7 @@
               </a:defRPr>
             </a:lvl1pPr>
             <a:lvl2pPr algn="l">
+              <a:buNone/>
               <a:defRPr sz="1425" b="0">
                 <a:solidFill>
                   <a:srgbClr val="172B3A"/>
@@ -18591,6 +19377,7 @@
               </a:defRPr>
             </a:lvl2pPr>
             <a:lvl3pPr algn="l">
+              <a:buNone/>
               <a:defRPr sz="1425" b="0">
                 <a:solidFill>
                   <a:srgbClr val="172B3A"/>
@@ -18601,6 +19388,7 @@
               </a:defRPr>
             </a:lvl3pPr>
             <a:lvl4pPr algn="l">
+              <a:buNone/>
               <a:defRPr sz="1425" b="0">
                 <a:solidFill>
                   <a:srgbClr val="172B3A"/>
@@ -18611,6 +19399,7 @@
               </a:defRPr>
             </a:lvl4pPr>
             <a:lvl5pPr algn="l">
+              <a:buNone/>
               <a:defRPr sz="1425" b="0">
                 <a:solidFill>
                   <a:srgbClr val="172B3A"/>
@@ -18621,6 +19410,7 @@
               </a:defRPr>
             </a:lvl5pPr>
             <a:lvl6pPr algn="l">
+              <a:buNone/>
               <a:defRPr sz="1425" b="0">
                 <a:solidFill>
                   <a:srgbClr val="172B3A"/>
@@ -18631,6 +19421,7 @@
               </a:defRPr>
             </a:lvl6pPr>
             <a:lvl7pPr algn="l">
+              <a:buNone/>
               <a:defRPr sz="1425" b="0">
                 <a:solidFill>
                   <a:srgbClr val="172B3A"/>
@@ -18641,6 +19432,7 @@
               </a:defRPr>
             </a:lvl7pPr>
             <a:lvl8pPr algn="l">
+              <a:buNone/>
               <a:defRPr sz="1425" b="0">
                 <a:solidFill>
                   <a:srgbClr val="172B3A"/>
@@ -18651,6 +19443,7 @@
               </a:defRPr>
             </a:lvl8pPr>
             <a:lvl9pPr algn="l">
+              <a:buNone/>
               <a:defRPr sz="1425" b="0">
                 <a:solidFill>
                   <a:srgbClr val="172B3A"/>
@@ -18663,6 +19456,7 @@
           </a:lstStyle>
           <a:p xmlns:a="http://schemas.openxmlformats.org/drawingml/2006/main">
             <a:pPr algn="l">
+              <a:buNone/>
               <a:defRPr sz="1425" b="0">
                 <a:solidFill>
                   <a:srgbClr val="172B3A"/>
@@ -18763,6 +19557,7 @@
               </a:defRPr>
             </a:defPPr>
             <a:lvl1pPr algn="ctr">
+              <a:buNone/>
               <a:defRPr sz="1425" b="1">
                 <a:solidFill>
                   <a:srgbClr val="102A43"/>
@@ -18773,6 +19568,7 @@
               </a:defRPr>
             </a:lvl1pPr>
             <a:lvl2pPr algn="ctr">
+              <a:buNone/>
               <a:defRPr sz="1425" b="1">
                 <a:solidFill>
                   <a:srgbClr val="102A43"/>
@@ -18783,6 +19579,7 @@
               </a:defRPr>
             </a:lvl2pPr>
             <a:lvl3pPr algn="ctr">
+              <a:buNone/>
               <a:defRPr sz="1425" b="1">
                 <a:solidFill>
                   <a:srgbClr val="102A43"/>
@@ -18793,6 +19590,7 @@
               </a:defRPr>
             </a:lvl3pPr>
             <a:lvl4pPr algn="ctr">
+              <a:buNone/>
               <a:defRPr sz="1425" b="1">
                 <a:solidFill>
                   <a:srgbClr val="102A43"/>
@@ -18803,6 +19601,7 @@
               </a:defRPr>
             </a:lvl4pPr>
             <a:lvl5pPr algn="ctr">
+              <a:buNone/>
               <a:defRPr sz="1425" b="1">
                 <a:solidFill>
                   <a:srgbClr val="102A43"/>
@@ -18813,6 +19612,7 @@
               </a:defRPr>
             </a:lvl5pPr>
             <a:lvl6pPr algn="ctr">
+              <a:buNone/>
               <a:defRPr sz="1425" b="1">
                 <a:solidFill>
                   <a:srgbClr val="102A43"/>
@@ -18823,6 +19623,7 @@
               </a:defRPr>
             </a:lvl6pPr>
             <a:lvl7pPr algn="ctr">
+              <a:buNone/>
               <a:defRPr sz="1425" b="1">
                 <a:solidFill>
                   <a:srgbClr val="102A43"/>
@@ -18833,6 +19634,7 @@
               </a:defRPr>
             </a:lvl7pPr>
             <a:lvl8pPr algn="ctr">
+              <a:buNone/>
               <a:defRPr sz="1425" b="1">
                 <a:solidFill>
                   <a:srgbClr val="102A43"/>
@@ -18843,6 +19645,7 @@
               </a:defRPr>
             </a:lvl8pPr>
             <a:lvl9pPr algn="ctr">
+              <a:buNone/>
               <a:defRPr sz="1425" b="1">
                 <a:solidFill>
                   <a:srgbClr val="102A43"/>
@@ -18855,6 +19658,7 @@
           </a:lstStyle>
           <a:p xmlns:a="http://schemas.openxmlformats.org/drawingml/2006/main">
             <a:pPr algn="ctr">
+              <a:buNone/>
               <a:defRPr sz="1425" b="1">
                 <a:solidFill>
                   <a:srgbClr val="102A43"/>
@@ -18873,7 +19677,7 @@
                 <a:ea typeface="Arial"/>
                 <a:cs typeface="Arial"/>
               </a:rPr>
-              <a:t>Tests use in-memory SQLite. Local app uses Docker MySQL. Public deployment is still a separate step.</a:t>
+              <a:t>Live Swagger: https://task-management-system-api-lkwx.onrender.com/docs</a:t>
             </a:r>
           </a:p>
         </p:txBody>
